--- a/2026/2026-03-13-AI-Updates.pptx
+++ b/2026/2026-03-13-AI-Updates.pptx
@@ -5,7 +5,7 @@
     <p:sldMasterId id="2147483661" r:id="rId1"/>
   </p:sldMasterIdLst>
   <p:notesMasterIdLst>
-    <p:notesMasterId r:id="rId32"/>
+    <p:notesMasterId r:id="rId35"/>
   </p:notesMasterIdLst>
   <p:sldIdLst>
     <p:sldId id="256" r:id="rId2"/>
@@ -38,16 +38,19 @@
     <p:sldId id="283" r:id="rId29"/>
     <p:sldId id="284" r:id="rId30"/>
     <p:sldId id="285" r:id="rId31"/>
+    <p:sldId id="286" r:id="rId32"/>
+    <p:sldId id="287" r:id="rId33"/>
+    <p:sldId id="288" r:id="rId34"/>
   </p:sldIdLst>
   <p:sldSz cx="9144000" cy="5143500" type="screen16x9"/>
   <p:notesSz cx="6858000" cy="9144000"/>
   <p:embeddedFontLst>
     <p:embeddedFont>
       <p:font typeface="Roboto Mono" pitchFamily="49" charset="0"/>
-      <p:regular r:id="rId33"/>
-      <p:bold r:id="rId34"/>
-      <p:italic r:id="rId35"/>
-      <p:boldItalic r:id="rId36"/>
+      <p:regular r:id="rId36"/>
+      <p:bold r:id="rId37"/>
+      <p:italic r:id="rId38"/>
+      <p:boldItalic r:id="rId39"/>
     </p:embeddedFont>
   </p:embeddedFontLst>
   <p:defaultTextStyle>
@@ -988,7 +991,7 @@
   <p:cSld>
     <p:spTree>
       <p:nvGrpSpPr>
-        <p:cNvPr id="1" name="Shape 131"/>
+        <p:cNvPr id="1" name="Shape 139"/>
         <p:cNvGrpSpPr/>
         <p:nvPr/>
       </p:nvGrpSpPr>
@@ -1002,7 +1005,7 @@
       </p:grpSpPr>
       <p:sp>
         <p:nvSpPr>
-          <p:cNvPr id="132" name="Google Shape;132;g3cd53ce4837_0_0:notes"/>
+          <p:cNvPr id="140" name="Google Shape;140;g3cd53ce4837_0_0:notes"/>
           <p:cNvSpPr>
             <a:spLocks noGrp="1" noRot="1" noChangeAspect="1"/>
           </p:cNvSpPr>
@@ -1053,7 +1056,7 @@
       </p:sp>
       <p:sp>
         <p:nvSpPr>
-          <p:cNvPr id="133" name="Google Shape;133;g3cd53ce4837_0_0:notes"/>
+          <p:cNvPr id="141" name="Google Shape;141;g3cd53ce4837_0_0:notes"/>
           <p:cNvSpPr txBox="1">
             <a:spLocks noGrp="1"/>
           </p:cNvSpPr>
@@ -1110,7 +1113,7 @@
   <p:cSld>
     <p:spTree>
       <p:nvGrpSpPr>
-        <p:cNvPr id="1" name="Shape 140"/>
+        <p:cNvPr id="1" name="Shape 148"/>
         <p:cNvGrpSpPr/>
         <p:nvPr/>
       </p:nvGrpSpPr>
@@ -1124,7 +1127,7 @@
       </p:grpSpPr>
       <p:sp>
         <p:nvSpPr>
-          <p:cNvPr id="141" name="Google Shape;141;g395736e1bce_1_0:notes"/>
+          <p:cNvPr id="149" name="Google Shape;149;g395736e1bce_1_0:notes"/>
           <p:cNvSpPr>
             <a:spLocks noGrp="1" noRot="1" noChangeAspect="1"/>
           </p:cNvSpPr>
@@ -1175,7 +1178,7 @@
       </p:sp>
       <p:sp>
         <p:nvSpPr>
-          <p:cNvPr id="142" name="Google Shape;142;g395736e1bce_1_0:notes"/>
+          <p:cNvPr id="150" name="Google Shape;150;g395736e1bce_1_0:notes"/>
           <p:cNvSpPr txBox="1">
             <a:spLocks noGrp="1"/>
           </p:cNvSpPr>
@@ -1232,7 +1235,7 @@
   <p:cSld>
     <p:spTree>
       <p:nvGrpSpPr>
-        <p:cNvPr id="1" name="Shape 147"/>
+        <p:cNvPr id="1" name="Shape 156"/>
         <p:cNvGrpSpPr/>
         <p:nvPr/>
       </p:nvGrpSpPr>
@@ -1246,7 +1249,7 @@
       </p:grpSpPr>
       <p:sp>
         <p:nvSpPr>
-          <p:cNvPr id="148" name="Google Shape;148;g3ce3012afcb_0_12:notes"/>
+          <p:cNvPr id="157" name="Google Shape;157;g3ce3012afcb_0_12:notes"/>
           <p:cNvSpPr>
             <a:spLocks noGrp="1" noRot="1" noChangeAspect="1"/>
           </p:cNvSpPr>
@@ -1297,7 +1300,7 @@
       </p:sp>
       <p:sp>
         <p:nvSpPr>
-          <p:cNvPr id="149" name="Google Shape;149;g3ce3012afcb_0_12:notes"/>
+          <p:cNvPr id="158" name="Google Shape;158;g3ce3012afcb_0_12:notes"/>
           <p:cNvSpPr txBox="1">
             <a:spLocks noGrp="1"/>
           </p:cNvSpPr>
@@ -1354,7 +1357,7 @@
   <p:cSld>
     <p:spTree>
       <p:nvGrpSpPr>
-        <p:cNvPr id="1" name="Shape 157"/>
+        <p:cNvPr id="1" name="Shape 166"/>
         <p:cNvGrpSpPr/>
         <p:nvPr/>
       </p:nvGrpSpPr>
@@ -1368,7 +1371,7 @@
       </p:grpSpPr>
       <p:sp>
         <p:nvSpPr>
-          <p:cNvPr id="158" name="Google Shape;158;g3ce3012afcb_1_0:notes"/>
+          <p:cNvPr id="167" name="Google Shape;167;g3ce3012afcb_1_0:notes"/>
           <p:cNvSpPr>
             <a:spLocks noGrp="1" noRot="1" noChangeAspect="1"/>
           </p:cNvSpPr>
@@ -1419,7 +1422,7 @@
       </p:sp>
       <p:sp>
         <p:nvSpPr>
-          <p:cNvPr id="159" name="Google Shape;159;g3ce3012afcb_1_0:notes"/>
+          <p:cNvPr id="168" name="Google Shape;168;g3ce3012afcb_1_0:notes"/>
           <p:cNvSpPr txBox="1">
             <a:spLocks noGrp="1"/>
           </p:cNvSpPr>
@@ -1476,7 +1479,7 @@
   <p:cSld>
     <p:spTree>
       <p:nvGrpSpPr>
-        <p:cNvPr id="1" name="Shape 163"/>
+        <p:cNvPr id="1" name="Shape 173"/>
         <p:cNvGrpSpPr/>
         <p:nvPr/>
       </p:nvGrpSpPr>
@@ -1490,7 +1493,7 @@
       </p:grpSpPr>
       <p:sp>
         <p:nvSpPr>
-          <p:cNvPr id="164" name="Google Shape;164;g3ce3012afcb_1_10:notes"/>
+          <p:cNvPr id="174" name="Google Shape;174;g3ce3012afcb_1_10:notes"/>
           <p:cNvSpPr>
             <a:spLocks noGrp="1" noRot="1" noChangeAspect="1"/>
           </p:cNvSpPr>
@@ -1541,7 +1544,7 @@
       </p:sp>
       <p:sp>
         <p:nvSpPr>
-          <p:cNvPr id="165" name="Google Shape;165;g3ce3012afcb_1_10:notes"/>
+          <p:cNvPr id="175" name="Google Shape;175;g3ce3012afcb_1_10:notes"/>
           <p:cNvSpPr txBox="1">
             <a:spLocks noGrp="1"/>
           </p:cNvSpPr>
@@ -1598,7 +1601,7 @@
   <p:cSld>
     <p:spTree>
       <p:nvGrpSpPr>
-        <p:cNvPr id="1" name="Shape 172"/>
+        <p:cNvPr id="1" name="Shape 182"/>
         <p:cNvGrpSpPr/>
         <p:nvPr/>
       </p:nvGrpSpPr>
@@ -1612,7 +1615,7 @@
       </p:grpSpPr>
       <p:sp>
         <p:nvSpPr>
-          <p:cNvPr id="173" name="Google Shape;173;g3ce3012afcb_1_37:notes"/>
+          <p:cNvPr id="183" name="Google Shape;183;g3ce3012afcb_1_37:notes"/>
           <p:cNvSpPr>
             <a:spLocks noGrp="1" noRot="1" noChangeAspect="1"/>
           </p:cNvSpPr>
@@ -1663,7 +1666,7 @@
       </p:sp>
       <p:sp>
         <p:nvSpPr>
-          <p:cNvPr id="174" name="Google Shape;174;g3ce3012afcb_1_37:notes"/>
+          <p:cNvPr id="184" name="Google Shape;184;g3ce3012afcb_1_37:notes"/>
           <p:cNvSpPr txBox="1">
             <a:spLocks noGrp="1"/>
           </p:cNvSpPr>
@@ -1720,7 +1723,7 @@
   <p:cSld>
     <p:spTree>
       <p:nvGrpSpPr>
-        <p:cNvPr id="1" name="Shape 178"/>
+        <p:cNvPr id="1" name="Shape 189"/>
         <p:cNvGrpSpPr/>
         <p:nvPr/>
       </p:nvGrpSpPr>
@@ -1734,7 +1737,7 @@
       </p:grpSpPr>
       <p:sp>
         <p:nvSpPr>
-          <p:cNvPr id="179" name="Google Shape;179;g3ce66c1ba34_0_74:notes"/>
+          <p:cNvPr id="190" name="Google Shape;190;g3ce66c1ba34_0_74:notes"/>
           <p:cNvSpPr>
             <a:spLocks noGrp="1" noRot="1" noChangeAspect="1"/>
           </p:cNvSpPr>
@@ -1785,7 +1788,7 @@
       </p:sp>
       <p:sp>
         <p:nvSpPr>
-          <p:cNvPr id="180" name="Google Shape;180;g3ce66c1ba34_0_74:notes"/>
+          <p:cNvPr id="191" name="Google Shape;191;g3ce66c1ba34_0_74:notes"/>
           <p:cNvSpPr txBox="1">
             <a:spLocks noGrp="1"/>
           </p:cNvSpPr>
@@ -1842,7 +1845,7 @@
   <p:cSld>
     <p:spTree>
       <p:nvGrpSpPr>
-        <p:cNvPr id="1" name="Shape 184"/>
+        <p:cNvPr id="1" name="Shape 196"/>
         <p:cNvGrpSpPr/>
         <p:nvPr/>
       </p:nvGrpSpPr>
@@ -1856,7 +1859,7 @@
       </p:grpSpPr>
       <p:sp>
         <p:nvSpPr>
-          <p:cNvPr id="185" name="Google Shape;185;g3ce3012afcb_1_43:notes"/>
+          <p:cNvPr id="197" name="Google Shape;197;g3ce3012afcb_1_43:notes"/>
           <p:cNvSpPr>
             <a:spLocks noGrp="1" noRot="1" noChangeAspect="1"/>
           </p:cNvSpPr>
@@ -1907,7 +1910,7 @@
       </p:sp>
       <p:sp>
         <p:nvSpPr>
-          <p:cNvPr id="186" name="Google Shape;186;g3ce3012afcb_1_43:notes"/>
+          <p:cNvPr id="198" name="Google Shape;198;g3ce3012afcb_1_43:notes"/>
           <p:cNvSpPr txBox="1">
             <a:spLocks noGrp="1"/>
           </p:cNvSpPr>
@@ -1964,7 +1967,7 @@
   <p:cSld>
     <p:spTree>
       <p:nvGrpSpPr>
-        <p:cNvPr id="1" name="Shape 191"/>
+        <p:cNvPr id="1" name="Shape 203"/>
         <p:cNvGrpSpPr/>
         <p:nvPr/>
       </p:nvGrpSpPr>
@@ -1978,7 +1981,7 @@
       </p:grpSpPr>
       <p:sp>
         <p:nvSpPr>
-          <p:cNvPr id="192" name="Google Shape;192;g395d23f480e_0_0:notes"/>
+          <p:cNvPr id="204" name="Google Shape;204;g395d23f480e_0_0:notes"/>
           <p:cNvSpPr>
             <a:spLocks noGrp="1" noRot="1" noChangeAspect="1"/>
           </p:cNvSpPr>
@@ -2029,7 +2032,7 @@
       </p:sp>
       <p:sp>
         <p:nvSpPr>
-          <p:cNvPr id="193" name="Google Shape;193;g395d23f480e_0_0:notes"/>
+          <p:cNvPr id="205" name="Google Shape;205;g395d23f480e_0_0:notes"/>
           <p:cNvSpPr txBox="1">
             <a:spLocks noGrp="1"/>
           </p:cNvSpPr>
@@ -2086,7 +2089,7 @@
   <p:cSld>
     <p:spTree>
       <p:nvGrpSpPr>
-        <p:cNvPr id="1" name="Shape 198"/>
+        <p:cNvPr id="1" name="Shape 210"/>
         <p:cNvGrpSpPr/>
         <p:nvPr/>
       </p:nvGrpSpPr>
@@ -2100,7 +2103,7 @@
       </p:grpSpPr>
       <p:sp>
         <p:nvSpPr>
-          <p:cNvPr id="199" name="Google Shape;199;g395d3a8fcf6_0_0:notes"/>
+          <p:cNvPr id="211" name="Google Shape;211;g395d3a8fcf6_0_0:notes"/>
           <p:cNvSpPr>
             <a:spLocks noGrp="1" noRot="1" noChangeAspect="1"/>
           </p:cNvSpPr>
@@ -2151,7 +2154,7 @@
       </p:sp>
       <p:sp>
         <p:nvSpPr>
-          <p:cNvPr id="200" name="Google Shape;200;g395d3a8fcf6_0_0:notes"/>
+          <p:cNvPr id="212" name="Google Shape;212;g395d3a8fcf6_0_0:notes"/>
           <p:cNvSpPr txBox="1">
             <a:spLocks noGrp="1"/>
           </p:cNvSpPr>
@@ -2330,7 +2333,7 @@
   <p:cSld>
     <p:spTree>
       <p:nvGrpSpPr>
-        <p:cNvPr id="1" name="Shape 205"/>
+        <p:cNvPr id="1" name="Shape 217"/>
         <p:cNvGrpSpPr/>
         <p:nvPr/>
       </p:nvGrpSpPr>
@@ -2344,7 +2347,7 @@
       </p:grpSpPr>
       <p:sp>
         <p:nvSpPr>
-          <p:cNvPr id="206" name="Google Shape;206;g395d3a8fcf6_0_5:notes"/>
+          <p:cNvPr id="218" name="Google Shape;218;g395d3a8fcf6_0_5:notes"/>
           <p:cNvSpPr>
             <a:spLocks noGrp="1" noRot="1" noChangeAspect="1"/>
           </p:cNvSpPr>
@@ -2395,7 +2398,7 @@
       </p:sp>
       <p:sp>
         <p:nvSpPr>
-          <p:cNvPr id="207" name="Google Shape;207;g395d3a8fcf6_0_5:notes"/>
+          <p:cNvPr id="219" name="Google Shape;219;g395d3a8fcf6_0_5:notes"/>
           <p:cNvSpPr txBox="1">
             <a:spLocks noGrp="1"/>
           </p:cNvSpPr>
@@ -2452,7 +2455,7 @@
   <p:cSld>
     <p:spTree>
       <p:nvGrpSpPr>
-        <p:cNvPr id="1" name="Shape 213"/>
+        <p:cNvPr id="1" name="Shape 225"/>
         <p:cNvGrpSpPr/>
         <p:nvPr/>
       </p:nvGrpSpPr>
@@ -2466,7 +2469,7 @@
       </p:grpSpPr>
       <p:sp>
         <p:nvSpPr>
-          <p:cNvPr id="214" name="Google Shape;214;g3cdf4e6dde4_0_0:notes"/>
+          <p:cNvPr id="226" name="Google Shape;226;g3cdf4e6dde4_0_0:notes"/>
           <p:cNvSpPr>
             <a:spLocks noGrp="1" noRot="1" noChangeAspect="1"/>
           </p:cNvSpPr>
@@ -2517,7 +2520,7 @@
       </p:sp>
       <p:sp>
         <p:nvSpPr>
-          <p:cNvPr id="215" name="Google Shape;215;g3cdf4e6dde4_0_0:notes"/>
+          <p:cNvPr id="227" name="Google Shape;227;g3cdf4e6dde4_0_0:notes"/>
           <p:cNvSpPr txBox="1">
             <a:spLocks noGrp="1"/>
           </p:cNvSpPr>
@@ -2574,7 +2577,7 @@
   <p:cSld>
     <p:spTree>
       <p:nvGrpSpPr>
-        <p:cNvPr id="1" name="Shape 220"/>
+        <p:cNvPr id="1" name="Shape 232"/>
         <p:cNvGrpSpPr/>
         <p:nvPr/>
       </p:nvGrpSpPr>
@@ -2588,7 +2591,7 @@
       </p:grpSpPr>
       <p:sp>
         <p:nvSpPr>
-          <p:cNvPr id="221" name="Google Shape;221;g3ce66c1ba34_0_0:notes"/>
+          <p:cNvPr id="233" name="Google Shape;233;g3ce66c1ba34_0_0:notes"/>
           <p:cNvSpPr>
             <a:spLocks noGrp="1" noRot="1" noChangeAspect="1"/>
           </p:cNvSpPr>
@@ -2639,7 +2642,7 @@
       </p:sp>
       <p:sp>
         <p:nvSpPr>
-          <p:cNvPr id="222" name="Google Shape;222;g3ce66c1ba34_0_0:notes"/>
+          <p:cNvPr id="234" name="Google Shape;234;g3ce66c1ba34_0_0:notes"/>
           <p:cNvSpPr txBox="1">
             <a:spLocks noGrp="1"/>
           </p:cNvSpPr>
@@ -2696,7 +2699,7 @@
   <p:cSld>
     <p:spTree>
       <p:nvGrpSpPr>
-        <p:cNvPr id="1" name="Shape 228"/>
+        <p:cNvPr id="1" name="Shape 242"/>
         <p:cNvGrpSpPr/>
         <p:nvPr/>
       </p:nvGrpSpPr>
@@ -2710,7 +2713,7 @@
       </p:grpSpPr>
       <p:sp>
         <p:nvSpPr>
-          <p:cNvPr id="229" name="Google Shape;229;g3ce3012afcb_1_18:notes"/>
+          <p:cNvPr id="243" name="Google Shape;243;g3ce3012afcb_1_18:notes"/>
           <p:cNvSpPr>
             <a:spLocks noGrp="1" noRot="1" noChangeAspect="1"/>
           </p:cNvSpPr>
@@ -2761,7 +2764,7 @@
       </p:sp>
       <p:sp>
         <p:nvSpPr>
-          <p:cNvPr id="230" name="Google Shape;230;g3ce3012afcb_1_18:notes"/>
+          <p:cNvPr id="244" name="Google Shape;244;g3ce3012afcb_1_18:notes"/>
           <p:cNvSpPr txBox="1">
             <a:spLocks noGrp="1"/>
           </p:cNvSpPr>
@@ -2818,7 +2821,7 @@
   <p:cSld>
     <p:spTree>
       <p:nvGrpSpPr>
-        <p:cNvPr id="1" name="Shape 236"/>
+        <p:cNvPr id="1" name="Shape 250"/>
         <p:cNvGrpSpPr/>
         <p:nvPr/>
       </p:nvGrpSpPr>
@@ -2832,7 +2835,7 @@
       </p:grpSpPr>
       <p:sp>
         <p:nvSpPr>
-          <p:cNvPr id="237" name="Google Shape;237;g3cdf4e6dde4_0_6:notes"/>
+          <p:cNvPr id="251" name="Google Shape;251;g3cdf4e6dde4_0_6:notes"/>
           <p:cNvSpPr>
             <a:spLocks noGrp="1" noRot="1" noChangeAspect="1"/>
           </p:cNvSpPr>
@@ -2883,7 +2886,7 @@
       </p:sp>
       <p:sp>
         <p:nvSpPr>
-          <p:cNvPr id="238" name="Google Shape;238;g3cdf4e6dde4_0_6:notes"/>
+          <p:cNvPr id="252" name="Google Shape;252;g3cdf4e6dde4_0_6:notes"/>
           <p:cNvSpPr txBox="1">
             <a:spLocks noGrp="1"/>
           </p:cNvSpPr>
@@ -2940,7 +2943,7 @@
   <p:cSld>
     <p:spTree>
       <p:nvGrpSpPr>
-        <p:cNvPr id="1" name="Shape 245"/>
+        <p:cNvPr id="1" name="Shape 259"/>
         <p:cNvGrpSpPr/>
         <p:nvPr/>
       </p:nvGrpSpPr>
@@ -2954,7 +2957,7 @@
       </p:grpSpPr>
       <p:sp>
         <p:nvSpPr>
-          <p:cNvPr id="246" name="Google Shape;246;g3cdf853e001_0_1:notes"/>
+          <p:cNvPr id="260" name="Google Shape;260;g3cdf853e001_0_1:notes"/>
           <p:cNvSpPr>
             <a:spLocks noGrp="1" noRot="1" noChangeAspect="1"/>
           </p:cNvSpPr>
@@ -3005,7 +3008,7 @@
       </p:sp>
       <p:sp>
         <p:nvSpPr>
-          <p:cNvPr id="247" name="Google Shape;247;g3cdf853e001_0_1:notes"/>
+          <p:cNvPr id="261" name="Google Shape;261;g3cdf853e001_0_1:notes"/>
           <p:cNvSpPr txBox="1">
             <a:spLocks noGrp="1"/>
           </p:cNvSpPr>
@@ -3062,7 +3065,7 @@
   <p:cSld>
     <p:spTree>
       <p:nvGrpSpPr>
-        <p:cNvPr id="1" name="Shape 252"/>
+        <p:cNvPr id="1" name="Shape 268"/>
         <p:cNvGrpSpPr/>
         <p:nvPr/>
       </p:nvGrpSpPr>
@@ -3076,7 +3079,7 @@
       </p:grpSpPr>
       <p:sp>
         <p:nvSpPr>
-          <p:cNvPr id="253" name="Google Shape;253;g3cd53ce4837_0_5:notes"/>
+          <p:cNvPr id="269" name="Google Shape;269;g3cd53ce4837_0_5:notes"/>
           <p:cNvSpPr>
             <a:spLocks noGrp="1" noRot="1" noChangeAspect="1"/>
           </p:cNvSpPr>
@@ -3127,7 +3130,7 @@
       </p:sp>
       <p:sp>
         <p:nvSpPr>
-          <p:cNvPr id="254" name="Google Shape;254;g3cd53ce4837_0_5:notes"/>
+          <p:cNvPr id="270" name="Google Shape;270;g3cd53ce4837_0_5:notes"/>
           <p:cNvSpPr txBox="1">
             <a:spLocks noGrp="1"/>
           </p:cNvSpPr>
@@ -3184,7 +3187,7 @@
   <p:cSld>
     <p:spTree>
       <p:nvGrpSpPr>
-        <p:cNvPr id="1" name="Shape 260"/>
+        <p:cNvPr id="1" name="Shape 276"/>
         <p:cNvGrpSpPr/>
         <p:nvPr/>
       </p:nvGrpSpPr>
@@ -3198,7 +3201,7 @@
       </p:grpSpPr>
       <p:sp>
         <p:nvSpPr>
-          <p:cNvPr id="261" name="Google Shape;261;g3cdf853e001_0_16:notes"/>
+          <p:cNvPr id="277" name="Google Shape;277;g3cdf853e001_0_16:notes"/>
           <p:cNvSpPr>
             <a:spLocks noGrp="1" noRot="1" noChangeAspect="1"/>
           </p:cNvSpPr>
@@ -3249,7 +3252,7 @@
       </p:sp>
       <p:sp>
         <p:nvSpPr>
-          <p:cNvPr id="262" name="Google Shape;262;g3cdf853e001_0_16:notes"/>
+          <p:cNvPr id="278" name="Google Shape;278;g3cdf853e001_0_16:notes"/>
           <p:cNvSpPr txBox="1">
             <a:spLocks noGrp="1"/>
           </p:cNvSpPr>
@@ -3306,7 +3309,7 @@
   <p:cSld>
     <p:spTree>
       <p:nvGrpSpPr>
-        <p:cNvPr id="1" name="Shape 267"/>
+        <p:cNvPr id="1" name="Shape 285"/>
         <p:cNvGrpSpPr/>
         <p:nvPr/>
       </p:nvGrpSpPr>
@@ -3320,7 +3323,7 @@
       </p:grpSpPr>
       <p:sp>
         <p:nvSpPr>
-          <p:cNvPr id="268" name="Google Shape;268;p23:notes"/>
+          <p:cNvPr id="286" name="Google Shape;286;g3cea6ed6682_0_0:notes"/>
           <p:cNvSpPr>
             <a:spLocks noGrp="1" noRot="1" noChangeAspect="1"/>
           </p:cNvSpPr>
@@ -3371,7 +3374,7 @@
       </p:sp>
       <p:sp>
         <p:nvSpPr>
-          <p:cNvPr id="269" name="Google Shape;269;p23:notes"/>
+          <p:cNvPr id="287" name="Google Shape;287;g3cea6ed6682_0_0:notes"/>
           <p:cNvSpPr txBox="1">
             <a:spLocks noGrp="1"/>
           </p:cNvSpPr>
@@ -3428,7 +3431,7 @@
   <p:cSld>
     <p:spTree>
       <p:nvGrpSpPr>
-        <p:cNvPr id="1" name="Shape 277"/>
+        <p:cNvPr id="1" name="Shape 292"/>
         <p:cNvGrpSpPr/>
         <p:nvPr/>
       </p:nvGrpSpPr>
@@ -3442,7 +3445,7 @@
       </p:grpSpPr>
       <p:sp>
         <p:nvSpPr>
-          <p:cNvPr id="278" name="Google Shape;278;p24:notes"/>
+          <p:cNvPr id="293" name="Google Shape;293;g3cec1b0fe86_0_0:notes"/>
           <p:cNvSpPr>
             <a:spLocks noGrp="1" noRot="1" noChangeAspect="1"/>
           </p:cNvSpPr>
@@ -3493,7 +3496,7 @@
       </p:sp>
       <p:sp>
         <p:nvSpPr>
-          <p:cNvPr id="279" name="Google Shape;279;p24:notes"/>
+          <p:cNvPr id="294" name="Google Shape;294;g3cec1b0fe86_0_0:notes"/>
           <p:cNvSpPr txBox="1">
             <a:spLocks noGrp="1"/>
           </p:cNvSpPr>
@@ -3672,7 +3675,7 @@
   <p:cSld>
     <p:spTree>
       <p:nvGrpSpPr>
-        <p:cNvPr id="1" name="Shape 287"/>
+        <p:cNvPr id="1" name="Shape 300"/>
         <p:cNvGrpSpPr/>
         <p:nvPr/>
       </p:nvGrpSpPr>
@@ -3686,7 +3689,373 @@
       </p:grpSpPr>
       <p:sp>
         <p:nvSpPr>
-          <p:cNvPr id="288" name="Google Shape;288;p25:notes"/>
+          <p:cNvPr id="301" name="Google Shape;301;g3cea6ed6682_2_0:notes"/>
+          <p:cNvSpPr>
+            <a:spLocks noGrp="1" noRot="1" noChangeAspect="1"/>
+          </p:cNvSpPr>
+          <p:nvPr>
+            <p:ph type="sldImg" idx="2"/>
+          </p:nvPr>
+        </p:nvSpPr>
+        <p:spPr>
+          <a:xfrm>
+            <a:off x="381000" y="685800"/>
+            <a:ext cx="6096000" cy="3429000"/>
+          </a:xfrm>
+          <a:custGeom>
+            <a:avLst/>
+            <a:gdLst/>
+            <a:ahLst/>
+            <a:cxnLst/>
+            <a:rect l="l" t="t" r="r" b="b"/>
+            <a:pathLst>
+              <a:path w="120000" h="120000" extrusionOk="0">
+                <a:moveTo>
+                  <a:pt x="0" y="0"/>
+                </a:moveTo>
+                <a:lnTo>
+                  <a:pt x="120000" y="0"/>
+                </a:lnTo>
+                <a:lnTo>
+                  <a:pt x="120000" y="120000"/>
+                </a:lnTo>
+                <a:lnTo>
+                  <a:pt x="0" y="120000"/>
+                </a:lnTo>
+                <a:close/>
+              </a:path>
+            </a:pathLst>
+          </a:custGeom>
+          <a:noFill/>
+          <a:ln w="9525" cap="flat" cmpd="sng">
+            <a:solidFill>
+              <a:srgbClr val="000000"/>
+            </a:solidFill>
+            <a:prstDash val="solid"/>
+            <a:round/>
+            <a:headEnd type="none" w="sm" len="sm"/>
+            <a:tailEnd type="none" w="sm" len="sm"/>
+          </a:ln>
+        </p:spPr>
+      </p:sp>
+      <p:sp>
+        <p:nvSpPr>
+          <p:cNvPr id="302" name="Google Shape;302;g3cea6ed6682_2_0:notes"/>
+          <p:cNvSpPr txBox="1">
+            <a:spLocks noGrp="1"/>
+          </p:cNvSpPr>
+          <p:nvPr>
+            <p:ph type="body" idx="1"/>
+          </p:nvPr>
+        </p:nvSpPr>
+        <p:spPr>
+          <a:xfrm>
+            <a:off x="685800" y="4343400"/>
+            <a:ext cx="5486400" cy="4114800"/>
+          </a:xfrm>
+          <a:prstGeom prst="rect">
+            <a:avLst/>
+          </a:prstGeom>
+          <a:noFill/>
+          <a:ln>
+            <a:noFill/>
+          </a:ln>
+        </p:spPr>
+        <p:txBody>
+          <a:bodyPr spcFirstLastPara="1" wrap="square" lIns="91425" tIns="91425" rIns="91425" bIns="91425" anchor="t" anchorCtr="0">
+            <a:noAutofit/>
+          </a:bodyPr>
+          <a:lstStyle/>
+          <a:p>
+            <a:pPr marL="0" lvl="0" indent="0" algn="l" rtl="0">
+              <a:lnSpc>
+                <a:spcPct val="100000"/>
+              </a:lnSpc>
+              <a:spcBef>
+                <a:spcPts val="0"/>
+              </a:spcBef>
+              <a:spcAft>
+                <a:spcPts val="0"/>
+              </a:spcAft>
+              <a:buSzPts val="1100"/>
+              <a:buNone/>
+            </a:pPr>
+            <a:endParaRPr/>
+          </a:p>
+        </p:txBody>
+      </p:sp>
+    </p:spTree>
+  </p:cSld>
+  <p:clrMapOvr>
+    <a:masterClrMapping/>
+  </p:clrMapOvr>
+</p:notes>
+</file>
+
+<file path=ppt/notesSlides/notesSlide31.xml><?xml version="1.0" encoding="utf-8"?>
+<p:notes xmlns:a="http://schemas.openxmlformats.org/drawingml/2006/main" xmlns:r="http://schemas.openxmlformats.org/officeDocument/2006/relationships" xmlns:p="http://schemas.openxmlformats.org/presentationml/2006/main" showMasterSp="0" showMasterPhAnim="0">
+  <p:cSld>
+    <p:spTree>
+      <p:nvGrpSpPr>
+        <p:cNvPr id="1" name="Shape 307"/>
+        <p:cNvGrpSpPr/>
+        <p:nvPr/>
+      </p:nvGrpSpPr>
+      <p:grpSpPr>
+        <a:xfrm>
+          <a:off x="0" y="0"/>
+          <a:ext cx="0" cy="0"/>
+          <a:chOff x="0" y="0"/>
+          <a:chExt cx="0" cy="0"/>
+        </a:xfrm>
+      </p:grpSpPr>
+      <p:sp>
+        <p:nvSpPr>
+          <p:cNvPr id="308" name="Google Shape;308;p23:notes"/>
+          <p:cNvSpPr>
+            <a:spLocks noGrp="1" noRot="1" noChangeAspect="1"/>
+          </p:cNvSpPr>
+          <p:nvPr>
+            <p:ph type="sldImg" idx="2"/>
+          </p:nvPr>
+        </p:nvSpPr>
+        <p:spPr>
+          <a:xfrm>
+            <a:off x="381000" y="685800"/>
+            <a:ext cx="6096000" cy="3429000"/>
+          </a:xfrm>
+          <a:custGeom>
+            <a:avLst/>
+            <a:gdLst/>
+            <a:ahLst/>
+            <a:cxnLst/>
+            <a:rect l="l" t="t" r="r" b="b"/>
+            <a:pathLst>
+              <a:path w="120000" h="120000" extrusionOk="0">
+                <a:moveTo>
+                  <a:pt x="0" y="0"/>
+                </a:moveTo>
+                <a:lnTo>
+                  <a:pt x="120000" y="0"/>
+                </a:lnTo>
+                <a:lnTo>
+                  <a:pt x="120000" y="120000"/>
+                </a:lnTo>
+                <a:lnTo>
+                  <a:pt x="0" y="120000"/>
+                </a:lnTo>
+                <a:close/>
+              </a:path>
+            </a:pathLst>
+          </a:custGeom>
+          <a:noFill/>
+          <a:ln w="9525" cap="flat" cmpd="sng">
+            <a:solidFill>
+              <a:srgbClr val="000000"/>
+            </a:solidFill>
+            <a:prstDash val="solid"/>
+            <a:round/>
+            <a:headEnd type="none" w="sm" len="sm"/>
+            <a:tailEnd type="none" w="sm" len="sm"/>
+          </a:ln>
+        </p:spPr>
+      </p:sp>
+      <p:sp>
+        <p:nvSpPr>
+          <p:cNvPr id="309" name="Google Shape;309;p23:notes"/>
+          <p:cNvSpPr txBox="1">
+            <a:spLocks noGrp="1"/>
+          </p:cNvSpPr>
+          <p:nvPr>
+            <p:ph type="body" idx="1"/>
+          </p:nvPr>
+        </p:nvSpPr>
+        <p:spPr>
+          <a:xfrm>
+            <a:off x="685800" y="4343400"/>
+            <a:ext cx="5486400" cy="4114800"/>
+          </a:xfrm>
+          <a:prstGeom prst="rect">
+            <a:avLst/>
+          </a:prstGeom>
+          <a:noFill/>
+          <a:ln>
+            <a:noFill/>
+          </a:ln>
+        </p:spPr>
+        <p:txBody>
+          <a:bodyPr spcFirstLastPara="1" wrap="square" lIns="91425" tIns="91425" rIns="91425" bIns="91425" anchor="t" anchorCtr="0">
+            <a:noAutofit/>
+          </a:bodyPr>
+          <a:lstStyle/>
+          <a:p>
+            <a:pPr marL="0" lvl="0" indent="0" algn="l" rtl="0">
+              <a:lnSpc>
+                <a:spcPct val="100000"/>
+              </a:lnSpc>
+              <a:spcBef>
+                <a:spcPts val="0"/>
+              </a:spcBef>
+              <a:spcAft>
+                <a:spcPts val="0"/>
+              </a:spcAft>
+              <a:buSzPts val="1100"/>
+              <a:buNone/>
+            </a:pPr>
+            <a:endParaRPr/>
+          </a:p>
+        </p:txBody>
+      </p:sp>
+    </p:spTree>
+  </p:cSld>
+  <p:clrMapOvr>
+    <a:masterClrMapping/>
+  </p:clrMapOvr>
+</p:notes>
+</file>
+
+<file path=ppt/notesSlides/notesSlide32.xml><?xml version="1.0" encoding="utf-8"?>
+<p:notes xmlns:a="http://schemas.openxmlformats.org/drawingml/2006/main" xmlns:r="http://schemas.openxmlformats.org/officeDocument/2006/relationships" xmlns:p="http://schemas.openxmlformats.org/presentationml/2006/main" showMasterSp="0" showMasterPhAnim="0">
+  <p:cSld>
+    <p:spTree>
+      <p:nvGrpSpPr>
+        <p:cNvPr id="1" name="Shape 317"/>
+        <p:cNvGrpSpPr/>
+        <p:nvPr/>
+      </p:nvGrpSpPr>
+      <p:grpSpPr>
+        <a:xfrm>
+          <a:off x="0" y="0"/>
+          <a:ext cx="0" cy="0"/>
+          <a:chOff x="0" y="0"/>
+          <a:chExt cx="0" cy="0"/>
+        </a:xfrm>
+      </p:grpSpPr>
+      <p:sp>
+        <p:nvSpPr>
+          <p:cNvPr id="318" name="Google Shape;318;p24:notes"/>
+          <p:cNvSpPr>
+            <a:spLocks noGrp="1" noRot="1" noChangeAspect="1"/>
+          </p:cNvSpPr>
+          <p:nvPr>
+            <p:ph type="sldImg" idx="2"/>
+          </p:nvPr>
+        </p:nvSpPr>
+        <p:spPr>
+          <a:xfrm>
+            <a:off x="381000" y="685800"/>
+            <a:ext cx="6096000" cy="3429000"/>
+          </a:xfrm>
+          <a:custGeom>
+            <a:avLst/>
+            <a:gdLst/>
+            <a:ahLst/>
+            <a:cxnLst/>
+            <a:rect l="l" t="t" r="r" b="b"/>
+            <a:pathLst>
+              <a:path w="120000" h="120000" extrusionOk="0">
+                <a:moveTo>
+                  <a:pt x="0" y="0"/>
+                </a:moveTo>
+                <a:lnTo>
+                  <a:pt x="120000" y="0"/>
+                </a:lnTo>
+                <a:lnTo>
+                  <a:pt x="120000" y="120000"/>
+                </a:lnTo>
+                <a:lnTo>
+                  <a:pt x="0" y="120000"/>
+                </a:lnTo>
+                <a:close/>
+              </a:path>
+            </a:pathLst>
+          </a:custGeom>
+          <a:noFill/>
+          <a:ln w="9525" cap="flat" cmpd="sng">
+            <a:solidFill>
+              <a:srgbClr val="000000"/>
+            </a:solidFill>
+            <a:prstDash val="solid"/>
+            <a:round/>
+            <a:headEnd type="none" w="sm" len="sm"/>
+            <a:tailEnd type="none" w="sm" len="sm"/>
+          </a:ln>
+        </p:spPr>
+      </p:sp>
+      <p:sp>
+        <p:nvSpPr>
+          <p:cNvPr id="319" name="Google Shape;319;p24:notes"/>
+          <p:cNvSpPr txBox="1">
+            <a:spLocks noGrp="1"/>
+          </p:cNvSpPr>
+          <p:nvPr>
+            <p:ph type="body" idx="1"/>
+          </p:nvPr>
+        </p:nvSpPr>
+        <p:spPr>
+          <a:xfrm>
+            <a:off x="685800" y="4343400"/>
+            <a:ext cx="5486400" cy="4114800"/>
+          </a:xfrm>
+          <a:prstGeom prst="rect">
+            <a:avLst/>
+          </a:prstGeom>
+          <a:noFill/>
+          <a:ln>
+            <a:noFill/>
+          </a:ln>
+        </p:spPr>
+        <p:txBody>
+          <a:bodyPr spcFirstLastPara="1" wrap="square" lIns="91425" tIns="91425" rIns="91425" bIns="91425" anchor="t" anchorCtr="0">
+            <a:noAutofit/>
+          </a:bodyPr>
+          <a:lstStyle/>
+          <a:p>
+            <a:pPr marL="0" lvl="0" indent="0" algn="l" rtl="0">
+              <a:lnSpc>
+                <a:spcPct val="100000"/>
+              </a:lnSpc>
+              <a:spcBef>
+                <a:spcPts val="0"/>
+              </a:spcBef>
+              <a:spcAft>
+                <a:spcPts val="0"/>
+              </a:spcAft>
+              <a:buSzPts val="1100"/>
+              <a:buNone/>
+            </a:pPr>
+            <a:endParaRPr/>
+          </a:p>
+        </p:txBody>
+      </p:sp>
+    </p:spTree>
+  </p:cSld>
+  <p:clrMapOvr>
+    <a:masterClrMapping/>
+  </p:clrMapOvr>
+</p:notes>
+</file>
+
+<file path=ppt/notesSlides/notesSlide33.xml><?xml version="1.0" encoding="utf-8"?>
+<p:notes xmlns:a="http://schemas.openxmlformats.org/drawingml/2006/main" xmlns:r="http://schemas.openxmlformats.org/officeDocument/2006/relationships" xmlns:p="http://schemas.openxmlformats.org/presentationml/2006/main" showMasterSp="0" showMasterPhAnim="0">
+  <p:cSld>
+    <p:spTree>
+      <p:nvGrpSpPr>
+        <p:cNvPr id="1" name="Shape 327"/>
+        <p:cNvGrpSpPr/>
+        <p:nvPr/>
+      </p:nvGrpSpPr>
+      <p:grpSpPr>
+        <a:xfrm>
+          <a:off x="0" y="0"/>
+          <a:ext cx="0" cy="0"/>
+          <a:chOff x="0" y="0"/>
+          <a:chExt cx="0" cy="0"/>
+        </a:xfrm>
+      </p:grpSpPr>
+      <p:sp>
+        <p:nvSpPr>
+          <p:cNvPr id="328" name="Google Shape;328;p25:notes"/>
           <p:cNvSpPr>
             <a:spLocks noGrp="1" noRot="1" noChangeAspect="1"/>
           </p:cNvSpPr>
@@ -3737,7 +4106,7 @@
       </p:sp>
       <p:sp>
         <p:nvSpPr>
-          <p:cNvPr id="289" name="Google Shape;289;p25:notes"/>
+          <p:cNvPr id="329" name="Google Shape;329;p25:notes"/>
           <p:cNvSpPr txBox="1">
             <a:spLocks noGrp="1"/>
           </p:cNvSpPr>
@@ -3916,7 +4285,7 @@
   <p:cSld>
     <p:spTree>
       <p:nvGrpSpPr>
-        <p:cNvPr id="1" name="Shape 96"/>
+        <p:cNvPr id="1" name="Shape 98"/>
         <p:cNvGrpSpPr/>
         <p:nvPr/>
       </p:nvGrpSpPr>
@@ -3930,7 +4299,7 @@
       </p:grpSpPr>
       <p:sp>
         <p:nvSpPr>
-          <p:cNvPr id="97" name="Google Shape;97;g39318675434_2_0:notes"/>
+          <p:cNvPr id="99" name="Google Shape;99;g39318675434_2_0:notes"/>
           <p:cNvSpPr>
             <a:spLocks noGrp="1" noRot="1" noChangeAspect="1"/>
           </p:cNvSpPr>
@@ -3981,7 +4350,7 @@
       </p:sp>
       <p:sp>
         <p:nvSpPr>
-          <p:cNvPr id="98" name="Google Shape;98;g39318675434_2_0:notes"/>
+          <p:cNvPr id="100" name="Google Shape;100;g39318675434_2_0:notes"/>
           <p:cNvSpPr txBox="1">
             <a:spLocks noGrp="1"/>
           </p:cNvSpPr>
@@ -4038,7 +4407,7 @@
   <p:cSld>
     <p:spTree>
       <p:nvGrpSpPr>
-        <p:cNvPr id="1" name="Shape 102"/>
+        <p:cNvPr id="1" name="Shape 104"/>
         <p:cNvGrpSpPr/>
         <p:nvPr/>
       </p:nvGrpSpPr>
@@ -4052,7 +4421,7 @@
       </p:grpSpPr>
       <p:sp>
         <p:nvSpPr>
-          <p:cNvPr id="103" name="Google Shape;103;g3ce3012afcb_1_49:notes"/>
+          <p:cNvPr id="105" name="Google Shape;105;g3ce3012afcb_1_49:notes"/>
           <p:cNvSpPr>
             <a:spLocks noGrp="1" noRot="1" noChangeAspect="1"/>
           </p:cNvSpPr>
@@ -4103,7 +4472,7 @@
       </p:sp>
       <p:sp>
         <p:nvSpPr>
-          <p:cNvPr id="104" name="Google Shape;104;g3ce3012afcb_1_49:notes"/>
+          <p:cNvPr id="106" name="Google Shape;106;g3ce3012afcb_1_49:notes"/>
           <p:cNvSpPr txBox="1">
             <a:spLocks noGrp="1"/>
           </p:cNvSpPr>
@@ -4160,7 +4529,7 @@
   <p:cSld>
     <p:spTree>
       <p:nvGrpSpPr>
-        <p:cNvPr id="1" name="Shape 109"/>
+        <p:cNvPr id="1" name="Shape 113"/>
         <p:cNvGrpSpPr/>
         <p:nvPr/>
       </p:nvGrpSpPr>
@@ -4174,7 +4543,7 @@
       </p:grpSpPr>
       <p:sp>
         <p:nvSpPr>
-          <p:cNvPr id="110" name="Google Shape;110;g3ce3012afcb_1_28:notes"/>
+          <p:cNvPr id="114" name="Google Shape;114;g3ce3012afcb_1_28:notes"/>
           <p:cNvSpPr>
             <a:spLocks noGrp="1" noRot="1" noChangeAspect="1"/>
           </p:cNvSpPr>
@@ -4225,7 +4594,7 @@
       </p:sp>
       <p:sp>
         <p:nvSpPr>
-          <p:cNvPr id="111" name="Google Shape;111;g3ce3012afcb_1_28:notes"/>
+          <p:cNvPr id="115" name="Google Shape;115;g3ce3012afcb_1_28:notes"/>
           <p:cNvSpPr txBox="1">
             <a:spLocks noGrp="1"/>
           </p:cNvSpPr>
@@ -4282,7 +4651,7 @@
   <p:cSld>
     <p:spTree>
       <p:nvGrpSpPr>
-        <p:cNvPr id="1" name="Shape 117"/>
+        <p:cNvPr id="1" name="Shape 121"/>
         <p:cNvGrpSpPr/>
         <p:nvPr/>
       </p:nvGrpSpPr>
@@ -4296,7 +4665,7 @@
       </p:grpSpPr>
       <p:sp>
         <p:nvSpPr>
-          <p:cNvPr id="118" name="Google Shape;118;g3cdf853e001_0_26:notes"/>
+          <p:cNvPr id="122" name="Google Shape;122;g3cdf853e001_0_26:notes"/>
           <p:cNvSpPr>
             <a:spLocks noGrp="1" noRot="1" noChangeAspect="1"/>
           </p:cNvSpPr>
@@ -4347,7 +4716,7 @@
       </p:sp>
       <p:sp>
         <p:nvSpPr>
-          <p:cNvPr id="119" name="Google Shape;119;g3cdf853e001_0_26:notes"/>
+          <p:cNvPr id="123" name="Google Shape;123;g3cdf853e001_0_26:notes"/>
           <p:cNvSpPr txBox="1">
             <a:spLocks noGrp="1"/>
           </p:cNvSpPr>
@@ -4404,7 +4773,7 @@
   <p:cSld>
     <p:spTree>
       <p:nvGrpSpPr>
-        <p:cNvPr id="1" name="Shape 123"/>
+        <p:cNvPr id="1" name="Shape 128"/>
         <p:cNvGrpSpPr/>
         <p:nvPr/>
       </p:nvGrpSpPr>
@@ -4418,7 +4787,7 @@
       </p:grpSpPr>
       <p:sp>
         <p:nvSpPr>
-          <p:cNvPr id="124" name="Google Shape;124;g3ce3012afcb_1_55:notes"/>
+          <p:cNvPr id="129" name="Google Shape;129;g3ce3012afcb_1_55:notes"/>
           <p:cNvSpPr>
             <a:spLocks noGrp="1" noRot="1" noChangeAspect="1"/>
           </p:cNvSpPr>
@@ -4469,7 +4838,7 @@
       </p:sp>
       <p:sp>
         <p:nvSpPr>
-          <p:cNvPr id="125" name="Google Shape;125;g3ce3012afcb_1_55:notes"/>
+          <p:cNvPr id="130" name="Google Shape;130;g3ce3012afcb_1_55:notes"/>
           <p:cNvSpPr txBox="1">
             <a:spLocks noGrp="1"/>
           </p:cNvSpPr>
@@ -14040,6 +14409,18 @@
               <a:buFont typeface="Calibri"/>
               <a:buChar char="●"/>
             </a:pPr>
+            <a:r>
+              <a:rPr lang="en" b="1">
+                <a:solidFill>
+                  <a:srgbClr val="3C78D8"/>
+                </a:solidFill>
+                <a:latin typeface="Calibri"/>
+                <a:ea typeface="Calibri"/>
+                <a:cs typeface="Calibri"/>
+                <a:sym typeface="Calibri"/>
+              </a:rPr>
+              <a:t>LeCun's AMI raises $1B</a:t>
+            </a:r>
             <a:endParaRPr b="1">
               <a:solidFill>
                 <a:srgbClr val="3C78D8"/>
@@ -14624,7 +15005,7 @@
                 <a:cs typeface="Calibri"/>
                 <a:sym typeface="Calibri"/>
               </a:rPr>
-              <a:t>Claude Scheduling</a:t>
+              <a:t>Claude Scheduling, Super Nested Claude Code</a:t>
             </a:r>
             <a:endParaRPr b="1">
               <a:solidFill>
@@ -15405,7 +15786,7 @@
   <p:cSld>
     <p:spTree>
       <p:nvGrpSpPr>
-        <p:cNvPr id="1" name="Shape 134"/>
+        <p:cNvPr id="1" name="Shape 142"/>
         <p:cNvGrpSpPr/>
         <p:nvPr/>
       </p:nvGrpSpPr>
@@ -15419,7 +15800,7 @@
       </p:grpSpPr>
       <p:sp>
         <p:nvSpPr>
-          <p:cNvPr id="135" name="Google Shape;135;p24"/>
+          <p:cNvPr id="143" name="Google Shape;143;p24"/>
           <p:cNvSpPr txBox="1"/>
           <p:nvPr/>
         </p:nvSpPr>
@@ -15485,7 +15866,7 @@
       </p:sp>
       <p:sp>
         <p:nvSpPr>
-          <p:cNvPr id="136" name="Google Shape;136;p24"/>
+          <p:cNvPr id="144" name="Google Shape;144;p24"/>
           <p:cNvSpPr txBox="1"/>
           <p:nvPr/>
         </p:nvSpPr>
@@ -15868,7 +16249,7 @@
       </p:sp>
       <p:pic>
         <p:nvPicPr>
-          <p:cNvPr id="137" name="Google Shape;137;p24"/>
+          <p:cNvPr id="145" name="Google Shape;145;p24"/>
           <p:cNvPicPr preferRelativeResize="0"/>
           <p:nvPr/>
         </p:nvPicPr>
@@ -15907,7 +16288,7 @@
       </p:pic>
       <p:pic>
         <p:nvPicPr>
-          <p:cNvPr id="138" name="Google Shape;138;p24"/>
+          <p:cNvPr id="146" name="Google Shape;146;p24"/>
           <p:cNvPicPr preferRelativeResize="0"/>
           <p:nvPr/>
         </p:nvPicPr>
@@ -15946,7 +16327,7 @@
       </p:pic>
       <p:pic>
         <p:nvPicPr>
-          <p:cNvPr id="139" name="Google Shape;139;p24"/>
+          <p:cNvPr id="147" name="Google Shape;147;p24"/>
           <p:cNvPicPr preferRelativeResize="0"/>
           <p:nvPr/>
         </p:nvPicPr>
@@ -15995,7 +16376,7 @@
   <p:cSld>
     <p:spTree>
       <p:nvGrpSpPr>
-        <p:cNvPr id="1" name="Shape 143"/>
+        <p:cNvPr id="1" name="Shape 151"/>
         <p:cNvGrpSpPr/>
         <p:nvPr/>
       </p:nvGrpSpPr>
@@ -16009,7 +16390,7 @@
       </p:grpSpPr>
       <p:sp>
         <p:nvSpPr>
-          <p:cNvPr id="144" name="Google Shape;144;p25"/>
+          <p:cNvPr id="152" name="Google Shape;152;p25"/>
           <p:cNvSpPr txBox="1"/>
           <p:nvPr/>
         </p:nvSpPr>
@@ -16075,7 +16456,7 @@
       </p:sp>
       <p:sp>
         <p:nvSpPr>
-          <p:cNvPr id="145" name="Google Shape;145;p25"/>
+          <p:cNvPr id="153" name="Google Shape;153;p25"/>
           <p:cNvSpPr txBox="1"/>
           <p:nvPr/>
         </p:nvSpPr>
@@ -16445,7 +16826,7 @@
       </p:sp>
       <p:sp>
         <p:nvSpPr>
-          <p:cNvPr id="146" name="Google Shape;146;p25"/>
+          <p:cNvPr id="154" name="Google Shape;154;p25"/>
           <p:cNvSpPr txBox="1"/>
           <p:nvPr/>
         </p:nvSpPr>
@@ -16684,6 +17065,294 @@
           </a:p>
         </p:txBody>
       </p:sp>
+      <p:sp>
+        <p:nvSpPr>
+          <p:cNvPr id="155" name="Google Shape;155;p25"/>
+          <p:cNvSpPr txBox="1"/>
+          <p:nvPr/>
+        </p:nvSpPr>
+        <p:spPr>
+          <a:xfrm>
+            <a:off x="80650" y="2784184"/>
+            <a:ext cx="4366500" cy="2235000"/>
+          </a:xfrm>
+          <a:prstGeom prst="rect">
+            <a:avLst/>
+          </a:prstGeom>
+          <a:solidFill>
+            <a:srgbClr val="FFF2CC"/>
+          </a:solidFill>
+          <a:ln w="9525" cap="flat" cmpd="sng">
+            <a:solidFill>
+              <a:srgbClr val="FF0000"/>
+            </a:solidFill>
+            <a:prstDash val="solid"/>
+            <a:round/>
+            <a:headEnd type="none" w="sm" len="sm"/>
+            <a:tailEnd type="none" w="sm" len="sm"/>
+          </a:ln>
+        </p:spPr>
+        <p:txBody>
+          <a:bodyPr spcFirstLastPara="1" wrap="square" lIns="9125" tIns="9125" rIns="9125" bIns="9125" anchor="t" anchorCtr="0">
+            <a:spAutoFit/>
+          </a:bodyPr>
+          <a:lstStyle/>
+          <a:p>
+            <a:pPr marL="171450" marR="0" lvl="0" indent="-133350" algn="l" rtl="0">
+              <a:lnSpc>
+                <a:spcPct val="100000"/>
+              </a:lnSpc>
+              <a:spcBef>
+                <a:spcPts val="0"/>
+              </a:spcBef>
+              <a:spcAft>
+                <a:spcPts val="0"/>
+              </a:spcAft>
+              <a:buClr>
+                <a:srgbClr val="FF0000"/>
+              </a:buClr>
+              <a:buSzPts val="1200"/>
+              <a:buFont typeface="Calibri"/>
+              <a:buChar char="●"/>
+            </a:pPr>
+            <a:r>
+              <a:rPr lang="en" sz="1200" b="1">
+                <a:solidFill>
+                  <a:srgbClr val="FF0000"/>
+                </a:solidFill>
+                <a:latin typeface="Calibri"/>
+                <a:ea typeface="Calibri"/>
+                <a:cs typeface="Calibri"/>
+                <a:sym typeface="Calibri"/>
+              </a:rPr>
+              <a:t>Super Nested Claude Code</a:t>
+            </a:r>
+            <a:endParaRPr sz="1200" b="1">
+              <a:solidFill>
+                <a:srgbClr val="FF0000"/>
+              </a:solidFill>
+              <a:latin typeface="Calibri"/>
+              <a:ea typeface="Calibri"/>
+              <a:cs typeface="Calibri"/>
+              <a:sym typeface="Calibri"/>
+            </a:endParaRPr>
+          </a:p>
+          <a:p>
+            <a:pPr marL="171450" marR="0" lvl="0" indent="-133350" algn="l" rtl="0">
+              <a:lnSpc>
+                <a:spcPct val="100000"/>
+              </a:lnSpc>
+              <a:spcBef>
+                <a:spcPts val="0"/>
+              </a:spcBef>
+              <a:spcAft>
+                <a:spcPts val="0"/>
+              </a:spcAft>
+              <a:buClr>
+                <a:schemeClr val="dk1"/>
+              </a:buClr>
+              <a:buSzPts val="1200"/>
+              <a:buFont typeface="Calibri"/>
+              <a:buChar char="●"/>
+            </a:pPr>
+            <a:r>
+              <a:rPr lang="en" sz="1200">
+                <a:latin typeface="Calibri"/>
+                <a:ea typeface="Calibri"/>
+                <a:cs typeface="Calibri"/>
+                <a:sym typeface="Calibri"/>
+              </a:rPr>
+              <a:t>A nested Claude Code workflow in tmux on macOS</a:t>
+            </a:r>
+            <a:endParaRPr sz="1200">
+              <a:latin typeface="Calibri"/>
+              <a:ea typeface="Calibri"/>
+              <a:cs typeface="Calibri"/>
+              <a:sym typeface="Calibri"/>
+            </a:endParaRPr>
+          </a:p>
+          <a:p>
+            <a:pPr marL="171450" marR="0" lvl="0" indent="-133350" algn="l" rtl="0">
+              <a:lnSpc>
+                <a:spcPct val="100000"/>
+              </a:lnSpc>
+              <a:spcBef>
+                <a:spcPts val="0"/>
+              </a:spcBef>
+              <a:spcAft>
+                <a:spcPts val="0"/>
+              </a:spcAft>
+              <a:buClr>
+                <a:schemeClr val="dk1"/>
+              </a:buClr>
+              <a:buSzPts val="1200"/>
+              <a:buFont typeface="Calibri"/>
+              <a:buChar char="●"/>
+            </a:pPr>
+            <a:r>
+              <a:rPr lang="en" sz="1200">
+                <a:latin typeface="Calibri"/>
+                <a:ea typeface="Calibri"/>
+                <a:cs typeface="Calibri"/>
+                <a:sym typeface="Calibri"/>
+              </a:rPr>
+              <a:t>Coordinates multiple terminals for parallel AI-assisted development</a:t>
+            </a:r>
+            <a:endParaRPr sz="1200">
+              <a:latin typeface="Calibri"/>
+              <a:ea typeface="Calibri"/>
+              <a:cs typeface="Calibri"/>
+              <a:sym typeface="Calibri"/>
+            </a:endParaRPr>
+          </a:p>
+          <a:p>
+            <a:pPr marL="171450" marR="0" lvl="0" indent="-133350" algn="l" rtl="0">
+              <a:lnSpc>
+                <a:spcPct val="100000"/>
+              </a:lnSpc>
+              <a:spcBef>
+                <a:spcPts val="0"/>
+              </a:spcBef>
+              <a:spcAft>
+                <a:spcPts val="0"/>
+              </a:spcAft>
+              <a:buClr>
+                <a:schemeClr val="dk1"/>
+              </a:buClr>
+              <a:buSzPts val="1200"/>
+              <a:buFont typeface="Calibri"/>
+              <a:buChar char="●"/>
+            </a:pPr>
+            <a:r>
+              <a:rPr lang="en" sz="1200">
+                <a:latin typeface="Calibri"/>
+                <a:ea typeface="Calibri"/>
+                <a:cs typeface="Calibri"/>
+                <a:sym typeface="Calibri"/>
+              </a:rPr>
+              <a:t>A central controller assigns subtasks across terminals, letting developers state high-level goals while Claude manages planning and execution steps</a:t>
+            </a:r>
+            <a:endParaRPr sz="1200">
+              <a:latin typeface="Calibri"/>
+              <a:ea typeface="Calibri"/>
+              <a:cs typeface="Calibri"/>
+              <a:sym typeface="Calibri"/>
+            </a:endParaRPr>
+          </a:p>
+          <a:p>
+            <a:pPr marL="171450" marR="0" lvl="0" indent="-133350" algn="l" rtl="0">
+              <a:lnSpc>
+                <a:spcPct val="100000"/>
+              </a:lnSpc>
+              <a:spcBef>
+                <a:spcPts val="0"/>
+              </a:spcBef>
+              <a:spcAft>
+                <a:spcPts val="0"/>
+              </a:spcAft>
+              <a:buClr>
+                <a:schemeClr val="dk1"/>
+              </a:buClr>
+              <a:buSzPts val="1200"/>
+              <a:buFont typeface="Calibri"/>
+              <a:buChar char="●"/>
+            </a:pPr>
+            <a:r>
+              <a:rPr lang="en" sz="1200">
+                <a:latin typeface="Calibri"/>
+                <a:ea typeface="Calibri"/>
+                <a:cs typeface="Calibri"/>
+                <a:sym typeface="Calibri"/>
+              </a:rPr>
+              <a:t>Examples include a multi-terminal 3D galaxy project in 3JS and visualizing micro GPT training with dedicated panes for backend, charts, and dashboards. </a:t>
+            </a:r>
+            <a:endParaRPr sz="1200">
+              <a:latin typeface="Calibri"/>
+              <a:ea typeface="Calibri"/>
+              <a:cs typeface="Calibri"/>
+              <a:sym typeface="Calibri"/>
+            </a:endParaRPr>
+          </a:p>
+          <a:p>
+            <a:pPr marL="171450" marR="0" lvl="0" indent="-133350" algn="l" rtl="0">
+              <a:lnSpc>
+                <a:spcPct val="100000"/>
+              </a:lnSpc>
+              <a:spcBef>
+                <a:spcPts val="0"/>
+              </a:spcBef>
+              <a:spcAft>
+                <a:spcPts val="0"/>
+              </a:spcAft>
+              <a:buClr>
+                <a:schemeClr val="dk1"/>
+              </a:buClr>
+              <a:buSzPts val="1200"/>
+              <a:buFont typeface="Calibri"/>
+              <a:buChar char="●"/>
+            </a:pPr>
+            <a:r>
+              <a:rPr lang="en" sz="1200">
+                <a:latin typeface="Calibri"/>
+                <a:ea typeface="Calibri"/>
+                <a:cs typeface="Calibri"/>
+                <a:sym typeface="Calibri"/>
+              </a:rPr>
+              <a:t>The system boosts productivity but currently depends on macOS, tmux, and a non-trivial setup.</a:t>
+            </a:r>
+            <a:endParaRPr sz="1200">
+              <a:latin typeface="Calibri"/>
+              <a:ea typeface="Calibri"/>
+              <a:cs typeface="Calibri"/>
+              <a:sym typeface="Calibri"/>
+            </a:endParaRPr>
+          </a:p>
+          <a:p>
+            <a:pPr marL="171450" marR="0" lvl="0" indent="-133350" algn="l" rtl="0">
+              <a:lnSpc>
+                <a:spcPct val="100000"/>
+              </a:lnSpc>
+              <a:spcBef>
+                <a:spcPts val="0"/>
+              </a:spcBef>
+              <a:spcAft>
+                <a:spcPts val="0"/>
+              </a:spcAft>
+              <a:buSzPts val="1200"/>
+              <a:buFont typeface="Calibri"/>
+              <a:buChar char="●"/>
+            </a:pPr>
+            <a:r>
+              <a:rPr lang="en" sz="1200" u="sng">
+                <a:solidFill>
+                  <a:schemeClr val="hlink"/>
+                </a:solidFill>
+                <a:latin typeface="Calibri"/>
+                <a:ea typeface="Calibri"/>
+                <a:cs typeface="Calibri"/>
+                <a:sym typeface="Calibri"/>
+                <a:hlinkClick r:id="rId3"/>
+              </a:rPr>
+              <a:t>https://www.geeky-gadgets.com/nested-claude-code-tmux/</a:t>
+            </a:r>
+            <a:r>
+              <a:rPr lang="en" sz="1200">
+                <a:latin typeface="Calibri"/>
+                <a:ea typeface="Calibri"/>
+                <a:cs typeface="Calibri"/>
+                <a:sym typeface="Calibri"/>
+              </a:rPr>
+              <a:t> </a:t>
+            </a:r>
+            <a:endParaRPr sz="1200">
+              <a:latin typeface="Calibri"/>
+              <a:ea typeface="Calibri"/>
+              <a:cs typeface="Calibri"/>
+              <a:sym typeface="Calibri"/>
+            </a:endParaRPr>
+          </a:p>
+        </p:txBody>
+      </p:sp>
     </p:spTree>
   </p:cSld>
   <p:clrMapOvr>
@@ -16697,7 +17366,7 @@
   <p:cSld>
     <p:spTree>
       <p:nvGrpSpPr>
-        <p:cNvPr id="1" name="Shape 150"/>
+        <p:cNvPr id="1" name="Shape 159"/>
         <p:cNvGrpSpPr/>
         <p:nvPr/>
       </p:nvGrpSpPr>
@@ -16711,7 +17380,7 @@
       </p:grpSpPr>
       <p:sp>
         <p:nvSpPr>
-          <p:cNvPr id="151" name="Google Shape;151;p26"/>
+          <p:cNvPr id="160" name="Google Shape;160;p26"/>
           <p:cNvSpPr txBox="1"/>
           <p:nvPr/>
         </p:nvSpPr>
@@ -16777,7 +17446,7 @@
       </p:sp>
       <p:sp>
         <p:nvSpPr>
-          <p:cNvPr id="152" name="Google Shape;152;p26"/>
+          <p:cNvPr id="161" name="Google Shape;161;p26"/>
           <p:cNvSpPr txBox="1"/>
           <p:nvPr/>
         </p:nvSpPr>
@@ -17068,7 +17737,7 @@
       </p:sp>
       <p:sp>
         <p:nvSpPr>
-          <p:cNvPr id="153" name="Google Shape;153;p26"/>
+          <p:cNvPr id="162" name="Google Shape;162;p26"/>
           <p:cNvSpPr txBox="1"/>
           <p:nvPr/>
         </p:nvSpPr>
@@ -17359,7 +18028,7 @@
       </p:sp>
       <p:sp>
         <p:nvSpPr>
-          <p:cNvPr id="154" name="Google Shape;154;p26"/>
+          <p:cNvPr id="163" name="Google Shape;163;p26"/>
           <p:cNvSpPr txBox="1"/>
           <p:nvPr/>
         </p:nvSpPr>
@@ -17548,7 +18217,7 @@
       </p:sp>
       <p:sp>
         <p:nvSpPr>
-          <p:cNvPr id="155" name="Google Shape;155;p26"/>
+          <p:cNvPr id="164" name="Google Shape;164;p26"/>
           <p:cNvSpPr txBox="1"/>
           <p:nvPr/>
         </p:nvSpPr>
@@ -17768,7 +18437,7 @@
       </p:sp>
       <p:sp>
         <p:nvSpPr>
-          <p:cNvPr id="156" name="Google Shape;156;p26"/>
+          <p:cNvPr id="165" name="Google Shape;165;p26"/>
           <p:cNvSpPr txBox="1"/>
           <p:nvPr/>
         </p:nvSpPr>
@@ -17853,7 +18522,7 @@
   <p:cSld>
     <p:spTree>
       <p:nvGrpSpPr>
-        <p:cNvPr id="1" name="Shape 160"/>
+        <p:cNvPr id="1" name="Shape 169"/>
         <p:cNvGrpSpPr/>
         <p:nvPr/>
       </p:nvGrpSpPr>
@@ -17867,7 +18536,7 @@
       </p:grpSpPr>
       <p:sp>
         <p:nvSpPr>
-          <p:cNvPr id="161" name="Google Shape;161;p27"/>
+          <p:cNvPr id="170" name="Google Shape;170;p27"/>
           <p:cNvSpPr txBox="1"/>
           <p:nvPr/>
         </p:nvSpPr>
@@ -17933,7 +18602,7 @@
       </p:sp>
       <p:sp>
         <p:nvSpPr>
-          <p:cNvPr id="162" name="Google Shape;162;p27"/>
+          <p:cNvPr id="171" name="Google Shape;171;p27"/>
           <p:cNvSpPr txBox="1"/>
           <p:nvPr/>
         </p:nvSpPr>
@@ -18317,6 +18986,45 @@
           </a:p>
         </p:txBody>
       </p:sp>
+      <p:pic>
+        <p:nvPicPr>
+          <p:cNvPr id="172" name="Google Shape;172;p27"/>
+          <p:cNvPicPr preferRelativeResize="0"/>
+          <p:nvPr/>
+        </p:nvPicPr>
+        <p:blipFill>
+          <a:blip r:embed="rId4" cstate="email">
+            <a:alphaModFix/>
+            <a:extLst>
+              <a:ext uri="{28A0092B-C50C-407E-A947-70E740481C1C}">
+                <a14:useLocalDpi xmlns:a14="http://schemas.microsoft.com/office/drawing/2010/main"/>
+              </a:ext>
+            </a:extLst>
+          </a:blip>
+          <a:stretch>
+            <a:fillRect/>
+          </a:stretch>
+        </p:blipFill>
+        <p:spPr>
+          <a:xfrm>
+            <a:off x="4788025" y="215926"/>
+            <a:ext cx="3954346" cy="2224325"/>
+          </a:xfrm>
+          <a:prstGeom prst="rect">
+            <a:avLst/>
+          </a:prstGeom>
+          <a:noFill/>
+          <a:ln w="9525" cap="flat" cmpd="sng">
+            <a:solidFill>
+              <a:srgbClr val="FF0000"/>
+            </a:solidFill>
+            <a:prstDash val="solid"/>
+            <a:round/>
+            <a:headEnd type="none" w="sm" len="sm"/>
+            <a:tailEnd type="none" w="sm" len="sm"/>
+          </a:ln>
+        </p:spPr>
+      </p:pic>
     </p:spTree>
   </p:cSld>
   <p:clrMapOvr>
@@ -18330,7 +19038,7 @@
   <p:cSld>
     <p:spTree>
       <p:nvGrpSpPr>
-        <p:cNvPr id="1" name="Shape 166"/>
+        <p:cNvPr id="1" name="Shape 176"/>
         <p:cNvGrpSpPr/>
         <p:nvPr/>
       </p:nvGrpSpPr>
@@ -18344,7 +19052,7 @@
       </p:grpSpPr>
       <p:sp>
         <p:nvSpPr>
-          <p:cNvPr id="167" name="Google Shape;167;p28"/>
+          <p:cNvPr id="177" name="Google Shape;177;p28"/>
           <p:cNvSpPr txBox="1"/>
           <p:nvPr/>
         </p:nvSpPr>
@@ -18410,7 +19118,7 @@
       </p:sp>
       <p:sp>
         <p:nvSpPr>
-          <p:cNvPr id="168" name="Google Shape;168;p28"/>
+          <p:cNvPr id="178" name="Google Shape;178;p28"/>
           <p:cNvSpPr txBox="1"/>
           <p:nvPr/>
         </p:nvSpPr>
@@ -18677,7 +19385,7 @@
       </p:sp>
       <p:sp>
         <p:nvSpPr>
-          <p:cNvPr id="169" name="Google Shape;169;p28"/>
+          <p:cNvPr id="179" name="Google Shape;179;p28"/>
           <p:cNvSpPr txBox="1"/>
           <p:nvPr/>
         </p:nvSpPr>
@@ -19024,7 +19732,7 @@
       </p:sp>
       <p:pic>
         <p:nvPicPr>
-          <p:cNvPr id="170" name="Google Shape;170;p28"/>
+          <p:cNvPr id="180" name="Google Shape;180;p28"/>
           <p:cNvPicPr preferRelativeResize="0"/>
           <p:nvPr/>
         </p:nvPicPr>
@@ -19063,7 +19771,7 @@
       </p:pic>
       <p:pic>
         <p:nvPicPr>
-          <p:cNvPr id="171" name="Google Shape;171;p28"/>
+          <p:cNvPr id="181" name="Google Shape;181;p28"/>
           <p:cNvPicPr preferRelativeResize="0"/>
           <p:nvPr/>
         </p:nvPicPr>
@@ -19113,7 +19821,7 @@
   <p:cSld>
     <p:spTree>
       <p:nvGrpSpPr>
-        <p:cNvPr id="1" name="Shape 175"/>
+        <p:cNvPr id="1" name="Shape 185"/>
         <p:cNvGrpSpPr/>
         <p:nvPr/>
       </p:nvGrpSpPr>
@@ -19127,7 +19835,7 @@
       </p:grpSpPr>
       <p:sp>
         <p:nvSpPr>
-          <p:cNvPr id="176" name="Google Shape;176;p29"/>
+          <p:cNvPr id="186" name="Google Shape;186;p29"/>
           <p:cNvSpPr txBox="1"/>
           <p:nvPr/>
         </p:nvSpPr>
@@ -19193,14 +19901,14 @@
       </p:sp>
       <p:sp>
         <p:nvSpPr>
-          <p:cNvPr id="177" name="Google Shape;177;p29"/>
+          <p:cNvPr id="187" name="Google Shape;187;p29"/>
           <p:cNvSpPr txBox="1"/>
           <p:nvPr/>
         </p:nvSpPr>
         <p:spPr>
           <a:xfrm>
             <a:off x="43825" y="541600"/>
-            <a:ext cx="4421400" cy="3004500"/>
+            <a:ext cx="4421400" cy="3020100"/>
           </a:xfrm>
           <a:prstGeom prst="rect">
             <a:avLst/>
@@ -19224,7 +19932,7 @@
           </a:bodyPr>
           <a:lstStyle/>
           <a:p>
-            <a:pPr marL="171450" marR="0" lvl="0" indent="-127000" algn="l" rtl="0">
+            <a:pPr marL="171450" marR="0" lvl="0" indent="-133350" algn="l" rtl="0">
               <a:lnSpc>
                 <a:spcPct val="100000"/>
               </a:lnSpc>
@@ -19237,12 +19945,12 @@
               <a:buClr>
                 <a:srgbClr val="FF0000"/>
               </a:buClr>
-              <a:buSzPts val="1100"/>
+              <a:buSzPts val="1200"/>
               <a:buFont typeface="Calibri"/>
               <a:buChar char="●"/>
             </a:pPr>
             <a:r>
-              <a:rPr lang="en" sz="1100" b="1">
+              <a:rPr lang="en" sz="1200" b="1">
                 <a:solidFill>
                   <a:srgbClr val="FF0000"/>
                 </a:solidFill>
@@ -19253,7 +19961,7 @@
               </a:rPr>
               <a:t>Superpowers GitHub repo for AI Coding Agents</a:t>
             </a:r>
-            <a:endParaRPr sz="1100" b="1">
+            <a:endParaRPr sz="1200" b="1">
               <a:solidFill>
                 <a:srgbClr val="FF0000"/>
               </a:solidFill>
@@ -19579,6 +20287,45 @@
           </a:p>
         </p:txBody>
       </p:sp>
+      <p:pic>
+        <p:nvPicPr>
+          <p:cNvPr id="188" name="Google Shape;188;p29"/>
+          <p:cNvPicPr preferRelativeResize="0"/>
+          <p:nvPr/>
+        </p:nvPicPr>
+        <p:blipFill>
+          <a:blip r:embed="rId5" cstate="email">
+            <a:alphaModFix/>
+            <a:extLst>
+              <a:ext uri="{28A0092B-C50C-407E-A947-70E740481C1C}">
+                <a14:useLocalDpi xmlns:a14="http://schemas.microsoft.com/office/drawing/2010/main"/>
+              </a:ext>
+            </a:extLst>
+          </a:blip>
+          <a:stretch>
+            <a:fillRect/>
+          </a:stretch>
+        </p:blipFill>
+        <p:spPr>
+          <a:xfrm>
+            <a:off x="4650050" y="541600"/>
+            <a:ext cx="4048526" cy="1958975"/>
+          </a:xfrm>
+          <a:prstGeom prst="rect">
+            <a:avLst/>
+          </a:prstGeom>
+          <a:noFill/>
+          <a:ln w="9525" cap="flat" cmpd="sng">
+            <a:solidFill>
+              <a:srgbClr val="FF0000"/>
+            </a:solidFill>
+            <a:prstDash val="solid"/>
+            <a:round/>
+            <a:headEnd type="none" w="sm" len="sm"/>
+            <a:tailEnd type="none" w="sm" len="sm"/>
+          </a:ln>
+        </p:spPr>
+      </p:pic>
     </p:spTree>
   </p:cSld>
   <p:clrMapOvr>
@@ -19592,7 +20339,7 @@
   <p:cSld>
     <p:spTree>
       <p:nvGrpSpPr>
-        <p:cNvPr id="1" name="Shape 181"/>
+        <p:cNvPr id="1" name="Shape 192"/>
         <p:cNvGrpSpPr/>
         <p:nvPr/>
       </p:nvGrpSpPr>
@@ -19606,7 +20353,7 @@
       </p:grpSpPr>
       <p:sp>
         <p:nvSpPr>
-          <p:cNvPr id="182" name="Google Shape;182;p30"/>
+          <p:cNvPr id="193" name="Google Shape;193;p30"/>
           <p:cNvSpPr txBox="1"/>
           <p:nvPr/>
         </p:nvSpPr>
@@ -19672,7 +20419,7 @@
       </p:sp>
       <p:sp>
         <p:nvSpPr>
-          <p:cNvPr id="183" name="Google Shape;183;p30"/>
+          <p:cNvPr id="194" name="Google Shape;194;p30"/>
           <p:cNvSpPr txBox="1"/>
           <p:nvPr/>
         </p:nvSpPr>
@@ -20164,6 +20911,45 @@
           </a:p>
         </p:txBody>
       </p:sp>
+      <p:pic>
+        <p:nvPicPr>
+          <p:cNvPr id="195" name="Google Shape;195;p30"/>
+          <p:cNvPicPr preferRelativeResize="0"/>
+          <p:nvPr/>
+        </p:nvPicPr>
+        <p:blipFill>
+          <a:blip r:embed="rId6" cstate="email">
+            <a:alphaModFix/>
+            <a:extLst>
+              <a:ext uri="{28A0092B-C50C-407E-A947-70E740481C1C}">
+                <a14:useLocalDpi xmlns:a14="http://schemas.microsoft.com/office/drawing/2010/main"/>
+              </a:ext>
+            </a:extLst>
+          </a:blip>
+          <a:stretch>
+            <a:fillRect/>
+          </a:stretch>
+        </p:blipFill>
+        <p:spPr>
+          <a:xfrm>
+            <a:off x="4672100" y="475825"/>
+            <a:ext cx="3347175" cy="1825050"/>
+          </a:xfrm>
+          <a:prstGeom prst="rect">
+            <a:avLst/>
+          </a:prstGeom>
+          <a:noFill/>
+          <a:ln w="9525" cap="flat" cmpd="sng">
+            <a:solidFill>
+              <a:srgbClr val="FF0000"/>
+            </a:solidFill>
+            <a:prstDash val="solid"/>
+            <a:round/>
+            <a:headEnd type="none" w="sm" len="sm"/>
+            <a:tailEnd type="none" w="sm" len="sm"/>
+          </a:ln>
+        </p:spPr>
+      </p:pic>
     </p:spTree>
   </p:cSld>
   <p:clrMapOvr>
@@ -20177,7 +20963,7 @@
   <p:cSld>
     <p:spTree>
       <p:nvGrpSpPr>
-        <p:cNvPr id="1" name="Shape 187"/>
+        <p:cNvPr id="1" name="Shape 199"/>
         <p:cNvGrpSpPr/>
         <p:nvPr/>
       </p:nvGrpSpPr>
@@ -20191,7 +20977,7 @@
       </p:grpSpPr>
       <p:sp>
         <p:nvSpPr>
-          <p:cNvPr id="188" name="Google Shape;188;p31"/>
+          <p:cNvPr id="200" name="Google Shape;200;p31"/>
           <p:cNvSpPr txBox="1"/>
           <p:nvPr/>
         </p:nvSpPr>
@@ -20257,7 +21043,7 @@
       </p:sp>
       <p:sp>
         <p:nvSpPr>
-          <p:cNvPr id="189" name="Google Shape;189;p31"/>
+          <p:cNvPr id="201" name="Google Shape;201;p31"/>
           <p:cNvSpPr txBox="1"/>
           <p:nvPr/>
         </p:nvSpPr>
@@ -20607,7 +21393,7 @@
       </p:sp>
       <p:pic>
         <p:nvPicPr>
-          <p:cNvPr id="190" name="Google Shape;190;p31"/>
+          <p:cNvPr id="202" name="Google Shape;202;p31"/>
           <p:cNvPicPr preferRelativeResize="0"/>
           <p:nvPr/>
         </p:nvPicPr>
@@ -20657,7 +21443,7 @@
   <p:cSld>
     <p:spTree>
       <p:nvGrpSpPr>
-        <p:cNvPr id="1" name="Shape 194"/>
+        <p:cNvPr id="1" name="Shape 206"/>
         <p:cNvGrpSpPr/>
         <p:nvPr/>
       </p:nvGrpSpPr>
@@ -20671,7 +21457,7 @@
       </p:grpSpPr>
       <p:sp>
         <p:nvSpPr>
-          <p:cNvPr id="195" name="Google Shape;195;p32"/>
+          <p:cNvPr id="207" name="Google Shape;207;p32"/>
           <p:cNvSpPr txBox="1"/>
           <p:nvPr/>
         </p:nvSpPr>
@@ -20737,7 +21523,7 @@
       </p:sp>
       <p:sp>
         <p:nvSpPr>
-          <p:cNvPr id="196" name="Google Shape;196;p32"/>
+          <p:cNvPr id="208" name="Google Shape;208;p32"/>
           <p:cNvSpPr txBox="1"/>
           <p:nvPr/>
         </p:nvSpPr>
@@ -21460,7 +22246,7 @@
       </p:sp>
       <p:pic>
         <p:nvPicPr>
-          <p:cNvPr id="197" name="Google Shape;197;p32"/>
+          <p:cNvPr id="209" name="Google Shape;209;p32"/>
           <p:cNvPicPr preferRelativeResize="0"/>
           <p:nvPr/>
         </p:nvPicPr>
@@ -21510,7 +22296,7 @@
   <p:cSld>
     <p:spTree>
       <p:nvGrpSpPr>
-        <p:cNvPr id="1" name="Shape 201"/>
+        <p:cNvPr id="1" name="Shape 213"/>
         <p:cNvGrpSpPr/>
         <p:nvPr/>
       </p:nvGrpSpPr>
@@ -21524,7 +22310,7 @@
       </p:grpSpPr>
       <p:sp>
         <p:nvSpPr>
-          <p:cNvPr id="202" name="Google Shape;202;p33"/>
+          <p:cNvPr id="214" name="Google Shape;214;p33"/>
           <p:cNvSpPr txBox="1"/>
           <p:nvPr/>
         </p:nvSpPr>
@@ -21590,7 +22376,7 @@
       </p:sp>
       <p:sp>
         <p:nvSpPr>
-          <p:cNvPr id="203" name="Google Shape;203;p33"/>
+          <p:cNvPr id="215" name="Google Shape;215;p33"/>
           <p:cNvSpPr txBox="1"/>
           <p:nvPr/>
         </p:nvSpPr>
@@ -21819,7 +22605,7 @@
       </p:sp>
       <p:pic>
         <p:nvPicPr>
-          <p:cNvPr id="204" name="Google Shape;204;p33"/>
+          <p:cNvPr id="216" name="Google Shape;216;p33"/>
           <p:cNvPicPr preferRelativeResize="0"/>
           <p:nvPr/>
         </p:nvPicPr>
@@ -22112,7 +22898,7 @@
   <p:cSld>
     <p:spTree>
       <p:nvGrpSpPr>
-        <p:cNvPr id="1" name="Shape 208"/>
+        <p:cNvPr id="1" name="Shape 220"/>
         <p:cNvGrpSpPr/>
         <p:nvPr/>
       </p:nvGrpSpPr>
@@ -22126,7 +22912,7 @@
       </p:grpSpPr>
       <p:sp>
         <p:nvSpPr>
-          <p:cNvPr id="209" name="Google Shape;209;p34"/>
+          <p:cNvPr id="221" name="Google Shape;221;p34"/>
           <p:cNvSpPr txBox="1"/>
           <p:nvPr/>
         </p:nvSpPr>
@@ -22192,7 +22978,7 @@
       </p:sp>
       <p:sp>
         <p:nvSpPr>
-          <p:cNvPr id="210" name="Google Shape;210;p34"/>
+          <p:cNvPr id="222" name="Google Shape;222;p34"/>
           <p:cNvSpPr txBox="1"/>
           <p:nvPr/>
         </p:nvSpPr>
@@ -22435,7 +23221,7 @@
       </p:sp>
       <p:pic>
         <p:nvPicPr>
-          <p:cNvPr id="211" name="Google Shape;211;p34"/>
+          <p:cNvPr id="223" name="Google Shape;223;p34"/>
           <p:cNvPicPr preferRelativeResize="0"/>
           <p:nvPr/>
         </p:nvPicPr>
@@ -22473,7 +23259,7 @@
       </p:pic>
       <p:pic>
         <p:nvPicPr>
-          <p:cNvPr id="212" name="Google Shape;212;p34"/>
+          <p:cNvPr id="224" name="Google Shape;224;p34"/>
           <p:cNvPicPr preferRelativeResize="0"/>
           <p:nvPr/>
         </p:nvPicPr>
@@ -22517,7 +23303,7 @@
   <p:cSld>
     <p:spTree>
       <p:nvGrpSpPr>
-        <p:cNvPr id="1" name="Shape 216"/>
+        <p:cNvPr id="1" name="Shape 228"/>
         <p:cNvGrpSpPr/>
         <p:nvPr/>
       </p:nvGrpSpPr>
@@ -22531,7 +23317,7 @@
       </p:grpSpPr>
       <p:sp>
         <p:nvSpPr>
-          <p:cNvPr id="217" name="Google Shape;217;p35"/>
+          <p:cNvPr id="229" name="Google Shape;229;p35"/>
           <p:cNvSpPr txBox="1"/>
           <p:nvPr/>
         </p:nvSpPr>
@@ -22597,7 +23383,7 @@
       </p:sp>
       <p:sp>
         <p:nvSpPr>
-          <p:cNvPr id="218" name="Google Shape;218;p35"/>
+          <p:cNvPr id="230" name="Google Shape;230;p35"/>
           <p:cNvSpPr txBox="1"/>
           <p:nvPr/>
         </p:nvSpPr>
@@ -22838,7 +23624,7 @@
       </p:sp>
       <p:pic>
         <p:nvPicPr>
-          <p:cNvPr id="219" name="Google Shape;219;p35"/>
+          <p:cNvPr id="231" name="Google Shape;231;p35"/>
           <p:cNvPicPr preferRelativeResize="0"/>
           <p:nvPr/>
         </p:nvPicPr>
@@ -22883,7 +23669,7 @@
   <p:cSld>
     <p:spTree>
       <p:nvGrpSpPr>
-        <p:cNvPr id="1" name="Shape 223"/>
+        <p:cNvPr id="1" name="Shape 235"/>
         <p:cNvGrpSpPr/>
         <p:nvPr/>
       </p:nvGrpSpPr>
@@ -22897,7 +23683,7 @@
       </p:grpSpPr>
       <p:sp>
         <p:nvSpPr>
-          <p:cNvPr id="224" name="Google Shape;224;p36"/>
+          <p:cNvPr id="236" name="Google Shape;236;p36"/>
           <p:cNvSpPr txBox="1"/>
           <p:nvPr/>
         </p:nvSpPr>
@@ -22963,14 +23749,14 @@
       </p:sp>
       <p:sp>
         <p:nvSpPr>
-          <p:cNvPr id="225" name="Google Shape;225;p36"/>
+          <p:cNvPr id="237" name="Google Shape;237;p36"/>
           <p:cNvSpPr txBox="1"/>
           <p:nvPr/>
         </p:nvSpPr>
         <p:spPr>
           <a:xfrm>
             <a:off x="55070" y="502908"/>
-            <a:ext cx="4503900" cy="526500"/>
+            <a:ext cx="4503900" cy="541800"/>
           </a:xfrm>
           <a:prstGeom prst="rect">
             <a:avLst/>
@@ -22994,7 +23780,7 @@
           </a:bodyPr>
           <a:lstStyle/>
           <a:p>
-            <a:pPr marL="171450" marR="0" lvl="0" indent="-127000" algn="l" rtl="0">
+            <a:pPr marL="171450" marR="0" lvl="0" indent="-133350" algn="l" rtl="0">
               <a:lnSpc>
                 <a:spcPct val="100000"/>
               </a:lnSpc>
@@ -23007,12 +23793,12 @@
               <a:buClr>
                 <a:srgbClr val="FF0000"/>
               </a:buClr>
-              <a:buSzPts val="1100"/>
+              <a:buSzPts val="1200"/>
               <a:buFont typeface="Calibri"/>
               <a:buChar char="●"/>
             </a:pPr>
             <a:r>
-              <a:rPr lang="en" sz="1100" b="1">
+              <a:rPr lang="en" sz="1200" b="1">
                 <a:solidFill>
                   <a:srgbClr val="FF0000"/>
                 </a:solidFill>
@@ -23023,7 +23809,7 @@
               </a:rPr>
               <a:t>Anthropic sues Pentagon</a:t>
             </a:r>
-            <a:endParaRPr sz="1100" b="1">
+            <a:endParaRPr sz="1200" b="1">
               <a:solidFill>
                 <a:srgbClr val="FF0000"/>
               </a:solidFill>
@@ -23068,14 +23854,14 @@
       </p:sp>
       <p:sp>
         <p:nvSpPr>
-          <p:cNvPr id="226" name="Google Shape;226;p36"/>
+          <p:cNvPr id="238" name="Google Shape;238;p36"/>
           <p:cNvSpPr txBox="1"/>
           <p:nvPr/>
         </p:nvSpPr>
         <p:spPr>
           <a:xfrm>
             <a:off x="55070" y="2120008"/>
-            <a:ext cx="4503900" cy="2896800"/>
+            <a:ext cx="4503900" cy="2912100"/>
           </a:xfrm>
           <a:prstGeom prst="rect">
             <a:avLst/>
@@ -23099,7 +23885,7 @@
           </a:bodyPr>
           <a:lstStyle/>
           <a:p>
-            <a:pPr marL="171450" marR="0" lvl="0" indent="-127000" algn="l" rtl="0">
+            <a:pPr marL="171450" marR="0" lvl="0" indent="-133350" algn="l" rtl="0">
               <a:lnSpc>
                 <a:spcPct val="100000"/>
               </a:lnSpc>
@@ -23112,12 +23898,12 @@
               <a:buClr>
                 <a:srgbClr val="FF0000"/>
               </a:buClr>
-              <a:buSzPts val="1100"/>
+              <a:buSzPts val="1200"/>
               <a:buFont typeface="Calibri"/>
               <a:buChar char="●"/>
             </a:pPr>
             <a:r>
-              <a:rPr lang="en" sz="1100" b="1">
+              <a:rPr lang="en" sz="1200" b="1">
                 <a:solidFill>
                   <a:srgbClr val="FF0000"/>
                 </a:solidFill>
@@ -23128,7 +23914,7 @@
               </a:rPr>
               <a:t>Anthropic has launched Claude Marketplace</a:t>
             </a:r>
-            <a:endParaRPr sz="1100" b="1">
+            <a:endParaRPr sz="1200" b="1">
               <a:solidFill>
                 <a:srgbClr val="FF0000"/>
               </a:solidFill>
@@ -23297,14 +24083,14 @@
       </p:sp>
       <p:sp>
         <p:nvSpPr>
-          <p:cNvPr id="227" name="Google Shape;227;p36"/>
+          <p:cNvPr id="239" name="Google Shape;239;p36"/>
           <p:cNvSpPr txBox="1"/>
           <p:nvPr/>
         </p:nvSpPr>
         <p:spPr>
           <a:xfrm>
             <a:off x="55070" y="1142258"/>
-            <a:ext cx="4503900" cy="864900"/>
+            <a:ext cx="4503900" cy="880500"/>
           </a:xfrm>
           <a:prstGeom prst="rect">
             <a:avLst/>
@@ -23343,7 +24129,7 @@
               <a:buChar char="●"/>
             </a:pPr>
             <a:r>
-              <a:rPr lang="en" sz="1100" b="1">
+              <a:rPr lang="en" sz="1200" b="1">
                 <a:solidFill>
                   <a:srgbClr val="FF0000"/>
                 </a:solidFill>
@@ -23411,6 +24197,84 @@
           </a:p>
         </p:txBody>
       </p:sp>
+      <p:pic>
+        <p:nvPicPr>
+          <p:cNvPr id="240" name="Google Shape;240;p36"/>
+          <p:cNvPicPr preferRelativeResize="0"/>
+          <p:nvPr/>
+        </p:nvPicPr>
+        <p:blipFill>
+          <a:blip r:embed="rId3" cstate="email">
+            <a:alphaModFix/>
+            <a:extLst>
+              <a:ext uri="{28A0092B-C50C-407E-A947-70E740481C1C}">
+                <a14:useLocalDpi xmlns:a14="http://schemas.microsoft.com/office/drawing/2010/main"/>
+              </a:ext>
+            </a:extLst>
+          </a:blip>
+          <a:stretch>
+            <a:fillRect/>
+          </a:stretch>
+        </p:blipFill>
+        <p:spPr>
+          <a:xfrm>
+            <a:off x="4819425" y="63650"/>
+            <a:ext cx="3482861" cy="1959101"/>
+          </a:xfrm>
+          <a:prstGeom prst="rect">
+            <a:avLst/>
+          </a:prstGeom>
+          <a:noFill/>
+          <a:ln w="9525" cap="flat" cmpd="sng">
+            <a:solidFill>
+              <a:srgbClr val="FF0000"/>
+            </a:solidFill>
+            <a:prstDash val="solid"/>
+            <a:round/>
+            <a:headEnd type="none" w="sm" len="sm"/>
+            <a:tailEnd type="none" w="sm" len="sm"/>
+          </a:ln>
+        </p:spPr>
+      </p:pic>
+      <p:pic>
+        <p:nvPicPr>
+          <p:cNvPr id="241" name="Google Shape;241;p36"/>
+          <p:cNvPicPr preferRelativeResize="0"/>
+          <p:nvPr/>
+        </p:nvPicPr>
+        <p:blipFill>
+          <a:blip r:embed="rId4" cstate="email">
+            <a:alphaModFix/>
+            <a:extLst>
+              <a:ext uri="{28A0092B-C50C-407E-A947-70E740481C1C}">
+                <a14:useLocalDpi xmlns:a14="http://schemas.microsoft.com/office/drawing/2010/main"/>
+              </a:ext>
+            </a:extLst>
+          </a:blip>
+          <a:stretch>
+            <a:fillRect/>
+          </a:stretch>
+        </p:blipFill>
+        <p:spPr>
+          <a:xfrm>
+            <a:off x="4711374" y="2175150"/>
+            <a:ext cx="3726700" cy="1552800"/>
+          </a:xfrm>
+          <a:prstGeom prst="rect">
+            <a:avLst/>
+          </a:prstGeom>
+          <a:noFill/>
+          <a:ln w="9525" cap="flat" cmpd="sng">
+            <a:solidFill>
+              <a:srgbClr val="FF0000"/>
+            </a:solidFill>
+            <a:prstDash val="solid"/>
+            <a:round/>
+            <a:headEnd type="none" w="sm" len="sm"/>
+            <a:tailEnd type="none" w="sm" len="sm"/>
+          </a:ln>
+        </p:spPr>
+      </p:pic>
     </p:spTree>
   </p:cSld>
   <p:clrMapOvr>
@@ -23424,7 +24288,7 @@
   <p:cSld>
     <p:spTree>
       <p:nvGrpSpPr>
-        <p:cNvPr id="1" name="Shape 231"/>
+        <p:cNvPr id="1" name="Shape 245"/>
         <p:cNvGrpSpPr/>
         <p:nvPr/>
       </p:nvGrpSpPr>
@@ -23438,7 +24302,7 @@
       </p:grpSpPr>
       <p:sp>
         <p:nvSpPr>
-          <p:cNvPr id="232" name="Google Shape;232;p37"/>
+          <p:cNvPr id="246" name="Google Shape;246;p37"/>
           <p:cNvSpPr txBox="1"/>
           <p:nvPr/>
         </p:nvSpPr>
@@ -23504,7 +24368,7 @@
       </p:sp>
       <p:sp>
         <p:nvSpPr>
-          <p:cNvPr id="233" name="Google Shape;233;p37"/>
+          <p:cNvPr id="247" name="Google Shape;247;p37"/>
           <p:cNvSpPr txBox="1"/>
           <p:nvPr/>
         </p:nvSpPr>
@@ -23755,7 +24619,7 @@
       </p:sp>
       <p:sp>
         <p:nvSpPr>
-          <p:cNvPr id="234" name="Google Shape;234;p37"/>
+          <p:cNvPr id="248" name="Google Shape;248;p37"/>
           <p:cNvSpPr txBox="1"/>
           <p:nvPr/>
         </p:nvSpPr>
@@ -24068,7 +24932,7 @@
       </p:sp>
       <p:pic>
         <p:nvPicPr>
-          <p:cNvPr id="235" name="Google Shape;235;p37"/>
+          <p:cNvPr id="249" name="Google Shape;249;p37"/>
           <p:cNvPicPr preferRelativeResize="0"/>
           <p:nvPr/>
         </p:nvPicPr>
@@ -24112,7 +24976,7 @@
   <p:cSld>
     <p:spTree>
       <p:nvGrpSpPr>
-        <p:cNvPr id="1" name="Shape 239"/>
+        <p:cNvPr id="1" name="Shape 253"/>
         <p:cNvGrpSpPr/>
         <p:nvPr/>
       </p:nvGrpSpPr>
@@ -24126,7 +24990,7 @@
       </p:grpSpPr>
       <p:sp>
         <p:nvSpPr>
-          <p:cNvPr id="240" name="Google Shape;240;p38"/>
+          <p:cNvPr id="254" name="Google Shape;254;p38"/>
           <p:cNvSpPr txBox="1"/>
           <p:nvPr/>
         </p:nvSpPr>
@@ -24192,7 +25056,7 @@
       </p:sp>
       <p:sp>
         <p:nvSpPr>
-          <p:cNvPr id="241" name="Google Shape;241;p38"/>
+          <p:cNvPr id="255" name="Google Shape;255;p38"/>
           <p:cNvSpPr txBox="1"/>
           <p:nvPr/>
         </p:nvSpPr>
@@ -24613,7 +25477,7 @@
       </p:sp>
       <p:pic>
         <p:nvPicPr>
-          <p:cNvPr id="242" name="Google Shape;242;p38"/>
+          <p:cNvPr id="256" name="Google Shape;256;p38"/>
           <p:cNvPicPr preferRelativeResize="0"/>
           <p:nvPr/>
         </p:nvPicPr>
@@ -24651,7 +25515,7 @@
       </p:pic>
       <p:sp>
         <p:nvSpPr>
-          <p:cNvPr id="243" name="Google Shape;243;p38"/>
+          <p:cNvPr id="257" name="Google Shape;257;p38"/>
           <p:cNvSpPr txBox="1"/>
           <p:nvPr/>
         </p:nvSpPr>
@@ -24834,7 +25698,7 @@
       </p:sp>
       <p:sp>
         <p:nvSpPr>
-          <p:cNvPr id="244" name="Google Shape;244;p38"/>
+          <p:cNvPr id="258" name="Google Shape;258;p38"/>
           <p:cNvSpPr txBox="1"/>
           <p:nvPr/>
         </p:nvSpPr>
@@ -24910,7 +25774,7 @@
   <p:cSld>
     <p:spTree>
       <p:nvGrpSpPr>
-        <p:cNvPr id="1" name="Shape 248"/>
+        <p:cNvPr id="1" name="Shape 262"/>
         <p:cNvGrpSpPr/>
         <p:nvPr/>
       </p:nvGrpSpPr>
@@ -24924,7 +25788,7 @@
       </p:grpSpPr>
       <p:sp>
         <p:nvSpPr>
-          <p:cNvPr id="249" name="Google Shape;249;p39"/>
+          <p:cNvPr id="263" name="Google Shape;263;p39"/>
           <p:cNvSpPr txBox="1"/>
           <p:nvPr/>
         </p:nvSpPr>
@@ -24990,7 +25854,7 @@
       </p:sp>
       <p:sp>
         <p:nvSpPr>
-          <p:cNvPr id="250" name="Google Shape;250;p39"/>
+          <p:cNvPr id="264" name="Google Shape;264;p39"/>
           <p:cNvSpPr txBox="1"/>
           <p:nvPr/>
         </p:nvSpPr>
@@ -25386,7 +26250,7 @@
       </p:sp>
       <p:pic>
         <p:nvPicPr>
-          <p:cNvPr id="251" name="Google Shape;251;p39"/>
+          <p:cNvPr id="265" name="Google Shape;265;p39"/>
           <p:cNvPicPr preferRelativeResize="0"/>
           <p:nvPr/>
         </p:nvPicPr>
@@ -25400,8 +26264,368 @@
         </p:blipFill>
         <p:spPr>
           <a:xfrm>
-            <a:off x="4781920" y="815625"/>
+            <a:off x="4693495" y="152424"/>
             <a:ext cx="3028950" cy="1514475"/>
+          </a:xfrm>
+          <a:prstGeom prst="rect">
+            <a:avLst/>
+          </a:prstGeom>
+          <a:noFill/>
+          <a:ln w="9525" cap="flat" cmpd="sng">
+            <a:solidFill>
+              <a:srgbClr val="FF0000"/>
+            </a:solidFill>
+            <a:prstDash val="solid"/>
+            <a:round/>
+            <a:headEnd type="none" w="sm" len="sm"/>
+            <a:tailEnd type="none" w="sm" len="sm"/>
+          </a:ln>
+        </p:spPr>
+      </p:pic>
+      <p:sp>
+        <p:nvSpPr>
+          <p:cNvPr id="266" name="Google Shape;266;p39"/>
+          <p:cNvSpPr txBox="1"/>
+          <p:nvPr/>
+        </p:nvSpPr>
+        <p:spPr>
+          <a:xfrm>
+            <a:off x="4687075" y="1781582"/>
+            <a:ext cx="4375800" cy="1680900"/>
+          </a:xfrm>
+          <a:prstGeom prst="rect">
+            <a:avLst/>
+          </a:prstGeom>
+          <a:solidFill>
+            <a:srgbClr val="FFF2CC"/>
+          </a:solidFill>
+          <a:ln w="9525" cap="flat" cmpd="sng">
+            <a:solidFill>
+              <a:srgbClr val="FF0000"/>
+            </a:solidFill>
+            <a:prstDash val="solid"/>
+            <a:round/>
+            <a:headEnd type="none" w="sm" len="sm"/>
+            <a:tailEnd type="none" w="sm" len="sm"/>
+          </a:ln>
+        </p:spPr>
+        <p:txBody>
+          <a:bodyPr spcFirstLastPara="1" wrap="square" lIns="9125" tIns="9125" rIns="9125" bIns="9125" anchor="t" anchorCtr="0">
+            <a:spAutoFit/>
+          </a:bodyPr>
+          <a:lstStyle/>
+          <a:p>
+            <a:pPr marL="171450" marR="0" lvl="0" indent="-133350" algn="l" rtl="0">
+              <a:lnSpc>
+                <a:spcPct val="100000"/>
+              </a:lnSpc>
+              <a:spcBef>
+                <a:spcPts val="0"/>
+              </a:spcBef>
+              <a:spcAft>
+                <a:spcPts val="0"/>
+              </a:spcAft>
+              <a:buClr>
+                <a:srgbClr val="FF0000"/>
+              </a:buClr>
+              <a:buSzPts val="1200"/>
+              <a:buFont typeface="Calibri"/>
+              <a:buChar char="●"/>
+            </a:pPr>
+            <a:r>
+              <a:rPr lang="en" sz="1200" b="1">
+                <a:solidFill>
+                  <a:srgbClr val="FF0000"/>
+                </a:solidFill>
+                <a:latin typeface="Calibri"/>
+                <a:ea typeface="Calibri"/>
+                <a:cs typeface="Calibri"/>
+                <a:sym typeface="Calibri"/>
+              </a:rPr>
+              <a:t>Modeling a fruit fly brain</a:t>
+            </a:r>
+            <a:endParaRPr sz="1200" b="1">
+              <a:solidFill>
+                <a:srgbClr val="FF0000"/>
+              </a:solidFill>
+              <a:latin typeface="Calibri"/>
+              <a:ea typeface="Calibri"/>
+              <a:cs typeface="Calibri"/>
+              <a:sym typeface="Calibri"/>
+            </a:endParaRPr>
+          </a:p>
+          <a:p>
+            <a:pPr marL="171450" marR="0" lvl="0" indent="-133350" algn="l" rtl="0">
+              <a:lnSpc>
+                <a:spcPct val="100000"/>
+              </a:lnSpc>
+              <a:spcBef>
+                <a:spcPts val="0"/>
+              </a:spcBef>
+              <a:spcAft>
+                <a:spcPts val="0"/>
+              </a:spcAft>
+              <a:buSzPts val="1200"/>
+              <a:buFont typeface="Calibri"/>
+              <a:buChar char="●"/>
+            </a:pPr>
+            <a:r>
+              <a:rPr lang="en" sz="1200">
+                <a:latin typeface="Calibri"/>
+                <a:ea typeface="Calibri"/>
+                <a:cs typeface="Calibri"/>
+                <a:sym typeface="Calibri"/>
+              </a:rPr>
+              <a:t>wired as in nature, inside a 3D simulated fly body so behaviors emerge from biology, not trained AI</a:t>
+            </a:r>
+            <a:endParaRPr sz="1200">
+              <a:latin typeface="Calibri"/>
+              <a:ea typeface="Calibri"/>
+              <a:cs typeface="Calibri"/>
+              <a:sym typeface="Calibri"/>
+            </a:endParaRPr>
+          </a:p>
+          <a:p>
+            <a:pPr marL="171450" marR="0" lvl="0" indent="-133350" algn="l" rtl="0">
+              <a:lnSpc>
+                <a:spcPct val="100000"/>
+              </a:lnSpc>
+              <a:spcBef>
+                <a:spcPts val="0"/>
+              </a:spcBef>
+              <a:spcAft>
+                <a:spcPts val="0"/>
+              </a:spcAft>
+              <a:buSzPts val="1200"/>
+              <a:buFont typeface="Calibri"/>
+              <a:buChar char="●"/>
+            </a:pPr>
+            <a:r>
+              <a:rPr lang="en" sz="1200">
+                <a:latin typeface="Calibri"/>
+                <a:ea typeface="Calibri"/>
+                <a:cs typeface="Calibri"/>
+                <a:sym typeface="Calibri"/>
+              </a:rPr>
+              <a:t>This “uploaded” animal walks and reacts realistically</a:t>
+            </a:r>
+            <a:endParaRPr sz="1200">
+              <a:latin typeface="Calibri"/>
+              <a:ea typeface="Calibri"/>
+              <a:cs typeface="Calibri"/>
+              <a:sym typeface="Calibri"/>
+            </a:endParaRPr>
+          </a:p>
+          <a:p>
+            <a:pPr marL="171450" marR="0" lvl="0" indent="-133350" algn="l" rtl="0">
+              <a:lnSpc>
+                <a:spcPct val="100000"/>
+              </a:lnSpc>
+              <a:spcBef>
+                <a:spcPts val="0"/>
+              </a:spcBef>
+              <a:spcAft>
+                <a:spcPts val="0"/>
+              </a:spcAft>
+              <a:buSzPts val="1200"/>
+              <a:buFont typeface="Calibri"/>
+              <a:buChar char="●"/>
+            </a:pPr>
+            <a:r>
+              <a:rPr lang="en" sz="1200">
+                <a:latin typeface="Calibri"/>
+                <a:ea typeface="Calibri"/>
+                <a:cs typeface="Calibri"/>
+                <a:sym typeface="Calibri"/>
+              </a:rPr>
+              <a:t>In 1 year: from a 302‑neuron worm to a ~125k‑neuron fly</a:t>
+            </a:r>
+            <a:endParaRPr sz="1200">
+              <a:latin typeface="Calibri"/>
+              <a:ea typeface="Calibri"/>
+              <a:cs typeface="Calibri"/>
+              <a:sym typeface="Calibri"/>
+            </a:endParaRPr>
+          </a:p>
+          <a:p>
+            <a:pPr marL="171450" marR="0" lvl="0" indent="-133350" algn="l" rtl="0">
+              <a:lnSpc>
+                <a:spcPct val="100000"/>
+              </a:lnSpc>
+              <a:spcBef>
+                <a:spcPts val="0"/>
+              </a:spcBef>
+              <a:spcAft>
+                <a:spcPts val="0"/>
+              </a:spcAft>
+              <a:buSzPts val="1200"/>
+              <a:buFont typeface="Calibri"/>
+              <a:buChar char="●"/>
+            </a:pPr>
+            <a:r>
+              <a:rPr lang="en" sz="1200">
+                <a:latin typeface="Calibri"/>
+                <a:ea typeface="Calibri"/>
+                <a:cs typeface="Calibri"/>
+                <a:sym typeface="Calibri"/>
+              </a:rPr>
+              <a:t>Humans ~ 30...80 Bln (only !!)</a:t>
+            </a:r>
+            <a:endParaRPr sz="1200">
+              <a:latin typeface="Calibri"/>
+              <a:ea typeface="Calibri"/>
+              <a:cs typeface="Calibri"/>
+              <a:sym typeface="Calibri"/>
+            </a:endParaRPr>
+          </a:p>
+          <a:p>
+            <a:pPr marL="171450" marR="0" lvl="0" indent="-133350" algn="l" rtl="0">
+              <a:lnSpc>
+                <a:spcPct val="100000"/>
+              </a:lnSpc>
+              <a:spcBef>
+                <a:spcPts val="0"/>
+              </a:spcBef>
+              <a:spcAft>
+                <a:spcPts val="0"/>
+              </a:spcAft>
+              <a:buSzPts val="1200"/>
+              <a:buFont typeface="Calibri"/>
+              <a:buChar char="●"/>
+            </a:pPr>
+            <a:r>
+              <a:rPr lang="en" sz="1200" u="sng">
+                <a:solidFill>
+                  <a:schemeClr val="hlink"/>
+                </a:solidFill>
+                <a:latin typeface="Calibri"/>
+                <a:ea typeface="Calibri"/>
+                <a:cs typeface="Calibri"/>
+                <a:sym typeface="Calibri"/>
+                <a:hlinkClick r:id="rId8"/>
+              </a:rPr>
+              <a:t>https://flywire.ai</a:t>
+            </a:r>
+            <a:endParaRPr sz="1200">
+              <a:latin typeface="Calibri"/>
+              <a:ea typeface="Calibri"/>
+              <a:cs typeface="Calibri"/>
+              <a:sym typeface="Calibri"/>
+            </a:endParaRPr>
+          </a:p>
+          <a:p>
+            <a:pPr marL="171450" marR="0" lvl="0" indent="-133350" algn="l" rtl="0">
+              <a:lnSpc>
+                <a:spcPct val="100000"/>
+              </a:lnSpc>
+              <a:spcBef>
+                <a:spcPts val="0"/>
+              </a:spcBef>
+              <a:spcAft>
+                <a:spcPts val="0"/>
+              </a:spcAft>
+              <a:buSzPts val="1200"/>
+              <a:buFont typeface="Calibri"/>
+              <a:buChar char="●"/>
+            </a:pPr>
+            <a:r>
+              <a:rPr lang="en" sz="1200" u="sng">
+                <a:solidFill>
+                  <a:schemeClr val="hlink"/>
+                </a:solidFill>
+                <a:latin typeface="Calibri"/>
+                <a:ea typeface="Calibri"/>
+                <a:cs typeface="Calibri"/>
+                <a:sym typeface="Calibri"/>
+                <a:hlinkClick r:id="rId9"/>
+              </a:rPr>
+              <a:t>https://x.com/michaelandregg/status/2030764512488677736</a:t>
+            </a:r>
+            <a:r>
+              <a:rPr lang="en" sz="1200">
+                <a:latin typeface="Calibri"/>
+                <a:ea typeface="Calibri"/>
+                <a:cs typeface="Calibri"/>
+                <a:sym typeface="Calibri"/>
+              </a:rPr>
+              <a:t> </a:t>
+            </a:r>
+            <a:endParaRPr sz="1200">
+              <a:latin typeface="Calibri"/>
+              <a:ea typeface="Calibri"/>
+              <a:cs typeface="Calibri"/>
+              <a:sym typeface="Calibri"/>
+            </a:endParaRPr>
+          </a:p>
+          <a:p>
+            <a:pPr marL="171450" marR="0" lvl="0" indent="-133350" algn="l" rtl="0">
+              <a:lnSpc>
+                <a:spcPct val="100000"/>
+              </a:lnSpc>
+              <a:spcBef>
+                <a:spcPts val="0"/>
+              </a:spcBef>
+              <a:spcAft>
+                <a:spcPts val="0"/>
+              </a:spcAft>
+              <a:buSzPts val="1200"/>
+              <a:buFont typeface="Calibri"/>
+              <a:buChar char="●"/>
+            </a:pPr>
+            <a:r>
+              <a:rPr lang="en" sz="1200" u="sng">
+                <a:solidFill>
+                  <a:schemeClr val="hlink"/>
+                </a:solidFill>
+                <a:latin typeface="Calibri"/>
+                <a:ea typeface="Calibri"/>
+                <a:cs typeface="Calibri"/>
+                <a:sym typeface="Calibri"/>
+                <a:hlinkClick r:id="rId10"/>
+              </a:rPr>
+              <a:t>https://www.youtube.com/watch?v=N2ccho6ug1w</a:t>
+            </a:r>
+            <a:r>
+              <a:rPr lang="en" sz="1200">
+                <a:latin typeface="Calibri"/>
+                <a:ea typeface="Calibri"/>
+                <a:cs typeface="Calibri"/>
+                <a:sym typeface="Calibri"/>
+              </a:rPr>
+              <a:t> - video</a:t>
+            </a:r>
+            <a:endParaRPr sz="1200">
+              <a:latin typeface="Calibri"/>
+              <a:ea typeface="Calibri"/>
+              <a:cs typeface="Calibri"/>
+              <a:sym typeface="Calibri"/>
+            </a:endParaRPr>
+          </a:p>
+        </p:txBody>
+      </p:sp>
+      <p:pic>
+        <p:nvPicPr>
+          <p:cNvPr id="267" name="Google Shape;267;p39"/>
+          <p:cNvPicPr preferRelativeResize="0"/>
+          <p:nvPr/>
+        </p:nvPicPr>
+        <p:blipFill>
+          <a:blip r:embed="rId11" cstate="email">
+            <a:alphaModFix/>
+            <a:extLst>
+              <a:ext uri="{28A0092B-C50C-407E-A947-70E740481C1C}">
+                <a14:useLocalDpi xmlns:a14="http://schemas.microsoft.com/office/drawing/2010/main"/>
+              </a:ext>
+            </a:extLst>
+          </a:blip>
+          <a:stretch>
+            <a:fillRect/>
+          </a:stretch>
+        </p:blipFill>
+        <p:spPr>
+          <a:xfrm>
+            <a:off x="6700675" y="3529713"/>
+            <a:ext cx="2362200" cy="1514475"/>
           </a:xfrm>
           <a:prstGeom prst="rect">
             <a:avLst/>
@@ -25431,7 +26655,7 @@
   <p:cSld>
     <p:spTree>
       <p:nvGrpSpPr>
-        <p:cNvPr id="1" name="Shape 255"/>
+        <p:cNvPr id="1" name="Shape 271"/>
         <p:cNvGrpSpPr/>
         <p:nvPr/>
       </p:nvGrpSpPr>
@@ -25445,7 +26669,7 @@
       </p:grpSpPr>
       <p:sp>
         <p:nvSpPr>
-          <p:cNvPr id="256" name="Google Shape;256;p40"/>
+          <p:cNvPr id="272" name="Google Shape;272;p40"/>
           <p:cNvSpPr txBox="1"/>
           <p:nvPr/>
         </p:nvSpPr>
@@ -25511,7 +26735,7 @@
       </p:sp>
       <p:sp>
         <p:nvSpPr>
-          <p:cNvPr id="257" name="Google Shape;257;p40"/>
+          <p:cNvPr id="273" name="Google Shape;273;p40"/>
           <p:cNvSpPr txBox="1"/>
           <p:nvPr/>
         </p:nvSpPr>
@@ -25829,7 +27053,7 @@
       </p:sp>
       <p:pic>
         <p:nvPicPr>
-          <p:cNvPr id="258" name="Google Shape;258;p40"/>
+          <p:cNvPr id="274" name="Google Shape;274;p40"/>
           <p:cNvPicPr preferRelativeResize="0"/>
           <p:nvPr/>
         </p:nvPicPr>
@@ -25868,7 +27092,7 @@
       </p:pic>
       <p:sp>
         <p:nvSpPr>
-          <p:cNvPr id="259" name="Google Shape;259;p40"/>
+          <p:cNvPr id="275" name="Google Shape;275;p40"/>
           <p:cNvSpPr txBox="1"/>
           <p:nvPr/>
         </p:nvSpPr>
@@ -26036,7 +27260,7 @@
   <p:cSld>
     <p:spTree>
       <p:nvGrpSpPr>
-        <p:cNvPr id="1" name="Shape 263"/>
+        <p:cNvPr id="1" name="Shape 279"/>
         <p:cNvGrpSpPr/>
         <p:nvPr/>
       </p:nvGrpSpPr>
@@ -26050,7 +27274,7 @@
       </p:grpSpPr>
       <p:sp>
         <p:nvSpPr>
-          <p:cNvPr id="264" name="Google Shape;264;p41"/>
+          <p:cNvPr id="280" name="Google Shape;280;p41"/>
           <p:cNvSpPr txBox="1"/>
           <p:nvPr/>
         </p:nvSpPr>
@@ -26116,13 +27340,13 @@
       </p:sp>
       <p:sp>
         <p:nvSpPr>
-          <p:cNvPr id="265" name="Google Shape;265;p41"/>
+          <p:cNvPr id="281" name="Google Shape;281;p41"/>
           <p:cNvSpPr txBox="1"/>
           <p:nvPr/>
         </p:nvSpPr>
         <p:spPr>
           <a:xfrm>
-            <a:off x="43820" y="515926"/>
+            <a:off x="55070" y="476376"/>
             <a:ext cx="4503900" cy="2604300"/>
           </a:xfrm>
           <a:prstGeom prst="rect">
@@ -26358,7 +27582,7 @@
       </p:sp>
       <p:pic>
         <p:nvPicPr>
-          <p:cNvPr id="266" name="Google Shape;266;p41"/>
+          <p:cNvPr id="282" name="Google Shape;282;p41"/>
           <p:cNvPicPr preferRelativeResize="0"/>
           <p:nvPr/>
         </p:nvPicPr>
@@ -26372,7 +27596,7 @@
         </p:blipFill>
         <p:spPr>
           <a:xfrm>
-            <a:off x="4945750" y="881600"/>
+            <a:off x="4774300" y="551900"/>
             <a:ext cx="2971800" cy="1581150"/>
           </a:xfrm>
           <a:prstGeom prst="rect">
@@ -26384,107 +27608,16 @@
           </a:ln>
         </p:spPr>
       </p:pic>
-    </p:spTree>
-  </p:cSld>
-  <p:clrMapOvr>
-    <a:masterClrMapping/>
-  </p:clrMapOvr>
-</p:sld>
-</file>
-
-<file path=ppt/slides/slide28.xml><?xml version="1.0" encoding="utf-8"?>
-<p:sld xmlns:a="http://schemas.openxmlformats.org/drawingml/2006/main" xmlns:r="http://schemas.openxmlformats.org/officeDocument/2006/relationships" xmlns:p="http://schemas.openxmlformats.org/presentationml/2006/main">
-  <p:cSld>
-    <p:spTree>
-      <p:nvGrpSpPr>
-        <p:cNvPr id="1" name="Shape 270"/>
-        <p:cNvGrpSpPr/>
-        <p:nvPr/>
-      </p:nvGrpSpPr>
-      <p:grpSpPr>
-        <a:xfrm>
-          <a:off x="0" y="0"/>
-          <a:ext cx="0" cy="0"/>
-          <a:chOff x="0" y="0"/>
-          <a:chExt cx="0" cy="0"/>
-        </a:xfrm>
-      </p:grpSpPr>
       <p:sp>
         <p:nvSpPr>
-          <p:cNvPr id="271" name="Google Shape;271;p42"/>
+          <p:cNvPr id="283" name="Google Shape;283;p41"/>
           <p:cNvSpPr txBox="1"/>
           <p:nvPr/>
         </p:nvSpPr>
         <p:spPr>
           <a:xfrm>
-            <a:off x="67350" y="52750"/>
-            <a:ext cx="3179400" cy="326400"/>
-          </a:xfrm>
-          <a:prstGeom prst="rect">
-            <a:avLst/>
-          </a:prstGeom>
-          <a:noFill/>
-          <a:ln>
-            <a:noFill/>
-          </a:ln>
-        </p:spPr>
-        <p:txBody>
-          <a:bodyPr spcFirstLastPara="1" wrap="square" lIns="9125" tIns="9125" rIns="9125" bIns="9125" anchor="t" anchorCtr="0">
-            <a:spAutoFit/>
-          </a:bodyPr>
-          <a:lstStyle/>
-          <a:p>
-            <a:pPr marL="0" marR="0" lvl="0" indent="0" algn="l" rtl="0">
-              <a:lnSpc>
-                <a:spcPct val="100000"/>
-              </a:lnSpc>
-              <a:spcBef>
-                <a:spcPts val="0"/>
-              </a:spcBef>
-              <a:spcAft>
-                <a:spcPts val="0"/>
-              </a:spcAft>
-              <a:buClr>
-                <a:schemeClr val="dk1"/>
-              </a:buClr>
-              <a:buSzPts val="1100"/>
-              <a:buFont typeface="Arial"/>
-              <a:buNone/>
-            </a:pPr>
-            <a:r>
-              <a:rPr lang="en" sz="2000" b="1" i="0" u="none" strike="noStrike" cap="none">
-                <a:solidFill>
-                  <a:schemeClr val="dk1"/>
-                </a:solidFill>
-                <a:latin typeface="Calibri"/>
-                <a:ea typeface="Calibri"/>
-                <a:cs typeface="Calibri"/>
-                <a:sym typeface="Calibri"/>
-              </a:rPr>
-              <a:t>Jobs</a:t>
-            </a:r>
-            <a:endParaRPr sz="2000" b="1" i="0" u="none" strike="noStrike" cap="none">
-              <a:solidFill>
-                <a:schemeClr val="dk1"/>
-              </a:solidFill>
-              <a:latin typeface="Calibri"/>
-              <a:ea typeface="Calibri"/>
-              <a:cs typeface="Calibri"/>
-              <a:sym typeface="Calibri"/>
-            </a:endParaRPr>
-          </a:p>
-        </p:txBody>
-      </p:sp>
-      <p:sp>
-        <p:nvSpPr>
-          <p:cNvPr id="272" name="Google Shape;272;p42"/>
-          <p:cNvSpPr txBox="1"/>
-          <p:nvPr/>
-        </p:nvSpPr>
-        <p:spPr>
-          <a:xfrm>
-            <a:off x="2134467" y="34252"/>
-            <a:ext cx="1800600" cy="387900"/>
+            <a:off x="55070" y="3246126"/>
+            <a:ext cx="4503900" cy="1680900"/>
           </a:xfrm>
           <a:prstGeom prst="rect">
             <a:avLst/>
@@ -26518,137 +27651,14 @@
               <a:spcAft>
                 <a:spcPts val="0"/>
               </a:spcAft>
+              <a:buClr>
+                <a:srgbClr val="FF0000"/>
+              </a:buClr>
               <a:buSzPts val="1200"/>
               <a:buFont typeface="Calibri"/>
               <a:buChar char="●"/>
             </a:pPr>
             <a:r>
-              <a:rPr lang="en" sz="1200" b="0" i="0" u="sng" strike="noStrike" cap="none">
-                <a:solidFill>
-                  <a:schemeClr val="hlink"/>
-                </a:solidFill>
-                <a:latin typeface="Calibri"/>
-                <a:ea typeface="Calibri"/>
-                <a:cs typeface="Calibri"/>
-                <a:sym typeface="Calibri"/>
-                <a:hlinkClick r:id="rId3"/>
-              </a:rPr>
-              <a:t>https://layoffs.fyi</a:t>
-            </a:r>
-            <a:endParaRPr sz="1200">
-              <a:latin typeface="Calibri"/>
-              <a:ea typeface="Calibri"/>
-              <a:cs typeface="Calibri"/>
-              <a:sym typeface="Calibri"/>
-            </a:endParaRPr>
-          </a:p>
-          <a:p>
-            <a:pPr marL="171450" marR="0" lvl="0" indent="-133350" algn="l" rtl="0">
-              <a:lnSpc>
-                <a:spcPct val="100000"/>
-              </a:lnSpc>
-              <a:spcBef>
-                <a:spcPts val="0"/>
-              </a:spcBef>
-              <a:spcAft>
-                <a:spcPts val="0"/>
-              </a:spcAft>
-              <a:buSzPts val="1200"/>
-              <a:buFont typeface="Calibri"/>
-              <a:buChar char="●"/>
-            </a:pPr>
-            <a:r>
-              <a:rPr lang="en" sz="1200" u="sng">
-                <a:solidFill>
-                  <a:schemeClr val="hlink"/>
-                </a:solidFill>
-                <a:latin typeface="Calibri"/>
-                <a:ea typeface="Calibri"/>
-                <a:cs typeface="Calibri"/>
-                <a:sym typeface="Calibri"/>
-                <a:hlinkClick r:id="rId4"/>
-              </a:rPr>
-              <a:t>https://trueup.io/layoffs</a:t>
-            </a:r>
-            <a:r>
-              <a:rPr lang="en" sz="1200">
-                <a:latin typeface="Calibri"/>
-                <a:ea typeface="Calibri"/>
-                <a:cs typeface="Calibri"/>
-                <a:sym typeface="Calibri"/>
-              </a:rPr>
-              <a:t> </a:t>
-            </a:r>
-            <a:r>
-              <a:rPr lang="en" sz="1200" b="0" i="0" u="none" strike="noStrike" cap="none">
-                <a:solidFill>
-                  <a:srgbClr val="000000"/>
-                </a:solidFill>
-                <a:latin typeface="Calibri"/>
-                <a:ea typeface="Calibri"/>
-                <a:cs typeface="Calibri"/>
-                <a:sym typeface="Calibri"/>
-              </a:rPr>
-              <a:t> </a:t>
-            </a:r>
-            <a:endParaRPr sz="1200" b="0" i="0" u="none" strike="noStrike" cap="none">
-              <a:solidFill>
-                <a:srgbClr val="000000"/>
-              </a:solidFill>
-              <a:latin typeface="Calibri"/>
-              <a:ea typeface="Calibri"/>
-              <a:cs typeface="Calibri"/>
-              <a:sym typeface="Calibri"/>
-            </a:endParaRPr>
-          </a:p>
-        </p:txBody>
-      </p:sp>
-      <p:sp>
-        <p:nvSpPr>
-          <p:cNvPr id="273" name="Google Shape;273;p42"/>
-          <p:cNvSpPr txBox="1"/>
-          <p:nvPr/>
-        </p:nvSpPr>
-        <p:spPr>
-          <a:xfrm>
-            <a:off x="5549900" y="3750775"/>
-            <a:ext cx="3360600" cy="1311300"/>
-          </a:xfrm>
-          <a:prstGeom prst="rect">
-            <a:avLst/>
-          </a:prstGeom>
-          <a:solidFill>
-            <a:srgbClr val="FFF2CC"/>
-          </a:solidFill>
-          <a:ln w="9525" cap="flat" cmpd="sng">
-            <a:solidFill>
-              <a:srgbClr val="FF0000"/>
-            </a:solidFill>
-            <a:prstDash val="solid"/>
-            <a:round/>
-            <a:headEnd type="none" w="sm" len="sm"/>
-            <a:tailEnd type="none" w="sm" len="sm"/>
-          </a:ln>
-        </p:spPr>
-        <p:txBody>
-          <a:bodyPr spcFirstLastPara="1" wrap="square" lIns="9125" tIns="9125" rIns="9125" bIns="9125" anchor="t" anchorCtr="0">
-            <a:spAutoFit/>
-          </a:bodyPr>
-          <a:lstStyle/>
-          <a:p>
-            <a:pPr marL="0" marR="0" lvl="0" indent="0" algn="l" rtl="0">
-              <a:lnSpc>
-                <a:spcPct val="100000"/>
-              </a:lnSpc>
-              <a:spcBef>
-                <a:spcPts val="0"/>
-              </a:spcBef>
-              <a:spcAft>
-                <a:spcPts val="0"/>
-              </a:spcAft>
-              <a:buNone/>
-            </a:pPr>
-            <a:r>
               <a:rPr lang="en" sz="1200" b="1">
                 <a:solidFill>
                   <a:srgbClr val="FF0000"/>
@@ -26658,7 +27668,7 @@
                 <a:cs typeface="Calibri"/>
                 <a:sym typeface="Calibri"/>
               </a:rPr>
-              <a:t>  Tech Layoffs by year (US only):</a:t>
+              <a:t>Skipping the "Front Door" - Alex Karp, Palantir</a:t>
             </a:r>
             <a:endParaRPr sz="1200" b="1">
               <a:solidFill>
@@ -26671,280 +27681,19 @@
             </a:endParaRPr>
           </a:p>
           <a:p>
-            <a:pPr marL="228600" marR="0" lvl="1" indent="-133350" algn="l" rtl="0">
-              <a:lnSpc>
-                <a:spcPct val="100000"/>
-              </a:lnSpc>
-              <a:spcBef>
-                <a:spcPts val="0"/>
-              </a:spcBef>
-              <a:spcAft>
-                <a:spcPts val="0"/>
-              </a:spcAft>
-              <a:buSzPts val="1200"/>
-              <a:buFont typeface="Calibri"/>
-              <a:buChar char="○"/>
-            </a:pPr>
-            <a:r>
-              <a:rPr lang="en" sz="1000" b="1">
-                <a:latin typeface="Roboto Mono"/>
-                <a:ea typeface="Roboto Mono"/>
-                <a:cs typeface="Roboto Mono"/>
-                <a:sym typeface="Roboto Mono"/>
-              </a:rPr>
-              <a:t>25K  in 2026 </a:t>
-            </a:r>
-            <a:r>
-              <a:rPr lang="en" sz="1000" b="1">
-                <a:solidFill>
-                  <a:schemeClr val="dk1"/>
-                </a:solidFill>
-                <a:latin typeface="Roboto Mono"/>
-                <a:ea typeface="Roboto Mono"/>
-                <a:cs typeface="Roboto Mono"/>
-                <a:sym typeface="Roboto Mono"/>
-              </a:rPr>
-              <a:t>(as of February 6, 2026)</a:t>
-            </a:r>
-            <a:endParaRPr sz="1000" b="1">
-              <a:latin typeface="Roboto Mono"/>
-              <a:ea typeface="Roboto Mono"/>
-              <a:cs typeface="Roboto Mono"/>
-              <a:sym typeface="Roboto Mono"/>
-            </a:endParaRPr>
-          </a:p>
-          <a:p>
-            <a:pPr marL="228600" marR="0" lvl="1" indent="-133350" algn="l" rtl="0">
-              <a:lnSpc>
-                <a:spcPct val="100000"/>
-              </a:lnSpc>
-              <a:spcBef>
-                <a:spcPts val="0"/>
-              </a:spcBef>
-              <a:spcAft>
-                <a:spcPts val="0"/>
-              </a:spcAft>
-              <a:buSzPts val="1200"/>
-              <a:buFont typeface="Calibri"/>
-              <a:buChar char="○"/>
-            </a:pPr>
-            <a:r>
-              <a:rPr lang="en" sz="1000" b="1">
-                <a:latin typeface="Roboto Mono"/>
-                <a:ea typeface="Roboto Mono"/>
-                <a:cs typeface="Roboto Mono"/>
-                <a:sym typeface="Roboto Mono"/>
-              </a:rPr>
-              <a:t>124K in 2025 </a:t>
-            </a:r>
-            <a:endParaRPr sz="1000" b="1">
-              <a:latin typeface="Roboto Mono"/>
-              <a:ea typeface="Roboto Mono"/>
-              <a:cs typeface="Roboto Mono"/>
-              <a:sym typeface="Roboto Mono"/>
-            </a:endParaRPr>
-          </a:p>
-          <a:p>
-            <a:pPr marL="228600" marR="0" lvl="1" indent="-133350" algn="l" rtl="0">
-              <a:lnSpc>
-                <a:spcPct val="100000"/>
-              </a:lnSpc>
-              <a:spcBef>
-                <a:spcPts val="0"/>
-              </a:spcBef>
-              <a:spcAft>
-                <a:spcPts val="0"/>
-              </a:spcAft>
-              <a:buSzPts val="1200"/>
-              <a:buFont typeface="Calibri"/>
-              <a:buChar char="○"/>
-            </a:pPr>
-            <a:r>
-              <a:rPr lang="en" sz="1000" b="1">
-                <a:latin typeface="Roboto Mono"/>
-                <a:ea typeface="Roboto Mono"/>
-                <a:cs typeface="Roboto Mono"/>
-                <a:sym typeface="Roboto Mono"/>
-              </a:rPr>
-              <a:t>153K in </a:t>
-            </a:r>
-            <a:r>
-              <a:rPr lang="en" sz="1000" b="1">
-                <a:solidFill>
-                  <a:srgbClr val="000000"/>
-                </a:solidFill>
-                <a:latin typeface="Roboto Mono"/>
-                <a:ea typeface="Roboto Mono"/>
-                <a:cs typeface="Roboto Mono"/>
-                <a:sym typeface="Roboto Mono"/>
-              </a:rPr>
-              <a:t>2024</a:t>
-            </a:r>
-            <a:endParaRPr sz="1000" b="1">
-              <a:latin typeface="Roboto Mono"/>
-              <a:ea typeface="Roboto Mono"/>
-              <a:cs typeface="Roboto Mono"/>
-              <a:sym typeface="Roboto Mono"/>
-            </a:endParaRPr>
-          </a:p>
-          <a:p>
-            <a:pPr marL="228600" marR="0" lvl="1" indent="-133350" algn="l" rtl="0">
-              <a:lnSpc>
-                <a:spcPct val="100000"/>
-              </a:lnSpc>
-              <a:spcBef>
-                <a:spcPts val="0"/>
-              </a:spcBef>
-              <a:spcAft>
-                <a:spcPts val="0"/>
-              </a:spcAft>
-              <a:buSzPts val="1200"/>
-              <a:buFont typeface="Calibri"/>
-              <a:buChar char="○"/>
-            </a:pPr>
-            <a:r>
-              <a:rPr lang="en" sz="1000" b="1">
-                <a:latin typeface="Roboto Mono"/>
-                <a:ea typeface="Roboto Mono"/>
-                <a:cs typeface="Roboto Mono"/>
-                <a:sym typeface="Roboto Mono"/>
-              </a:rPr>
-              <a:t>264K in 2023</a:t>
-            </a:r>
-            <a:endParaRPr sz="1000" b="1">
-              <a:latin typeface="Roboto Mono"/>
-              <a:ea typeface="Roboto Mono"/>
-              <a:cs typeface="Roboto Mono"/>
-              <a:sym typeface="Roboto Mono"/>
-            </a:endParaRPr>
-          </a:p>
-          <a:p>
-            <a:pPr marL="228600" marR="0" lvl="1" indent="-133350" algn="l" rtl="0">
-              <a:lnSpc>
-                <a:spcPct val="100000"/>
-              </a:lnSpc>
-              <a:spcBef>
-                <a:spcPts val="0"/>
-              </a:spcBef>
-              <a:spcAft>
-                <a:spcPts val="0"/>
-              </a:spcAft>
-              <a:buSzPts val="1200"/>
-              <a:buFont typeface="Calibri"/>
-              <a:buChar char="○"/>
-            </a:pPr>
-            <a:r>
-              <a:rPr lang="en" sz="1000" b="1">
-                <a:latin typeface="Roboto Mono"/>
-                <a:ea typeface="Roboto Mono"/>
-                <a:cs typeface="Roboto Mono"/>
-                <a:sym typeface="Roboto Mono"/>
-              </a:rPr>
-              <a:t>165K in 2022                  </a:t>
-            </a:r>
-            <a:r>
-              <a:rPr lang="en" sz="1200" i="0" u="sng" strike="noStrike" cap="none">
-                <a:solidFill>
-                  <a:srgbClr val="0097A7"/>
-                </a:solidFill>
-                <a:latin typeface="Calibri"/>
-                <a:ea typeface="Calibri"/>
-                <a:cs typeface="Calibri"/>
-                <a:sym typeface="Calibri"/>
-                <a:hlinkClick r:id="rId3">
-                  <a:extLst>
-                    <a:ext uri="{A12FA001-AC4F-418D-AE19-62706E023703}">
-                      <ahyp:hlinkClr xmlns:ahyp="http://schemas.microsoft.com/office/drawing/2018/hyperlinkcolor" val="tx"/>
-                    </a:ext>
-                  </a:extLst>
-                </a:hlinkClick>
-              </a:rPr>
-              <a:t>https://layoffs.fyi</a:t>
-            </a:r>
-            <a:endParaRPr sz="1200" i="0" u="none" strike="noStrike" cap="none">
-              <a:solidFill>
-                <a:srgbClr val="000000"/>
-              </a:solidFill>
-              <a:latin typeface="Calibri"/>
-              <a:ea typeface="Calibri"/>
-              <a:cs typeface="Calibri"/>
-              <a:sym typeface="Calibri"/>
-            </a:endParaRPr>
-          </a:p>
-        </p:txBody>
-      </p:sp>
-      <p:sp>
-        <p:nvSpPr>
-          <p:cNvPr id="274" name="Google Shape;274;p42"/>
-          <p:cNvSpPr txBox="1"/>
-          <p:nvPr/>
-        </p:nvSpPr>
-        <p:spPr>
-          <a:xfrm>
-            <a:off x="5549900" y="518450"/>
-            <a:ext cx="3558900" cy="942000"/>
-          </a:xfrm>
-          <a:prstGeom prst="rect">
-            <a:avLst/>
-          </a:prstGeom>
-          <a:solidFill>
-            <a:srgbClr val="FFF2CC"/>
-          </a:solidFill>
-          <a:ln w="9525" cap="flat" cmpd="sng">
-            <a:solidFill>
-              <a:srgbClr val="FF0000"/>
-            </a:solidFill>
-            <a:prstDash val="solid"/>
-            <a:round/>
-            <a:headEnd type="none" w="sm" len="sm"/>
-            <a:tailEnd type="none" w="sm" len="sm"/>
-          </a:ln>
-        </p:spPr>
-        <p:txBody>
-          <a:bodyPr spcFirstLastPara="1" wrap="square" lIns="9125" tIns="9125" rIns="9125" bIns="9125" anchor="t" anchorCtr="0">
-            <a:spAutoFit/>
-          </a:bodyPr>
-          <a:lstStyle/>
-          <a:p>
-            <a:pPr marL="0" lvl="0" indent="0" algn="l" rtl="0">
-              <a:spcBef>
-                <a:spcPts val="0"/>
-              </a:spcBef>
-              <a:spcAft>
-                <a:spcPts val="0"/>
-              </a:spcAft>
-              <a:buNone/>
-            </a:pPr>
-            <a:r>
-              <a:rPr lang="en" sz="1200" b="1">
-                <a:solidFill>
-                  <a:srgbClr val="FF0000"/>
-                </a:solidFill>
-                <a:latin typeface="Calibri"/>
-                <a:ea typeface="Calibri"/>
-                <a:cs typeface="Calibri"/>
-                <a:sym typeface="Calibri"/>
-              </a:rPr>
-              <a:t>  The Tech Layoff Tracker</a:t>
-            </a:r>
-            <a:endParaRPr sz="1200" b="1">
-              <a:solidFill>
-                <a:srgbClr val="FF0000"/>
-              </a:solidFill>
-              <a:latin typeface="Calibri"/>
-              <a:ea typeface="Calibri"/>
-              <a:cs typeface="Calibri"/>
-              <a:sym typeface="Calibri"/>
-            </a:endParaRPr>
-          </a:p>
-          <a:p>
-            <a:pPr marL="228600" lvl="0" indent="-133350" algn="l" rtl="0">
-              <a:spcBef>
-                <a:spcPts val="0"/>
-              </a:spcBef>
-              <a:spcAft>
-                <a:spcPts val="0"/>
-              </a:spcAft>
+            <a:pPr marL="171450" marR="0" lvl="0" indent="-133350" algn="l" rtl="0">
+              <a:lnSpc>
+                <a:spcPct val="100000"/>
+              </a:lnSpc>
+              <a:spcBef>
+                <a:spcPts val="0"/>
+              </a:spcBef>
+              <a:spcAft>
+                <a:spcPts val="0"/>
+              </a:spcAft>
+              <a:buClr>
+                <a:schemeClr val="dk1"/>
+              </a:buClr>
               <a:buSzPts val="1200"/>
               <a:buFont typeface="Calibri"/>
               <a:buChar char="●"/>
@@ -26956,25 +27705,7 @@
                 <a:cs typeface="Calibri"/>
                 <a:sym typeface="Calibri"/>
               </a:rPr>
-              <a:t>In 2026: </a:t>
-            </a:r>
-            <a:r>
-              <a:rPr lang="en" sz="1200" b="1">
-                <a:latin typeface="Calibri"/>
-                <a:ea typeface="Calibri"/>
-                <a:cs typeface="Calibri"/>
-                <a:sym typeface="Calibri"/>
-              </a:rPr>
-              <a:t>28,825</a:t>
-            </a:r>
-            <a:r>
-              <a:rPr lang="en" sz="1200">
-                <a:latin typeface="Calibri"/>
-                <a:ea typeface="Calibri"/>
-                <a:cs typeface="Calibri"/>
-                <a:sym typeface="Calibri"/>
-              </a:rPr>
-              <a:t> people laid off (779 per day)</a:t>
+              <a:t>Current websites are designed for humans to browse and compare.</a:t>
             </a:r>
             <a:endParaRPr sz="1200">
               <a:latin typeface="Calibri"/>
@@ -26984,7 +27715,10 @@
             </a:endParaRPr>
           </a:p>
           <a:p>
-            <a:pPr marL="228600" lvl="0" indent="-133350" algn="l" rtl="0">
+            <a:pPr marL="171450" marR="0" lvl="0" indent="-133350" algn="l" rtl="0">
+              <a:lnSpc>
+                <a:spcPct val="100000"/>
+              </a:lnSpc>
               <a:spcBef>
                 <a:spcPts val="0"/>
               </a:spcBef>
@@ -27002,25 +27736,7 @@
                 <a:cs typeface="Calibri"/>
                 <a:sym typeface="Calibri"/>
               </a:rPr>
-              <a:t>In 2025: </a:t>
-            </a:r>
-            <a:r>
-              <a:rPr lang="en" sz="1200" b="1">
-                <a:latin typeface="Calibri"/>
-                <a:ea typeface="Calibri"/>
-                <a:cs typeface="Calibri"/>
-                <a:sym typeface="Calibri"/>
-              </a:rPr>
-              <a:t>245,953</a:t>
-            </a:r>
-            <a:r>
-              <a:rPr lang="en" sz="1200">
-                <a:latin typeface="Calibri"/>
-                <a:ea typeface="Calibri"/>
-                <a:cs typeface="Calibri"/>
-                <a:sym typeface="Calibri"/>
-              </a:rPr>
-              <a:t> people laid off (674 per day)</a:t>
+              <a:t>AI agents will skip these "middlemen" by going directly to data and transactions via APIs</a:t>
             </a:r>
             <a:endParaRPr sz="1200">
               <a:latin typeface="Calibri"/>
@@ -27030,13 +27746,19 @@
             </a:endParaRPr>
           </a:p>
           <a:p>
-            <a:pPr marL="228600" lvl="0" indent="-133350" algn="l" rtl="0">
-              <a:spcBef>
-                <a:spcPts val="0"/>
-              </a:spcBef>
-              <a:spcAft>
-                <a:spcPts val="0"/>
-              </a:spcAft>
+            <a:pPr marL="171450" marR="0" lvl="0" indent="-133350" algn="l" rtl="0">
+              <a:lnSpc>
+                <a:spcPct val="100000"/>
+              </a:lnSpc>
+              <a:spcBef>
+                <a:spcPts val="0"/>
+              </a:spcBef>
+              <a:spcAft>
+                <a:spcPts val="0"/>
+              </a:spcAft>
+              <a:buClr>
+                <a:schemeClr val="dk1"/>
+              </a:buClr>
               <a:buSzPts val="1200"/>
               <a:buFont typeface="Calibri"/>
               <a:buChar char="●"/>
@@ -27048,46 +27770,7 @@
                 <a:cs typeface="Calibri"/>
                 <a:sym typeface="Calibri"/>
               </a:rPr>
-              <a:t>In 2024: </a:t>
-            </a:r>
-            <a:r>
-              <a:rPr lang="en" sz="1200" b="1">
-                <a:latin typeface="Calibri"/>
-                <a:ea typeface="Calibri"/>
-                <a:cs typeface="Calibri"/>
-                <a:sym typeface="Calibri"/>
-              </a:rPr>
-              <a:t>238,461</a:t>
-            </a:r>
-            <a:r>
-              <a:rPr lang="en" sz="1200">
-                <a:latin typeface="Calibri"/>
-                <a:ea typeface="Calibri"/>
-                <a:cs typeface="Calibri"/>
-                <a:sym typeface="Calibri"/>
-              </a:rPr>
-              <a:t> people </a:t>
-            </a:r>
-            <a:r>
-              <a:rPr lang="en" sz="1200">
-                <a:solidFill>
-                  <a:srgbClr val="000000"/>
-                </a:solidFill>
-                <a:latin typeface="Calibri"/>
-                <a:ea typeface="Calibri"/>
-                <a:cs typeface="Calibri"/>
-                <a:sym typeface="Calibri"/>
-              </a:rPr>
-              <a:t>laid off</a:t>
-            </a:r>
-            <a:r>
-              <a:rPr lang="en" sz="1200">
-                <a:latin typeface="Calibri"/>
-                <a:ea typeface="Calibri"/>
-                <a:cs typeface="Calibri"/>
-                <a:sym typeface="Calibri"/>
-              </a:rPr>
-              <a:t> (653 per day)</a:t>
+              <a:t>Middleman sites that rely on ad impressions and affiliate clicks will "evaporate" will lose</a:t>
             </a:r>
             <a:endParaRPr sz="1200">
               <a:latin typeface="Calibri"/>
@@ -27097,33 +27780,31 @@
             </a:endParaRPr>
           </a:p>
           <a:p>
-            <a:pPr marL="228600" marR="460857" lvl="0" indent="-57150" algn="r" rtl="0">
-              <a:spcBef>
-                <a:spcPts val="0"/>
-              </a:spcBef>
-              <a:spcAft>
-                <a:spcPts val="0"/>
-              </a:spcAft>
-              <a:buNone/>
+            <a:pPr marL="171450" marR="0" lvl="0" indent="-133350" algn="l" rtl="0">
+              <a:lnSpc>
+                <a:spcPct val="100000"/>
+              </a:lnSpc>
+              <a:spcBef>
+                <a:spcPts val="0"/>
+              </a:spcBef>
+              <a:spcAft>
+                <a:spcPts val="0"/>
+              </a:spcAft>
+              <a:buClr>
+                <a:schemeClr val="dk1"/>
+              </a:buClr>
+              <a:buSzPts val="1200"/>
+              <a:buFont typeface="Calibri"/>
+              <a:buChar char="●"/>
             </a:pPr>
             <a:r>
-              <a:rPr lang="en" sz="1200" u="sng">
-                <a:solidFill>
-                  <a:srgbClr val="0097A7"/>
-                </a:solidFill>
-                <a:latin typeface="Calibri"/>
-                <a:ea typeface="Calibri"/>
-                <a:cs typeface="Calibri"/>
-                <a:sym typeface="Calibri"/>
-                <a:hlinkClick r:id="rId4">
-                  <a:extLst>
-                    <a:ext uri="{A12FA001-AC4F-418D-AE19-62706E023703}">
-                      <ahyp:hlinkClr xmlns:ahyp="http://schemas.microsoft.com/office/drawing/2018/hyperlinkcolor" val="tx"/>
-                    </a:ext>
-                  </a:extLst>
-                </a:hlinkClick>
-              </a:rPr>
-              <a:t>https://trueup.io/layoffs</a:t>
+              <a:rPr lang="en" sz="1200">
+                <a:latin typeface="Calibri"/>
+                <a:ea typeface="Calibri"/>
+                <a:cs typeface="Calibri"/>
+                <a:sym typeface="Calibri"/>
+              </a:rPr>
+              <a:t>Business are shifting focus to rebuilding software to be AI-native from the ground up</a:t>
             </a:r>
             <a:endParaRPr sz="1200">
               <a:latin typeface="Calibri"/>
@@ -27132,54 +27813,59 @@
               <a:sym typeface="Calibri"/>
             </a:endParaRPr>
           </a:p>
+          <a:p>
+            <a:pPr marL="171450" marR="0" lvl="0" indent="-133350" algn="l" rtl="0">
+              <a:lnSpc>
+                <a:spcPct val="100000"/>
+              </a:lnSpc>
+              <a:spcBef>
+                <a:spcPts val="0"/>
+              </a:spcBef>
+              <a:spcAft>
+                <a:spcPts val="0"/>
+              </a:spcAft>
+              <a:buSzPts val="1200"/>
+              <a:buFont typeface="Calibri"/>
+              <a:buChar char="●"/>
+            </a:pPr>
+            <a:r>
+              <a:rPr lang="en" sz="1200" u="sng">
+                <a:solidFill>
+                  <a:schemeClr val="hlink"/>
+                </a:solidFill>
+                <a:latin typeface="Calibri"/>
+                <a:ea typeface="Calibri"/>
+                <a:cs typeface="Calibri"/>
+                <a:sym typeface="Calibri"/>
+                <a:hlinkClick r:id="rId5"/>
+              </a:rPr>
+              <a:t>https://www.youtube.com/watch?v=KZnuFadL7xM</a:t>
+            </a:r>
+            <a:r>
+              <a:rPr lang="en" sz="1200">
+                <a:latin typeface="Calibri"/>
+                <a:ea typeface="Calibri"/>
+                <a:cs typeface="Calibri"/>
+                <a:sym typeface="Calibri"/>
+              </a:rPr>
+              <a:t> </a:t>
+            </a:r>
+            <a:endParaRPr sz="1200">
+              <a:latin typeface="Calibri"/>
+              <a:ea typeface="Calibri"/>
+              <a:cs typeface="Calibri"/>
+              <a:sym typeface="Calibri"/>
+            </a:endParaRPr>
+          </a:p>
         </p:txBody>
       </p:sp>
       <p:pic>
         <p:nvPicPr>
-          <p:cNvPr id="275" name="Google Shape;275;p42"/>
+          <p:cNvPr id="284" name="Google Shape;284;p41"/>
           <p:cNvPicPr preferRelativeResize="0"/>
           <p:nvPr/>
         </p:nvPicPr>
-        <p:blipFill>
-          <a:blip r:embed="rId5" cstate="email">
-            <a:alphaModFix/>
-            <a:extLst>
-              <a:ext uri="{28A0092B-C50C-407E-A947-70E740481C1C}">
-                <a14:useLocalDpi xmlns:a14="http://schemas.microsoft.com/office/drawing/2010/main"/>
-              </a:ext>
-            </a:extLst>
-          </a:blip>
-          <a:stretch>
-            <a:fillRect/>
-          </a:stretch>
-        </p:blipFill>
-        <p:spPr>
-          <a:xfrm>
-            <a:off x="63183" y="3150994"/>
-            <a:ext cx="5198610" cy="1970675"/>
-          </a:xfrm>
-          <a:prstGeom prst="rect">
-            <a:avLst/>
-          </a:prstGeom>
-          <a:noFill/>
-          <a:ln w="9525" cap="flat" cmpd="sng">
-            <a:solidFill>
-              <a:srgbClr val="FF0000"/>
-            </a:solidFill>
-            <a:prstDash val="solid"/>
-            <a:round/>
-            <a:headEnd type="none" w="sm" len="sm"/>
-            <a:tailEnd type="none" w="sm" len="sm"/>
-          </a:ln>
-        </p:spPr>
-      </p:pic>
-      <p:pic>
-        <p:nvPicPr>
-          <p:cNvPr id="276" name="Google Shape;276;p42"/>
-          <p:cNvPicPr preferRelativeResize="0"/>
-          <p:nvPr/>
-        </p:nvPicPr>
-        <p:blipFill>
+        <p:blipFill rotWithShape="1">
           <a:blip r:embed="rId6" cstate="email">
             <a:alphaModFix/>
             <a:extLst>
@@ -27188,14 +27874,13 @@
               </a:ext>
             </a:extLst>
           </a:blip>
-          <a:stretch>
-            <a:fillRect/>
-          </a:stretch>
+          <a:srcRect/>
+          <a:stretch/>
         </p:blipFill>
         <p:spPr>
           <a:xfrm>
-            <a:off x="63175" y="453138"/>
-            <a:ext cx="5198627" cy="2667024"/>
+            <a:off x="4774300" y="2978975"/>
+            <a:ext cx="1529850" cy="1948050"/>
           </a:xfrm>
           <a:prstGeom prst="rect">
             <a:avLst/>
@@ -27220,12 +27905,12 @@
 </p:sld>
 </file>
 
-<file path=ppt/slides/slide29.xml><?xml version="1.0" encoding="utf-8"?>
+<file path=ppt/slides/slide28.xml><?xml version="1.0" encoding="utf-8"?>
 <p:sld xmlns:a="http://schemas.openxmlformats.org/drawingml/2006/main" xmlns:r="http://schemas.openxmlformats.org/officeDocument/2006/relationships" xmlns:p="http://schemas.openxmlformats.org/presentationml/2006/main">
   <p:cSld>
     <p:spTree>
       <p:nvGrpSpPr>
-        <p:cNvPr id="1" name="Shape 280"/>
+        <p:cNvPr id="1" name="Shape 288"/>
         <p:cNvGrpSpPr/>
         <p:nvPr/>
       </p:nvGrpSpPr>
@@ -27237,48 +27922,16 @@
           <a:chExt cx="0" cy="0"/>
         </a:xfrm>
       </p:grpSpPr>
-      <p:pic>
-        <p:nvPicPr>
-          <p:cNvPr id="281" name="Google Shape;281;p43"/>
-          <p:cNvPicPr preferRelativeResize="0"/>
-          <p:nvPr/>
-        </p:nvPicPr>
-        <p:blipFill rotWithShape="1">
-          <a:blip r:embed="rId3" cstate="email">
-            <a:alphaModFix/>
-            <a:extLst>
-              <a:ext uri="{28A0092B-C50C-407E-A947-70E740481C1C}">
-                <a14:useLocalDpi xmlns:a14="http://schemas.microsoft.com/office/drawing/2010/main"/>
-              </a:ext>
-            </a:extLst>
-          </a:blip>
-          <a:srcRect/>
-          <a:stretch/>
-        </p:blipFill>
-        <p:spPr>
-          <a:xfrm>
-            <a:off x="645525" y="1203525"/>
-            <a:ext cx="1570556" cy="1570556"/>
-          </a:xfrm>
-          <a:prstGeom prst="rect">
-            <a:avLst/>
-          </a:prstGeom>
-          <a:noFill/>
-          <a:ln>
-            <a:noFill/>
-          </a:ln>
-        </p:spPr>
-      </p:pic>
       <p:sp>
         <p:nvSpPr>
-          <p:cNvPr id="282" name="Google Shape;282;p43"/>
+          <p:cNvPr id="289" name="Google Shape;289;p42"/>
           <p:cNvSpPr txBox="1"/>
           <p:nvPr/>
         </p:nvSpPr>
         <p:spPr>
           <a:xfrm>
-            <a:off x="-25625" y="-14775"/>
-            <a:ext cx="3355800" cy="569400"/>
+            <a:off x="55075" y="63650"/>
+            <a:ext cx="4503900" cy="326400"/>
           </a:xfrm>
           <a:prstGeom prst="rect">
             <a:avLst/>
@@ -27289,7 +27942,7 @@
           </a:ln>
         </p:spPr>
         <p:txBody>
-          <a:bodyPr spcFirstLastPara="1" wrap="square" lIns="91425" tIns="91425" rIns="91425" bIns="91425" anchor="t" anchorCtr="0">
+          <a:bodyPr spcFirstLastPara="1" wrap="square" lIns="9125" tIns="9125" rIns="9125" bIns="9125" anchor="t" anchorCtr="0">
             <a:spAutoFit/>
           </a:bodyPr>
           <a:lstStyle/>
@@ -27305,27 +27958,27 @@
                 <a:spcPts val="0"/>
               </a:spcAft>
               <a:buClr>
-                <a:srgbClr val="000000"/>
+                <a:schemeClr val="dk1"/>
               </a:buClr>
-              <a:buSzPts val="2500"/>
+              <a:buSzPts val="1100"/>
               <a:buFont typeface="Arial"/>
               <a:buNone/>
             </a:pPr>
             <a:r>
-              <a:rPr lang="en" sz="2500" b="1" i="0" u="none" strike="noStrike" cap="none">
-                <a:solidFill>
-                  <a:srgbClr val="000000"/>
-                </a:solidFill>
-                <a:latin typeface="Calibri"/>
-                <a:ea typeface="Calibri"/>
-                <a:cs typeface="Calibri"/>
-                <a:sym typeface="Calibri"/>
-              </a:rPr>
-              <a:t>About the Speaker</a:t>
-            </a:r>
-            <a:endParaRPr sz="2500" b="1" i="0" u="none" strike="noStrike" cap="none">
+              <a:rPr lang="en" sz="2000" b="1">
+                <a:solidFill>
+                  <a:schemeClr val="dk1"/>
+                </a:solidFill>
+                <a:latin typeface="Calibri"/>
+                <a:ea typeface="Calibri"/>
+                <a:cs typeface="Calibri"/>
+                <a:sym typeface="Calibri"/>
+              </a:rPr>
+              <a:t>AI in Business</a:t>
+            </a:r>
+            <a:endParaRPr sz="2000" b="1">
               <a:solidFill>
-                <a:srgbClr val="000000"/>
+                <a:schemeClr val="dk1"/>
               </a:solidFill>
               <a:latin typeface="Calibri"/>
               <a:ea typeface="Calibri"/>
@@ -27337,14 +27990,584 @@
       </p:sp>
       <p:sp>
         <p:nvSpPr>
-          <p:cNvPr id="283" name="Google Shape;283;p43"/>
+          <p:cNvPr id="290" name="Google Shape;290;p42"/>
           <p:cNvSpPr txBox="1"/>
           <p:nvPr/>
         </p:nvSpPr>
         <p:spPr>
           <a:xfrm>
-            <a:off x="3330175" y="878750"/>
-            <a:ext cx="5621700" cy="3309300"/>
+            <a:off x="55075" y="423621"/>
+            <a:ext cx="4402500" cy="2235000"/>
+          </a:xfrm>
+          <a:prstGeom prst="rect">
+            <a:avLst/>
+          </a:prstGeom>
+          <a:solidFill>
+            <a:srgbClr val="FFF2CC"/>
+          </a:solidFill>
+          <a:ln w="9525" cap="flat" cmpd="sng">
+            <a:solidFill>
+              <a:srgbClr val="FF0000"/>
+            </a:solidFill>
+            <a:prstDash val="solid"/>
+            <a:round/>
+            <a:headEnd type="none" w="sm" len="sm"/>
+            <a:tailEnd type="none" w="sm" len="sm"/>
+          </a:ln>
+        </p:spPr>
+        <p:txBody>
+          <a:bodyPr spcFirstLastPara="1" wrap="square" lIns="9125" tIns="9125" rIns="9125" bIns="9125" anchor="t" anchorCtr="0">
+            <a:spAutoFit/>
+          </a:bodyPr>
+          <a:lstStyle/>
+          <a:p>
+            <a:pPr marL="171450" marR="0" lvl="0" indent="-133350" algn="l" rtl="0">
+              <a:lnSpc>
+                <a:spcPct val="100000"/>
+              </a:lnSpc>
+              <a:spcBef>
+                <a:spcPts val="0"/>
+              </a:spcBef>
+              <a:spcAft>
+                <a:spcPts val="0"/>
+              </a:spcAft>
+              <a:buClr>
+                <a:srgbClr val="FF0000"/>
+              </a:buClr>
+              <a:buSzPts val="1200"/>
+              <a:buFont typeface="Calibri"/>
+              <a:buChar char="●"/>
+            </a:pPr>
+            <a:r>
+              <a:rPr lang="en" sz="1200" b="1">
+                <a:solidFill>
+                  <a:srgbClr val="FF0000"/>
+                </a:solidFill>
+                <a:latin typeface="Calibri"/>
+                <a:ea typeface="Calibri"/>
+                <a:cs typeface="Calibri"/>
+                <a:sym typeface="Calibri"/>
+              </a:rPr>
+              <a:t>How AI-native companies are winning</a:t>
+            </a:r>
+            <a:endParaRPr sz="1200" b="1">
+              <a:solidFill>
+                <a:srgbClr val="FF0000"/>
+              </a:solidFill>
+              <a:latin typeface="Calibri"/>
+              <a:ea typeface="Calibri"/>
+              <a:cs typeface="Calibri"/>
+              <a:sym typeface="Calibri"/>
+            </a:endParaRPr>
+          </a:p>
+          <a:p>
+            <a:pPr marL="171450" marR="0" lvl="0" indent="-133350" algn="l" rtl="0">
+              <a:lnSpc>
+                <a:spcPct val="100000"/>
+              </a:lnSpc>
+              <a:spcBef>
+                <a:spcPts val="0"/>
+              </a:spcBef>
+              <a:spcAft>
+                <a:spcPts val="0"/>
+              </a:spcAft>
+              <a:buClr>
+                <a:schemeClr val="dk1"/>
+              </a:buClr>
+              <a:buSzPts val="1200"/>
+              <a:buFont typeface="Calibri"/>
+              <a:buChar char="●"/>
+            </a:pPr>
+            <a:r>
+              <a:rPr lang="en" sz="1200">
+                <a:latin typeface="Calibri"/>
+                <a:ea typeface="Calibri"/>
+                <a:cs typeface="Calibri"/>
+                <a:sym typeface="Calibri"/>
+              </a:rPr>
+              <a:t>Success now depends on deciding which tasks to give to specific AI models versus human experts.</a:t>
+            </a:r>
+            <a:endParaRPr sz="1200">
+              <a:latin typeface="Calibri"/>
+              <a:ea typeface="Calibri"/>
+              <a:cs typeface="Calibri"/>
+              <a:sym typeface="Calibri"/>
+            </a:endParaRPr>
+          </a:p>
+          <a:p>
+            <a:pPr marL="171450" marR="0" lvl="0" indent="-133350" algn="l" rtl="0">
+              <a:lnSpc>
+                <a:spcPct val="100000"/>
+              </a:lnSpc>
+              <a:spcBef>
+                <a:spcPts val="0"/>
+              </a:spcBef>
+              <a:spcAft>
+                <a:spcPts val="0"/>
+              </a:spcAft>
+              <a:buClr>
+                <a:schemeClr val="dk1"/>
+              </a:buClr>
+              <a:buSzPts val="1200"/>
+              <a:buFont typeface="Calibri"/>
+              <a:buChar char="●"/>
+            </a:pPr>
+            <a:r>
+              <a:rPr lang="en" sz="1200">
+                <a:latin typeface="Calibri"/>
+                <a:ea typeface="Calibri"/>
+                <a:cs typeface="Calibri"/>
+                <a:sym typeface="Calibri"/>
+              </a:rPr>
+              <a:t>AI acts as an amplifier; it improved performance for skilled entrepreneurs - but decreased it for those lacking the judgment to filter "AI slop"</a:t>
+            </a:r>
+            <a:endParaRPr sz="1200">
+              <a:latin typeface="Calibri"/>
+              <a:ea typeface="Calibri"/>
+              <a:cs typeface="Calibri"/>
+              <a:sym typeface="Calibri"/>
+            </a:endParaRPr>
+          </a:p>
+          <a:p>
+            <a:pPr marL="171450" marR="0" lvl="0" indent="-133350" algn="l" rtl="0">
+              <a:lnSpc>
+                <a:spcPct val="100000"/>
+              </a:lnSpc>
+              <a:spcBef>
+                <a:spcPts val="0"/>
+              </a:spcBef>
+              <a:spcAft>
+                <a:spcPts val="0"/>
+              </a:spcAft>
+              <a:buClr>
+                <a:schemeClr val="dk1"/>
+              </a:buClr>
+              <a:buSzPts val="1200"/>
+              <a:buFont typeface="Calibri"/>
+              <a:buChar char="●"/>
+            </a:pPr>
+            <a:r>
+              <a:rPr lang="en" sz="1200">
+                <a:latin typeface="Calibri"/>
+                <a:ea typeface="Calibri"/>
+                <a:cs typeface="Calibri"/>
+                <a:sym typeface="Calibri"/>
+              </a:rPr>
+              <a:t>From Chats to Agents planning and executing</a:t>
+            </a:r>
+            <a:endParaRPr sz="1200">
+              <a:latin typeface="Calibri"/>
+              <a:ea typeface="Calibri"/>
+              <a:cs typeface="Calibri"/>
+              <a:sym typeface="Calibri"/>
+            </a:endParaRPr>
+          </a:p>
+          <a:p>
+            <a:pPr marL="171450" marR="0" lvl="0" indent="-133350" algn="l" rtl="0">
+              <a:lnSpc>
+                <a:spcPct val="100000"/>
+              </a:lnSpc>
+              <a:spcBef>
+                <a:spcPts val="0"/>
+              </a:spcBef>
+              <a:spcAft>
+                <a:spcPts val="0"/>
+              </a:spcAft>
+              <a:buClr>
+                <a:schemeClr val="dk1"/>
+              </a:buClr>
+              <a:buSzPts val="1200"/>
+              <a:buFont typeface="Calibri"/>
+              <a:buChar char="●"/>
+            </a:pPr>
+            <a:r>
+              <a:rPr lang="en" sz="1200">
+                <a:latin typeface="Calibri"/>
+                <a:ea typeface="Calibri"/>
+                <a:cs typeface="Calibri"/>
+                <a:sym typeface="Calibri"/>
+              </a:rPr>
+              <a:t>Scaling with on-demand compute instead of massive headcounts</a:t>
+            </a:r>
+            <a:endParaRPr sz="1200">
+              <a:latin typeface="Calibri"/>
+              <a:ea typeface="Calibri"/>
+              <a:cs typeface="Calibri"/>
+              <a:sym typeface="Calibri"/>
+            </a:endParaRPr>
+          </a:p>
+          <a:p>
+            <a:pPr marL="171450" marR="0" lvl="0" indent="-133350" algn="l" rtl="0">
+              <a:lnSpc>
+                <a:spcPct val="100000"/>
+              </a:lnSpc>
+              <a:spcBef>
+                <a:spcPts val="0"/>
+              </a:spcBef>
+              <a:spcAft>
+                <a:spcPts val="0"/>
+              </a:spcAft>
+              <a:buClr>
+                <a:schemeClr val="dk1"/>
+              </a:buClr>
+              <a:buSzPts val="1200"/>
+              <a:buFont typeface="Calibri"/>
+              <a:buChar char="●"/>
+            </a:pPr>
+            <a:r>
+              <a:rPr lang="en" sz="1200">
+                <a:latin typeface="Calibri"/>
+                <a:ea typeface="Calibri"/>
+                <a:cs typeface="Calibri"/>
+                <a:sym typeface="Calibri"/>
+              </a:rPr>
+              <a:t>Strategic focus on "earned insights", solving specific user bottlenecks with "a drop of AI" rather than over-engineering complex tools.</a:t>
+            </a:r>
+            <a:endParaRPr sz="1200">
+              <a:latin typeface="Calibri"/>
+              <a:ea typeface="Calibri"/>
+              <a:cs typeface="Calibri"/>
+              <a:sym typeface="Calibri"/>
+            </a:endParaRPr>
+          </a:p>
+          <a:p>
+            <a:pPr marL="171450" marR="0" lvl="0" indent="-133350" algn="l" rtl="0">
+              <a:lnSpc>
+                <a:spcPct val="100000"/>
+              </a:lnSpc>
+              <a:spcBef>
+                <a:spcPts val="0"/>
+              </a:spcBef>
+              <a:spcAft>
+                <a:spcPts val="0"/>
+              </a:spcAft>
+              <a:buClr>
+                <a:schemeClr val="dk1"/>
+              </a:buClr>
+              <a:buSzPts val="1200"/>
+              <a:buFont typeface="Calibri"/>
+              <a:buChar char="●"/>
+            </a:pPr>
+            <a:r>
+              <a:rPr lang="en" sz="1200" u="sng">
+                <a:solidFill>
+                  <a:schemeClr val="hlink"/>
+                </a:solidFill>
+                <a:latin typeface="Calibri"/>
+                <a:ea typeface="Calibri"/>
+                <a:cs typeface="Calibri"/>
+                <a:sym typeface="Calibri"/>
+                <a:hlinkClick r:id="rId3"/>
+              </a:rPr>
+              <a:t>https://www.youtube.com/watch?v=I08ZeY7QcrE</a:t>
+            </a:r>
+            <a:r>
+              <a:rPr lang="en" sz="1200">
+                <a:latin typeface="Calibri"/>
+                <a:ea typeface="Calibri"/>
+                <a:cs typeface="Calibri"/>
+                <a:sym typeface="Calibri"/>
+              </a:rPr>
+              <a:t> </a:t>
+            </a:r>
+            <a:endParaRPr sz="1200">
+              <a:latin typeface="Calibri"/>
+              <a:ea typeface="Calibri"/>
+              <a:cs typeface="Calibri"/>
+              <a:sym typeface="Calibri"/>
+            </a:endParaRPr>
+          </a:p>
+        </p:txBody>
+      </p:sp>
+      <p:sp>
+        <p:nvSpPr>
+          <p:cNvPr id="291" name="Google Shape;291;p42"/>
+          <p:cNvSpPr txBox="1"/>
+          <p:nvPr/>
+        </p:nvSpPr>
+        <p:spPr>
+          <a:xfrm>
+            <a:off x="55075" y="2692192"/>
+            <a:ext cx="4402500" cy="2419500"/>
+          </a:xfrm>
+          <a:prstGeom prst="rect">
+            <a:avLst/>
+          </a:prstGeom>
+          <a:solidFill>
+            <a:srgbClr val="FFF2CC"/>
+          </a:solidFill>
+          <a:ln w="9525" cap="flat" cmpd="sng">
+            <a:solidFill>
+              <a:srgbClr val="FF0000"/>
+            </a:solidFill>
+            <a:prstDash val="solid"/>
+            <a:round/>
+            <a:headEnd type="none" w="sm" len="sm"/>
+            <a:tailEnd type="none" w="sm" len="sm"/>
+          </a:ln>
+        </p:spPr>
+        <p:txBody>
+          <a:bodyPr spcFirstLastPara="1" wrap="square" lIns="9125" tIns="9125" rIns="9125" bIns="9125" anchor="t" anchorCtr="0">
+            <a:spAutoFit/>
+          </a:bodyPr>
+          <a:lstStyle/>
+          <a:p>
+            <a:pPr marL="171450" marR="0" lvl="0" indent="-133350" algn="l" rtl="0">
+              <a:lnSpc>
+                <a:spcPct val="100000"/>
+              </a:lnSpc>
+              <a:spcBef>
+                <a:spcPts val="0"/>
+              </a:spcBef>
+              <a:spcAft>
+                <a:spcPts val="0"/>
+              </a:spcAft>
+              <a:buClr>
+                <a:srgbClr val="FF0000"/>
+              </a:buClr>
+              <a:buSzPts val="1200"/>
+              <a:buFont typeface="Calibri"/>
+              <a:buChar char="●"/>
+            </a:pPr>
+            <a:r>
+              <a:rPr lang="en" sz="1200" b="1">
+                <a:solidFill>
+                  <a:srgbClr val="FF0000"/>
+                </a:solidFill>
+                <a:latin typeface="Calibri"/>
+                <a:ea typeface="Calibri"/>
+                <a:cs typeface="Calibri"/>
+                <a:sym typeface="Calibri"/>
+              </a:rPr>
+              <a:t>AI Transformation - Changing Business Roles and Processes</a:t>
+            </a:r>
+            <a:endParaRPr sz="1200" b="1">
+              <a:solidFill>
+                <a:srgbClr val="FF0000"/>
+              </a:solidFill>
+              <a:latin typeface="Calibri"/>
+              <a:ea typeface="Calibri"/>
+              <a:cs typeface="Calibri"/>
+              <a:sym typeface="Calibri"/>
+            </a:endParaRPr>
+          </a:p>
+          <a:p>
+            <a:pPr marL="171450" marR="0" lvl="0" indent="-133350" algn="l" rtl="0">
+              <a:lnSpc>
+                <a:spcPct val="100000"/>
+              </a:lnSpc>
+              <a:spcBef>
+                <a:spcPts val="0"/>
+              </a:spcBef>
+              <a:spcAft>
+                <a:spcPts val="0"/>
+              </a:spcAft>
+              <a:buClr>
+                <a:schemeClr val="dk1"/>
+              </a:buClr>
+              <a:buSzPts val="1200"/>
+              <a:buFont typeface="Calibri"/>
+              <a:buChar char="●"/>
+            </a:pPr>
+            <a:r>
+              <a:rPr lang="en" sz="1200">
+                <a:latin typeface="Calibri"/>
+                <a:ea typeface="Calibri"/>
+                <a:cs typeface="Calibri"/>
+                <a:sym typeface="Calibri"/>
+              </a:rPr>
+              <a:t>Models are good enough, but the way they are used in business is lagging. Companies are still using old processes.</a:t>
+            </a:r>
+            <a:endParaRPr sz="1200">
+              <a:latin typeface="Calibri"/>
+              <a:ea typeface="Calibri"/>
+              <a:cs typeface="Calibri"/>
+              <a:sym typeface="Calibri"/>
+            </a:endParaRPr>
+          </a:p>
+          <a:p>
+            <a:pPr marL="171450" marR="0" lvl="0" indent="-133350" algn="l" rtl="0">
+              <a:lnSpc>
+                <a:spcPct val="100000"/>
+              </a:lnSpc>
+              <a:spcBef>
+                <a:spcPts val="0"/>
+              </a:spcBef>
+              <a:spcAft>
+                <a:spcPts val="0"/>
+              </a:spcAft>
+              <a:buClr>
+                <a:schemeClr val="dk1"/>
+              </a:buClr>
+              <a:buSzPts val="1200"/>
+              <a:buFont typeface="Calibri"/>
+              <a:buChar char="●"/>
+            </a:pPr>
+            <a:r>
+              <a:rPr lang="en" sz="1200">
+                <a:latin typeface="Calibri"/>
+                <a:ea typeface="Calibri"/>
+                <a:cs typeface="Calibri"/>
+                <a:sym typeface="Calibri"/>
+              </a:rPr>
+              <a:t>True productivity gains require becoming "AI-native," which involves changing team structures, skill sets, and default workflows</a:t>
+            </a:r>
+            <a:endParaRPr sz="1200">
+              <a:latin typeface="Calibri"/>
+              <a:ea typeface="Calibri"/>
+              <a:cs typeface="Calibri"/>
+              <a:sym typeface="Calibri"/>
+            </a:endParaRPr>
+          </a:p>
+          <a:p>
+            <a:pPr marL="171450" marR="0" lvl="0" indent="-133350" algn="l" rtl="0">
+              <a:lnSpc>
+                <a:spcPct val="100000"/>
+              </a:lnSpc>
+              <a:spcBef>
+                <a:spcPts val="0"/>
+              </a:spcBef>
+              <a:spcAft>
+                <a:spcPts val="0"/>
+              </a:spcAft>
+              <a:buClr>
+                <a:schemeClr val="dk1"/>
+              </a:buClr>
+              <a:buSzPts val="1200"/>
+              <a:buFont typeface="Calibri"/>
+              <a:buChar char="●"/>
+            </a:pPr>
+            <a:r>
+              <a:rPr lang="en" sz="1200">
+                <a:latin typeface="Calibri"/>
+                <a:ea typeface="Calibri"/>
+                <a:cs typeface="Calibri"/>
+                <a:sym typeface="Calibri"/>
+              </a:rPr>
+              <a:t>The "RAPID 5" Framework: A strategy for transformation: Reveal (map workflows), Architect (design AI-native models), Proof (real-world pilots), Ingrain (identity shift), and Dynamize (90-day reassessment cycles)</a:t>
+            </a:r>
+            <a:endParaRPr sz="1200">
+              <a:latin typeface="Calibri"/>
+              <a:ea typeface="Calibri"/>
+              <a:cs typeface="Calibri"/>
+              <a:sym typeface="Calibri"/>
+            </a:endParaRPr>
+          </a:p>
+          <a:p>
+            <a:pPr marL="171450" marR="0" lvl="0" indent="-133350" algn="l" rtl="0">
+              <a:lnSpc>
+                <a:spcPct val="100000"/>
+              </a:lnSpc>
+              <a:spcBef>
+                <a:spcPts val="0"/>
+              </a:spcBef>
+              <a:spcAft>
+                <a:spcPts val="0"/>
+              </a:spcAft>
+              <a:buClr>
+                <a:schemeClr val="dk1"/>
+              </a:buClr>
+              <a:buSzPts val="1200"/>
+              <a:buFont typeface="Calibri"/>
+              <a:buChar char="●"/>
+            </a:pPr>
+            <a:r>
+              <a:rPr lang="en" sz="1200">
+                <a:latin typeface="Calibri"/>
+                <a:ea typeface="Calibri"/>
+                <a:cs typeface="Calibri"/>
+                <a:sym typeface="Calibri"/>
+              </a:rPr>
+              <a:t>New Roles: The rise of "Forward-Deployed Engineers" at top AI labs shows that the current priority is helping customers bridge the gap between AI capability and practical use.</a:t>
+            </a:r>
+            <a:endParaRPr sz="1200">
+              <a:latin typeface="Calibri"/>
+              <a:ea typeface="Calibri"/>
+              <a:cs typeface="Calibri"/>
+              <a:sym typeface="Calibri"/>
+            </a:endParaRPr>
+          </a:p>
+          <a:p>
+            <a:pPr marL="171450" marR="0" lvl="0" indent="-133350" algn="l" rtl="0">
+              <a:lnSpc>
+                <a:spcPct val="100000"/>
+              </a:lnSpc>
+              <a:spcBef>
+                <a:spcPts val="0"/>
+              </a:spcBef>
+              <a:spcAft>
+                <a:spcPts val="0"/>
+              </a:spcAft>
+              <a:buSzPts val="1200"/>
+              <a:buFont typeface="Calibri"/>
+              <a:buChar char="●"/>
+            </a:pPr>
+            <a:r>
+              <a:rPr lang="en" sz="1200" u="sng">
+                <a:solidFill>
+                  <a:schemeClr val="hlink"/>
+                </a:solidFill>
+                <a:latin typeface="Calibri"/>
+                <a:ea typeface="Calibri"/>
+                <a:cs typeface="Calibri"/>
+                <a:sym typeface="Calibri"/>
+                <a:hlinkClick r:id="rId4"/>
+              </a:rPr>
+              <a:t>https://www.youtube.com/watch?v=cglc_BR04GE</a:t>
+            </a:r>
+            <a:r>
+              <a:rPr lang="en" sz="1200">
+                <a:latin typeface="Calibri"/>
+                <a:ea typeface="Calibri"/>
+                <a:cs typeface="Calibri"/>
+                <a:sym typeface="Calibri"/>
+              </a:rPr>
+              <a:t> </a:t>
+            </a:r>
+            <a:endParaRPr sz="1200">
+              <a:latin typeface="Calibri"/>
+              <a:ea typeface="Calibri"/>
+              <a:cs typeface="Calibri"/>
+              <a:sym typeface="Calibri"/>
+            </a:endParaRPr>
+          </a:p>
+        </p:txBody>
+      </p:sp>
+    </p:spTree>
+  </p:cSld>
+  <p:clrMapOvr>
+    <a:masterClrMapping/>
+  </p:clrMapOvr>
+</p:sld>
+</file>
+
+<file path=ppt/slides/slide29.xml><?xml version="1.0" encoding="utf-8"?>
+<p:sld xmlns:a="http://schemas.openxmlformats.org/drawingml/2006/main" xmlns:r="http://schemas.openxmlformats.org/officeDocument/2006/relationships" xmlns:p="http://schemas.openxmlformats.org/presentationml/2006/main">
+  <p:cSld>
+    <p:spTree>
+      <p:nvGrpSpPr>
+        <p:cNvPr id="1" name="Shape 295"/>
+        <p:cNvGrpSpPr/>
+        <p:nvPr/>
+      </p:nvGrpSpPr>
+      <p:grpSpPr>
+        <a:xfrm>
+          <a:off x="0" y="0"/>
+          <a:ext cx="0" cy="0"/>
+          <a:chOff x="0" y="0"/>
+          <a:chExt cx="0" cy="0"/>
+        </a:xfrm>
+      </p:grpSpPr>
+      <p:sp>
+        <p:nvSpPr>
+          <p:cNvPr id="296" name="Google Shape;296;p43"/>
+          <p:cNvSpPr txBox="1"/>
+          <p:nvPr/>
+        </p:nvSpPr>
+        <p:spPr>
+          <a:xfrm>
+            <a:off x="55075" y="63650"/>
+            <a:ext cx="4503900" cy="326400"/>
           </a:xfrm>
           <a:prstGeom prst="rect">
             <a:avLst/>
@@ -27355,7 +28578,7 @@
           </a:ln>
         </p:spPr>
         <p:txBody>
-          <a:bodyPr spcFirstLastPara="1" wrap="square" lIns="91425" tIns="91425" rIns="91425" bIns="91425" anchor="t" anchorCtr="0">
+          <a:bodyPr spcFirstLastPara="1" wrap="square" lIns="9125" tIns="9125" rIns="9125" bIns="9125" anchor="t" anchorCtr="0">
             <a:spAutoFit/>
           </a:bodyPr>
           <a:lstStyle/>
@@ -27378,75 +28601,7 @@
               <a:buNone/>
             </a:pPr>
             <a:r>
-              <a:rPr lang="en" sz="2500" b="1" i="0" u="none" strike="noStrike" cap="none">
-                <a:solidFill>
-                  <a:srgbClr val="000000"/>
-                </a:solidFill>
-                <a:latin typeface="Calibri"/>
-                <a:ea typeface="Calibri"/>
-                <a:cs typeface="Calibri"/>
-                <a:sym typeface="Calibri"/>
-              </a:rPr>
-              <a:t>Lev Selector, Ph.D.</a:t>
-            </a:r>
-            <a:endParaRPr sz="2500" b="1" i="0" u="none" strike="noStrike" cap="none">
-              <a:solidFill>
-                <a:srgbClr val="000000"/>
-              </a:solidFill>
-              <a:latin typeface="Calibri"/>
-              <a:ea typeface="Calibri"/>
-              <a:cs typeface="Calibri"/>
-              <a:sym typeface="Calibri"/>
-            </a:endParaRPr>
-          </a:p>
-          <a:p>
-            <a:pPr marL="0" marR="0" lvl="0" indent="0" algn="l" rtl="0">
-              <a:lnSpc>
-                <a:spcPct val="100000"/>
-              </a:lnSpc>
-              <a:spcBef>
-                <a:spcPts val="0"/>
-              </a:spcBef>
-              <a:spcAft>
-                <a:spcPts val="0"/>
-              </a:spcAft>
-              <a:buClr>
-                <a:schemeClr val="dk1"/>
-              </a:buClr>
-              <a:buSzPts val="1100"/>
-              <a:buFont typeface="Arial"/>
-              <a:buNone/>
-            </a:pPr>
-            <a:endParaRPr sz="1800" b="0" i="0" u="none" strike="noStrike" cap="none">
-              <a:solidFill>
-                <a:srgbClr val="000000"/>
-              </a:solidFill>
-              <a:latin typeface="Calibri"/>
-              <a:ea typeface="Calibri"/>
-              <a:cs typeface="Calibri"/>
-              <a:sym typeface="Calibri"/>
-            </a:endParaRPr>
-          </a:p>
-          <a:p>
-            <a:pPr marL="457200" marR="0" lvl="0" indent="-330200" algn="l" rtl="0">
-              <a:lnSpc>
-                <a:spcPct val="100000"/>
-              </a:lnSpc>
-              <a:spcBef>
-                <a:spcPts val="0"/>
-              </a:spcBef>
-              <a:spcAft>
-                <a:spcPts val="0"/>
-              </a:spcAft>
-              <a:buClr>
-                <a:srgbClr val="000000"/>
-              </a:buClr>
-              <a:buSzPts val="1600"/>
-              <a:buFont typeface="Calibri"/>
-              <a:buChar char="●"/>
-            </a:pPr>
-            <a:r>
-              <a:rPr lang="en" sz="1600" b="0" i="0" u="none" strike="noStrike" cap="none">
+              <a:rPr lang="en" sz="2000" b="1">
                 <a:solidFill>
                   <a:schemeClr val="dk1"/>
                 </a:solidFill>
@@ -27455,9 +28610,9 @@
                 <a:cs typeface="Calibri"/>
                 <a:sym typeface="Calibri"/>
               </a:rPr>
-              <a:t>40+ years of software engineering, data science, and building teams (hiring, training, and managing)</a:t>
-            </a:r>
-            <a:endParaRPr sz="1600" b="0" i="0" u="none" strike="noStrike" cap="none">
+              <a:t>AI in Business</a:t>
+            </a:r>
+            <a:endParaRPr sz="2000" b="1">
               <a:solidFill>
                 <a:schemeClr val="dk1"/>
               </a:solidFill>
@@ -27467,8 +28622,42 @@
               <a:sym typeface="Calibri"/>
             </a:endParaRPr>
           </a:p>
-          <a:p>
-            <a:pPr marL="457200" marR="0" lvl="0" indent="-330200" algn="l" rtl="0">
+        </p:txBody>
+      </p:sp>
+      <p:sp>
+        <p:nvSpPr>
+          <p:cNvPr id="297" name="Google Shape;297;p43"/>
+          <p:cNvSpPr txBox="1"/>
+          <p:nvPr/>
+        </p:nvSpPr>
+        <p:spPr>
+          <a:xfrm>
+            <a:off x="55075" y="407589"/>
+            <a:ext cx="4402500" cy="3481800"/>
+          </a:xfrm>
+          <a:prstGeom prst="rect">
+            <a:avLst/>
+          </a:prstGeom>
+          <a:solidFill>
+            <a:srgbClr val="FFF2CC"/>
+          </a:solidFill>
+          <a:ln w="9525" cap="flat" cmpd="sng">
+            <a:solidFill>
+              <a:srgbClr val="FF0000"/>
+            </a:solidFill>
+            <a:prstDash val="solid"/>
+            <a:round/>
+            <a:headEnd type="none" w="sm" len="sm"/>
+            <a:tailEnd type="none" w="sm" len="sm"/>
+          </a:ln>
+        </p:spPr>
+        <p:txBody>
+          <a:bodyPr spcFirstLastPara="1" wrap="square" lIns="9125" tIns="9125" rIns="9125" bIns="9125" anchor="t" anchorCtr="0">
+            <a:spAutoFit/>
+          </a:bodyPr>
+          <a:lstStyle/>
+          <a:p>
+            <a:pPr marL="171450" marR="0" lvl="0" indent="-133350" algn="l" rtl="0">
               <a:lnSpc>
                 <a:spcPct val="100000"/>
               </a:lnSpc>
@@ -27479,28 +28668,22 @@
                 <a:spcPts val="0"/>
               </a:spcAft>
               <a:buClr>
-                <a:srgbClr val="000000"/>
+                <a:schemeClr val="dk1"/>
               </a:buClr>
-              <a:buSzPts val="1600"/>
+              <a:buSzPts val="1200"/>
               <a:buFont typeface="Calibri"/>
               <a:buChar char="●"/>
             </a:pPr>
             <a:r>
-              <a:rPr lang="en" sz="1600" b="0" i="0" u="none" strike="noStrike" cap="none">
-                <a:solidFill>
-                  <a:schemeClr val="dk1"/>
-                </a:solidFill>
-                <a:latin typeface="Calibri"/>
-                <a:ea typeface="Calibri"/>
-                <a:cs typeface="Calibri"/>
-                <a:sym typeface="Calibri"/>
-              </a:rPr>
-              <a:t>Ph.D. in mathematical modeling and computer simulations</a:t>
-            </a:r>
-            <a:endParaRPr sz="1600" b="0" i="0" u="none" strike="noStrike" cap="none">
-              <a:solidFill>
-                <a:srgbClr val="000000"/>
-              </a:solidFill>
+              <a:rPr lang="en" sz="1200">
+                <a:latin typeface="Calibri"/>
+                <a:ea typeface="Calibri"/>
+                <a:cs typeface="Calibri"/>
+                <a:sym typeface="Calibri"/>
+              </a:rPr>
+              <a:t>AI Needs Management Consultants After All</a:t>
+            </a:r>
+            <a:endParaRPr sz="1200">
               <a:latin typeface="Calibri"/>
               <a:ea typeface="Calibri"/>
               <a:cs typeface="Calibri"/>
@@ -27508,7 +28691,7 @@
             </a:endParaRPr>
           </a:p>
           <a:p>
-            <a:pPr marL="0" marR="0" lvl="0" indent="0" algn="l" rtl="0">
+            <a:pPr marL="171450" marR="0" lvl="0" indent="-114300" algn="l" rtl="0">
               <a:lnSpc>
                 <a:spcPct val="100000"/>
               </a:lnSpc>
@@ -27521,14 +28704,24 @@
               <a:buClr>
                 <a:schemeClr val="dk1"/>
               </a:buClr>
-              <a:buSzPts val="1100"/>
-              <a:buFont typeface="Arial"/>
-              <a:buNone/>
+              <a:buSzPts val="900"/>
+              <a:buFont typeface="Calibri"/>
+              <a:buChar char="●"/>
             </a:pPr>
-            <a:endParaRPr sz="1600" b="0" i="0" u="none" strike="noStrike" cap="none">
-              <a:solidFill>
-                <a:srgbClr val="000000"/>
-              </a:solidFill>
+            <a:r>
+              <a:rPr lang="en" sz="900" u="sng">
+                <a:solidFill>
+                  <a:schemeClr val="hlink"/>
+                </a:solidFill>
+                <a:latin typeface="Calibri"/>
+                <a:ea typeface="Calibri"/>
+                <a:cs typeface="Calibri"/>
+                <a:sym typeface="Calibri"/>
+                <a:hlinkClick r:id="rId3"/>
+              </a:rPr>
+              <a:t>https://www.wsj.com/tech/ai/ai-needs-management-consultants-after-all-bd28ecb9</a:t>
+            </a:r>
+            <a:endParaRPr sz="900">
               <a:latin typeface="Calibri"/>
               <a:ea typeface="Calibri"/>
               <a:cs typeface="Calibri"/>
@@ -27536,7 +28729,7 @@
             </a:endParaRPr>
           </a:p>
           <a:p>
-            <a:pPr marL="0" marR="0" lvl="0" indent="0" algn="l" rtl="0">
+            <a:pPr marL="171450" marR="0" lvl="0" indent="-133350" algn="l" rtl="0">
               <a:lnSpc>
                 <a:spcPct val="100000"/>
               </a:lnSpc>
@@ -27547,28 +28740,22 @@
                 <a:spcPts val="0"/>
               </a:spcAft>
               <a:buClr>
-                <a:srgbClr val="000000"/>
+                <a:schemeClr val="dk1"/>
               </a:buClr>
-              <a:buSzPts val="1600"/>
-              <a:buFont typeface="Arial"/>
-              <a:buNone/>
+              <a:buSzPts val="1200"/>
+              <a:buFont typeface="Calibri"/>
+              <a:buChar char="●"/>
             </a:pPr>
             <a:r>
-              <a:rPr lang="en" sz="1600" b="0" i="0" u="none" strike="noStrike" cap="none">
-                <a:solidFill>
-                  <a:srgbClr val="000000"/>
-                </a:solidFill>
-                <a:latin typeface="Calibri"/>
-                <a:ea typeface="Calibri"/>
-                <a:cs typeface="Calibri"/>
-                <a:sym typeface="Calibri"/>
-              </a:rPr>
-              <a:t>Interests: </a:t>
-            </a:r>
-            <a:endParaRPr sz="1600" b="0" i="0" u="none" strike="noStrike" cap="none">
-              <a:solidFill>
-                <a:srgbClr val="000000"/>
-              </a:solidFill>
+              <a:rPr lang="en" sz="1200">
+                <a:latin typeface="Calibri"/>
+                <a:ea typeface="Calibri"/>
+                <a:cs typeface="Calibri"/>
+                <a:sym typeface="Calibri"/>
+              </a:rPr>
+              <a:t>Despite initially threatening to replace consultants, AI is now boosting the consulting industry</a:t>
+            </a:r>
+            <a:endParaRPr sz="1200">
               <a:latin typeface="Calibri"/>
               <a:ea typeface="Calibri"/>
               <a:cs typeface="Calibri"/>
@@ -27576,7 +28763,7 @@
             </a:endParaRPr>
           </a:p>
           <a:p>
-            <a:pPr marL="457200" marR="0" lvl="0" indent="-330200" algn="l" rtl="0">
+            <a:pPr marL="171450" marR="0" lvl="0" indent="-133350" algn="l" rtl="0">
               <a:lnSpc>
                 <a:spcPct val="100000"/>
               </a:lnSpc>
@@ -27587,28 +28774,22 @@
                 <a:spcPts val="0"/>
               </a:spcAft>
               <a:buClr>
-                <a:srgbClr val="000000"/>
+                <a:schemeClr val="dk1"/>
               </a:buClr>
-              <a:buSzPts val="1600"/>
+              <a:buSzPts val="1200"/>
               <a:buFont typeface="Calibri"/>
               <a:buChar char="●"/>
             </a:pPr>
             <a:r>
-              <a:rPr lang="en" sz="1600" b="0" i="0" u="none" strike="noStrike" cap="none">
-                <a:solidFill>
-                  <a:schemeClr val="dk1"/>
-                </a:solidFill>
-                <a:latin typeface="Calibri"/>
-                <a:ea typeface="Calibri"/>
-                <a:cs typeface="Calibri"/>
-                <a:sym typeface="Calibri"/>
-              </a:rPr>
-              <a:t>Generative AI, Using LLM with your data</a:t>
-            </a:r>
-            <a:endParaRPr sz="1600" b="0" i="0" u="none" strike="noStrike" cap="none">
-              <a:solidFill>
-                <a:schemeClr val="dk1"/>
-              </a:solidFill>
+              <a:rPr lang="en" sz="1200">
+                <a:latin typeface="Calibri"/>
+                <a:ea typeface="Calibri"/>
+                <a:cs typeface="Calibri"/>
+                <a:sym typeface="Calibri"/>
+              </a:rPr>
+              <a:t>OpenAI and Anthropic are partnering with major firms like McKinsey, BCG, Accenture, and Deloitte to help businesses fully implement AI technologies</a:t>
+            </a:r>
+            <a:endParaRPr sz="1200">
               <a:latin typeface="Calibri"/>
               <a:ea typeface="Calibri"/>
               <a:cs typeface="Calibri"/>
@@ -27616,7 +28797,7 @@
             </a:endParaRPr>
           </a:p>
           <a:p>
-            <a:pPr marL="457200" marR="0" lvl="0" indent="-330200" algn="l" rtl="0">
+            <a:pPr marL="171450" marR="0" lvl="0" indent="-133350" algn="l" rtl="0">
               <a:lnSpc>
                 <a:spcPct val="100000"/>
               </a:lnSpc>
@@ -27629,26 +28810,20 @@
               <a:buClr>
                 <a:schemeClr val="dk1"/>
               </a:buClr>
-              <a:buSzPts val="1600"/>
+              <a:buSzPts val="1200"/>
               <a:buFont typeface="Calibri"/>
               <a:buChar char="●"/>
             </a:pPr>
             <a:r>
-              <a:rPr lang="en" sz="1600" b="0" i="0" u="none" strike="noStrike" cap="none">
-                <a:solidFill>
-                  <a:schemeClr val="dk1"/>
-                </a:solidFill>
-                <a:latin typeface="Calibri"/>
-                <a:ea typeface="Calibri"/>
-                <a:cs typeface="Calibri"/>
-                <a:sym typeface="Calibri"/>
-              </a:rPr>
-              <a:t>Local AI for Local Private Data</a:t>
-            </a:r>
-            <a:endParaRPr sz="1600" b="0" i="0" u="none" strike="noStrike" cap="none">
-              <a:solidFill>
-                <a:schemeClr val="dk1"/>
-              </a:solidFill>
+              <a:rPr lang="en" sz="1200">
+                <a:latin typeface="Calibri"/>
+                <a:ea typeface="Calibri"/>
+                <a:cs typeface="Calibri"/>
+                <a:sym typeface="Calibri"/>
+              </a:rPr>
+              <a:t>Surveys reveal two-thirds of organizations haven't scaled AI enterprise-wide, with many CEOs reporting no significant financial benefits yet</a:t>
+            </a:r>
+            <a:endParaRPr sz="1200">
               <a:latin typeface="Calibri"/>
               <a:ea typeface="Calibri"/>
               <a:cs typeface="Calibri"/>
@@ -27656,7 +28831,7 @@
             </a:endParaRPr>
           </a:p>
           <a:p>
-            <a:pPr marL="457200" marR="0" lvl="0" indent="-330200" algn="l" rtl="0">
+            <a:pPr marL="171450" marR="0" lvl="0" indent="-133350" algn="l" rtl="0">
               <a:lnSpc>
                 <a:spcPct val="100000"/>
               </a:lnSpc>
@@ -27667,28 +28842,22 @@
                 <a:spcPts val="0"/>
               </a:spcAft>
               <a:buClr>
-                <a:srgbClr val="000000"/>
+                <a:schemeClr val="dk1"/>
               </a:buClr>
-              <a:buSzPts val="1600"/>
+              <a:buSzPts val="1200"/>
               <a:buFont typeface="Calibri"/>
               <a:buChar char="●"/>
             </a:pPr>
             <a:r>
-              <a:rPr lang="en" sz="1600" b="0" i="0" u="none" strike="noStrike" cap="none">
-                <a:solidFill>
-                  <a:srgbClr val="000000"/>
-                </a:solidFill>
-                <a:latin typeface="Calibri"/>
-                <a:ea typeface="Calibri"/>
-                <a:cs typeface="Calibri"/>
-                <a:sym typeface="Calibri"/>
-              </a:rPr>
-              <a:t>Cloud architecture, fin-tech, application security</a:t>
-            </a:r>
-            <a:endParaRPr sz="1600" b="0" i="0" u="none" strike="noStrike" cap="none">
-              <a:solidFill>
-                <a:srgbClr val="000000"/>
-              </a:solidFill>
+              <a:rPr lang="en" sz="1200">
+                <a:latin typeface="Calibri"/>
+                <a:ea typeface="Calibri"/>
+                <a:cs typeface="Calibri"/>
+                <a:sym typeface="Calibri"/>
+              </a:rPr>
+              <a:t>These partnerships combine AI companies' engineering teams with consultants to help businesses redesign workflows and integrate AI systems</a:t>
+            </a:r>
+            <a:endParaRPr sz="1200">
               <a:latin typeface="Calibri"/>
               <a:ea typeface="Calibri"/>
               <a:cs typeface="Calibri"/>
@@ -27696,7 +28865,7 @@
             </a:endParaRPr>
           </a:p>
           <a:p>
-            <a:pPr marL="0" marR="0" lvl="0" indent="0" algn="l" rtl="0">
+            <a:pPr marL="171450" marR="0" lvl="0" indent="-133350" algn="l" rtl="0">
               <a:lnSpc>
                 <a:spcPct val="100000"/>
               </a:lnSpc>
@@ -27707,16 +28876,22 @@
                 <a:spcPts val="0"/>
               </a:spcAft>
               <a:buClr>
-                <a:srgbClr val="000000"/>
+                <a:schemeClr val="dk1"/>
               </a:buClr>
-              <a:buSzPts val="1600"/>
-              <a:buFont typeface="Arial"/>
-              <a:buNone/>
+              <a:buSzPts val="1200"/>
+              <a:buFont typeface="Calibri"/>
+              <a:buChar char="●"/>
             </a:pPr>
-            <a:endParaRPr sz="1600" b="0" i="0" u="none" strike="noStrike" cap="none">
-              <a:solidFill>
-                <a:srgbClr val="000000"/>
-              </a:solidFill>
+            <a:r>
+              <a:rPr lang="en" sz="1200">
+                <a:latin typeface="Calibri"/>
+                <a:ea typeface="Calibri"/>
+                <a:cs typeface="Calibri"/>
+                <a:sym typeface="Calibri"/>
+              </a:rPr>
+              <a:t>The consulting model is shifting from traditional junior-associate heavy teams toward outcome-based pricing and more engineers</a:t>
+            </a:r>
+            <a:endParaRPr sz="1200">
               <a:latin typeface="Calibri"/>
               <a:ea typeface="Calibri"/>
               <a:cs typeface="Calibri"/>
@@ -27724,7 +28899,7 @@
             </a:endParaRPr>
           </a:p>
           <a:p>
-            <a:pPr marL="0" marR="0" lvl="0" indent="0" algn="l" rtl="0">
+            <a:pPr marL="171450" marR="0" lvl="0" indent="-133350" algn="l" rtl="0">
               <a:lnSpc>
                 <a:spcPct val="100000"/>
               </a:lnSpc>
@@ -27735,28 +28910,22 @@
                 <a:spcPts val="0"/>
               </a:spcAft>
               <a:buClr>
-                <a:srgbClr val="000000"/>
+                <a:schemeClr val="dk1"/>
               </a:buClr>
-              <a:buSzPts val="1600"/>
-              <a:buFont typeface="Arial"/>
-              <a:buNone/>
+              <a:buSzPts val="1200"/>
+              <a:buFont typeface="Calibri"/>
+              <a:buChar char="●"/>
             </a:pPr>
             <a:r>
-              <a:rPr lang="en" sz="1600" b="0" i="0" u="none" strike="noStrike" cap="none">
-                <a:solidFill>
-                  <a:srgbClr val="000000"/>
-                </a:solidFill>
-                <a:latin typeface="Calibri"/>
-                <a:ea typeface="Calibri"/>
-                <a:cs typeface="Calibri"/>
-                <a:sym typeface="Calibri"/>
-              </a:rPr>
-              <a:t>Find/connect: Linkedin, GitHub, YouTube, Google</a:t>
-            </a:r>
-            <a:endParaRPr sz="1600" b="0" i="0" u="none" strike="noStrike" cap="none">
-              <a:solidFill>
-                <a:srgbClr val="000000"/>
-              </a:solidFill>
+              <a:rPr lang="en" sz="1200">
+                <a:latin typeface="Calibri"/>
+                <a:ea typeface="Calibri"/>
+                <a:cs typeface="Calibri"/>
+                <a:sym typeface="Calibri"/>
+              </a:rPr>
+              <a:t>While AI threatens data-crunching roles, executives still value human accountability and senior expertise for critical decisions, as one VC noted, companies "want a throat to choke" when things go wrong.</a:t>
+            </a:r>
+            <a:endParaRPr sz="1200">
               <a:latin typeface="Calibri"/>
               <a:ea typeface="Calibri"/>
               <a:cs typeface="Calibri"/>
@@ -27767,11 +28936,11 @@
       </p:sp>
       <p:pic>
         <p:nvPicPr>
-          <p:cNvPr id="284" name="Google Shape;284;p43"/>
+          <p:cNvPr id="298" name="Google Shape;298;p43"/>
           <p:cNvPicPr preferRelativeResize="0"/>
           <p:nvPr/>
         </p:nvPicPr>
-        <p:blipFill rotWithShape="1">
+        <p:blipFill>
           <a:blip r:embed="rId4" cstate="email">
             <a:alphaModFix/>
             <a:extLst>
@@ -27780,49 +28949,64 @@
               </a:ext>
             </a:extLst>
           </a:blip>
-          <a:srcRect/>
-          <a:stretch/>
+          <a:stretch>
+            <a:fillRect/>
+          </a:stretch>
         </p:blipFill>
         <p:spPr>
           <a:xfrm>
-            <a:off x="1001578" y="3664175"/>
-            <a:ext cx="858450" cy="311906"/>
+            <a:off x="4885475" y="423625"/>
+            <a:ext cx="3610434" cy="3158400"/>
           </a:xfrm>
           <a:prstGeom prst="rect">
             <a:avLst/>
           </a:prstGeom>
           <a:noFill/>
-          <a:ln>
-            <a:noFill/>
+          <a:ln w="9525" cap="flat" cmpd="sng">
+            <a:solidFill>
+              <a:srgbClr val="FF0000"/>
+            </a:solidFill>
+            <a:prstDash val="solid"/>
+            <a:round/>
+            <a:headEnd type="none" w="sm" len="sm"/>
+            <a:tailEnd type="none" w="sm" len="sm"/>
           </a:ln>
         </p:spPr>
       </p:pic>
       <p:sp>
         <p:nvSpPr>
-          <p:cNvPr id="285" name="Google Shape;285;p43"/>
+          <p:cNvPr id="299" name="Google Shape;299;p43"/>
           <p:cNvSpPr txBox="1"/>
           <p:nvPr/>
         </p:nvSpPr>
         <p:spPr>
           <a:xfrm>
-            <a:off x="735103" y="4005903"/>
-            <a:ext cx="1391400" cy="431100"/>
+            <a:off x="55075" y="3953046"/>
+            <a:ext cx="4402500" cy="1126800"/>
           </a:xfrm>
           <a:prstGeom prst="rect">
             <a:avLst/>
           </a:prstGeom>
-          <a:noFill/>
-          <a:ln>
-            <a:noFill/>
+          <a:solidFill>
+            <a:srgbClr val="FFF2CC"/>
+          </a:solidFill>
+          <a:ln w="9525" cap="flat" cmpd="sng">
+            <a:solidFill>
+              <a:srgbClr val="FF0000"/>
+            </a:solidFill>
+            <a:prstDash val="solid"/>
+            <a:round/>
+            <a:headEnd type="none" w="sm" len="sm"/>
+            <a:tailEnd type="none" w="sm" len="sm"/>
           </a:ln>
         </p:spPr>
         <p:txBody>
-          <a:bodyPr spcFirstLastPara="1" wrap="square" lIns="91425" tIns="91425" rIns="91425" bIns="91425" anchor="t" anchorCtr="0">
+          <a:bodyPr spcFirstLastPara="1" wrap="square" lIns="9125" tIns="9125" rIns="9125" bIns="9125" anchor="t" anchorCtr="0">
             <a:spAutoFit/>
           </a:bodyPr>
           <a:lstStyle/>
           <a:p>
-            <a:pPr marL="0" marR="0" lvl="0" indent="0" algn="l" rtl="0">
+            <a:pPr marL="171450" marR="0" lvl="0" indent="-133350" algn="l" rtl="0">
               <a:lnSpc>
                 <a:spcPct val="100000"/>
               </a:lnSpc>
@@ -27833,75 +29017,30 @@
                 <a:spcPts val="0"/>
               </a:spcAft>
               <a:buClr>
-                <a:srgbClr val="000000"/>
+                <a:schemeClr val="dk1"/>
               </a:buClr>
-              <a:buSzPts val="1600"/>
-              <a:buFont typeface="Arial"/>
-              <a:buNone/>
+              <a:buSzPts val="1200"/>
+              <a:buFont typeface="Calibri"/>
+              <a:buChar char="●"/>
             </a:pPr>
             <a:r>
-              <a:rPr lang="en" sz="1600" b="0" i="0" u="sng" strike="noStrike" cap="none">
-                <a:solidFill>
-                  <a:schemeClr val="hlink"/>
-                </a:solidFill>
-                <a:latin typeface="Calibri"/>
-                <a:ea typeface="Calibri"/>
-                <a:cs typeface="Calibri"/>
-                <a:sym typeface="Calibri"/>
-                <a:hlinkClick r:id="rId5"/>
-              </a:rPr>
-              <a:t>https://eais.ai</a:t>
-            </a:r>
-            <a:r>
-              <a:rPr lang="en" sz="1600" b="0" i="0" u="none" strike="noStrike" cap="none">
-                <a:solidFill>
-                  <a:srgbClr val="000000"/>
-                </a:solidFill>
-                <a:latin typeface="Calibri"/>
-                <a:ea typeface="Calibri"/>
-                <a:cs typeface="Calibri"/>
-                <a:sym typeface="Calibri"/>
-              </a:rPr>
-              <a:t> </a:t>
-            </a:r>
-            <a:endParaRPr sz="1600" b="0" i="0" u="none" strike="noStrike" cap="none">
-              <a:solidFill>
-                <a:srgbClr val="000000"/>
-              </a:solidFill>
+              <a:rPr lang="en" sz="1200">
+                <a:latin typeface="Calibri"/>
+                <a:ea typeface="Calibri"/>
+                <a:cs typeface="Calibri"/>
+                <a:sym typeface="Calibri"/>
+              </a:rPr>
+              <a:t>Top AI agents can only complete 2.5% of real-world tasks</a:t>
+            </a:r>
+            <a:endParaRPr sz="1200">
               <a:latin typeface="Calibri"/>
               <a:ea typeface="Calibri"/>
               <a:cs typeface="Calibri"/>
               <a:sym typeface="Calibri"/>
             </a:endParaRPr>
           </a:p>
-        </p:txBody>
-      </p:sp>
-      <p:sp>
-        <p:nvSpPr>
-          <p:cNvPr id="286" name="Google Shape;286;p43"/>
-          <p:cNvSpPr txBox="1"/>
-          <p:nvPr/>
-        </p:nvSpPr>
-        <p:spPr>
-          <a:xfrm>
-            <a:off x="383803" y="4360974"/>
-            <a:ext cx="2094000" cy="431100"/>
-          </a:xfrm>
-          <a:prstGeom prst="rect">
-            <a:avLst/>
-          </a:prstGeom>
-          <a:noFill/>
-          <a:ln>
-            <a:noFill/>
-          </a:ln>
-        </p:spPr>
-        <p:txBody>
-          <a:bodyPr spcFirstLastPara="1" wrap="square" lIns="91425" tIns="91425" rIns="91425" bIns="91425" anchor="t" anchorCtr="0">
-            <a:spAutoFit/>
-          </a:bodyPr>
-          <a:lstStyle/>
-          <a:p>
-            <a:pPr marL="0" marR="0" lvl="0" indent="0" algn="ctr" rtl="0">
+          <a:p>
+            <a:pPr marL="171450" marR="0" lvl="0" indent="-133350" algn="l" rtl="0">
               <a:lnSpc>
                 <a:spcPct val="100000"/>
               </a:lnSpc>
@@ -27914,26 +29053,155 @@
               <a:buClr>
                 <a:schemeClr val="dk1"/>
               </a:buClr>
-              <a:buSzPts val="1100"/>
-              <a:buFont typeface="Arial"/>
-              <a:buNone/>
+              <a:buSzPts val="1200"/>
+              <a:buFont typeface="Calibri"/>
+              <a:buChar char="●"/>
             </a:pPr>
             <a:r>
-              <a:rPr lang="en" sz="1600" b="0" i="0" u="none" strike="noStrike" cap="none">
-                <a:solidFill>
-                  <a:srgbClr val="000000"/>
-                </a:solidFill>
-                <a:latin typeface="Calibri"/>
-                <a:ea typeface="Calibri"/>
-                <a:cs typeface="Calibri"/>
-                <a:sym typeface="Calibri"/>
-              </a:rPr>
-              <a:t>Enterprise AI Systems</a:t>
-            </a:r>
-            <a:endParaRPr sz="1600" b="0" i="0" u="none" strike="noStrike" cap="none">
-              <a:solidFill>
-                <a:srgbClr val="000000"/>
-              </a:solidFill>
+              <a:rPr lang="en" sz="1200">
+                <a:latin typeface="Calibri"/>
+                <a:ea typeface="Calibri"/>
+                <a:cs typeface="Calibri"/>
+                <a:sym typeface="Calibri"/>
+              </a:rPr>
+              <a:t>Yet companies like Block, Salesforce, and Amazon are citing AI in massive layoff announcements.</a:t>
+            </a:r>
+            <a:endParaRPr sz="1200">
+              <a:latin typeface="Calibri"/>
+              <a:ea typeface="Calibri"/>
+              <a:cs typeface="Calibri"/>
+              <a:sym typeface="Calibri"/>
+            </a:endParaRPr>
+          </a:p>
+          <a:p>
+            <a:pPr marL="171450" marR="0" lvl="0" indent="-133350" algn="l" rtl="0">
+              <a:lnSpc>
+                <a:spcPct val="100000"/>
+              </a:lnSpc>
+              <a:spcBef>
+                <a:spcPts val="0"/>
+              </a:spcBef>
+              <a:spcAft>
+                <a:spcPts val="0"/>
+              </a:spcAft>
+              <a:buSzPts val="1200"/>
+              <a:buFont typeface="Calibri"/>
+              <a:buChar char="●"/>
+            </a:pPr>
+            <a:r>
+              <a:rPr lang="en" sz="1200" u="sng">
+                <a:solidFill>
+                  <a:schemeClr val="hlink"/>
+                </a:solidFill>
+                <a:latin typeface="Calibri"/>
+                <a:ea typeface="Calibri"/>
+                <a:cs typeface="Calibri"/>
+                <a:sym typeface="Calibri"/>
+                <a:hlinkClick r:id="rId5"/>
+              </a:rPr>
+              <a:t>https://arxiv.org/pdf/2510.26787</a:t>
+            </a:r>
+            <a:r>
+              <a:rPr lang="en" sz="1200">
+                <a:latin typeface="Calibri"/>
+                <a:ea typeface="Calibri"/>
+                <a:cs typeface="Calibri"/>
+                <a:sym typeface="Calibri"/>
+              </a:rPr>
+              <a:t> </a:t>
+            </a:r>
+            <a:endParaRPr sz="1200">
+              <a:latin typeface="Calibri"/>
+              <a:ea typeface="Calibri"/>
+              <a:cs typeface="Calibri"/>
+              <a:sym typeface="Calibri"/>
+            </a:endParaRPr>
+          </a:p>
+          <a:p>
+            <a:pPr marL="171450" marR="0" lvl="0" indent="-133350" algn="l" rtl="0">
+              <a:lnSpc>
+                <a:spcPct val="100000"/>
+              </a:lnSpc>
+              <a:spcBef>
+                <a:spcPts val="0"/>
+              </a:spcBef>
+              <a:spcAft>
+                <a:spcPts val="0"/>
+              </a:spcAft>
+              <a:buClr>
+                <a:schemeClr val="dk1"/>
+              </a:buClr>
+              <a:buSzPts val="1200"/>
+              <a:buFont typeface="Calibri"/>
+              <a:buChar char="●"/>
+            </a:pPr>
+            <a:r>
+              <a:rPr lang="en" sz="1200" u="sng">
+                <a:solidFill>
+                  <a:schemeClr val="hlink"/>
+                </a:solidFill>
+                <a:latin typeface="Calibri"/>
+                <a:ea typeface="Calibri"/>
+                <a:cs typeface="Calibri"/>
+                <a:sym typeface="Calibri"/>
+                <a:hlinkClick r:id="rId6"/>
+              </a:rPr>
+              <a:t>https://www.sabrina.dev/p/big-lie-behind-tech-layoffs</a:t>
+            </a:r>
+            <a:r>
+              <a:rPr lang="en" sz="1200">
+                <a:latin typeface="Calibri"/>
+                <a:ea typeface="Calibri"/>
+                <a:cs typeface="Calibri"/>
+                <a:sym typeface="Calibri"/>
+              </a:rPr>
+              <a:t> </a:t>
+            </a:r>
+            <a:endParaRPr sz="1200">
+              <a:latin typeface="Calibri"/>
+              <a:ea typeface="Calibri"/>
+              <a:cs typeface="Calibri"/>
+              <a:sym typeface="Calibri"/>
+            </a:endParaRPr>
+          </a:p>
+          <a:p>
+            <a:pPr marL="171450" marR="0" lvl="0" indent="-133350" algn="l" rtl="0">
+              <a:lnSpc>
+                <a:spcPct val="100000"/>
+              </a:lnSpc>
+              <a:spcBef>
+                <a:spcPts val="0"/>
+              </a:spcBef>
+              <a:spcAft>
+                <a:spcPts val="0"/>
+              </a:spcAft>
+              <a:buSzPts val="1200"/>
+              <a:buFont typeface="Calibri"/>
+              <a:buChar char="●"/>
+            </a:pPr>
+            <a:r>
+              <a:rPr lang="en" sz="1200" u="sng">
+                <a:solidFill>
+                  <a:schemeClr val="hlink"/>
+                </a:solidFill>
+                <a:latin typeface="Calibri"/>
+                <a:ea typeface="Calibri"/>
+                <a:cs typeface="Calibri"/>
+                <a:sym typeface="Calibri"/>
+                <a:hlinkClick r:id="rId7"/>
+              </a:rPr>
+              <a:t>https://www.youtube.com/watch?v=a1Vd85ilWiI</a:t>
+            </a:r>
+            <a:r>
+              <a:rPr lang="en" sz="1200">
+                <a:latin typeface="Calibri"/>
+                <a:ea typeface="Calibri"/>
+                <a:cs typeface="Calibri"/>
+                <a:sym typeface="Calibri"/>
+              </a:rPr>
+              <a:t> - video</a:t>
+            </a:r>
+            <a:endParaRPr sz="1200">
               <a:latin typeface="Calibri"/>
               <a:ea typeface="Calibri"/>
               <a:cs typeface="Calibri"/>
@@ -29654,7 +30922,7 @@
             <a:tbl>
               <a:tblPr>
                 <a:noFill/>
-                <a:tableStyleId>{C3183B36-E036-480B-ADC8-CC1FA9361799}</a:tableStyleId>
+                <a:tableStyleId>{67F52509-D6FF-42E6-A50E-6B19E394C55B}</a:tableStyleId>
               </a:tblPr>
               <a:tblGrid>
                 <a:gridCol w="219050">
@@ -30091,7 +31359,7 @@
             <a:tbl>
               <a:tblPr>
                 <a:noFill/>
-                <a:tableStyleId>{C3183B36-E036-480B-ADC8-CC1FA9361799}</a:tableStyleId>
+                <a:tableStyleId>{67F52509-D6FF-42E6-A50E-6B19E394C55B}</a:tableStyleId>
               </a:tblPr>
               <a:tblGrid>
                 <a:gridCol w="247650">
@@ -36402,7 +37670,7 @@
             <a:tbl>
               <a:tblPr>
                 <a:noFill/>
-                <a:tableStyleId>{C3183B36-E036-480B-ADC8-CC1FA9361799}</a:tableStyleId>
+                <a:tableStyleId>{67F52509-D6FF-42E6-A50E-6B19E394C55B}</a:tableStyleId>
               </a:tblPr>
               <a:tblGrid>
                 <a:gridCol w="247650">
@@ -42711,7 +43979,7 @@
   <p:cSld>
     <p:spTree>
       <p:nvGrpSpPr>
-        <p:cNvPr id="1" name="Shape 290"/>
+        <p:cNvPr id="1" name="Shape 303"/>
         <p:cNvGrpSpPr/>
         <p:nvPr/>
       </p:nvGrpSpPr>
@@ -42725,7 +43993,2281 @@
       </p:grpSpPr>
       <p:sp>
         <p:nvSpPr>
-          <p:cNvPr id="291" name="Google Shape;291;p44"/>
+          <p:cNvPr id="304" name="Google Shape;304;p44"/>
+          <p:cNvSpPr txBox="1"/>
+          <p:nvPr/>
+        </p:nvSpPr>
+        <p:spPr>
+          <a:xfrm>
+            <a:off x="55075" y="63650"/>
+            <a:ext cx="4503900" cy="326400"/>
+          </a:xfrm>
+          <a:prstGeom prst="rect">
+            <a:avLst/>
+          </a:prstGeom>
+          <a:noFill/>
+          <a:ln>
+            <a:noFill/>
+          </a:ln>
+        </p:spPr>
+        <p:txBody>
+          <a:bodyPr spcFirstLastPara="1" wrap="square" lIns="9125" tIns="9125" rIns="9125" bIns="9125" anchor="t" anchorCtr="0">
+            <a:spAutoFit/>
+          </a:bodyPr>
+          <a:lstStyle/>
+          <a:p>
+            <a:pPr marL="0" marR="0" lvl="0" indent="0" algn="l" rtl="0">
+              <a:lnSpc>
+                <a:spcPct val="100000"/>
+              </a:lnSpc>
+              <a:spcBef>
+                <a:spcPts val="0"/>
+              </a:spcBef>
+              <a:spcAft>
+                <a:spcPts val="0"/>
+              </a:spcAft>
+              <a:buClr>
+                <a:schemeClr val="dk1"/>
+              </a:buClr>
+              <a:buSzPts val="1100"/>
+              <a:buFont typeface="Arial"/>
+              <a:buNone/>
+            </a:pPr>
+            <a:r>
+              <a:rPr lang="en" sz="2000" b="1">
+                <a:solidFill>
+                  <a:schemeClr val="dk1"/>
+                </a:solidFill>
+                <a:latin typeface="Calibri"/>
+                <a:ea typeface="Calibri"/>
+                <a:cs typeface="Calibri"/>
+                <a:sym typeface="Calibri"/>
+              </a:rPr>
+              <a:t>Hallucinations in 2026</a:t>
+            </a:r>
+            <a:endParaRPr sz="2000" b="1">
+              <a:solidFill>
+                <a:schemeClr val="dk1"/>
+              </a:solidFill>
+              <a:latin typeface="Calibri"/>
+              <a:ea typeface="Calibri"/>
+              <a:cs typeface="Calibri"/>
+              <a:sym typeface="Calibri"/>
+            </a:endParaRPr>
+          </a:p>
+        </p:txBody>
+      </p:sp>
+      <p:sp>
+        <p:nvSpPr>
+          <p:cNvPr id="305" name="Google Shape;305;p44"/>
+          <p:cNvSpPr txBox="1"/>
+          <p:nvPr/>
+        </p:nvSpPr>
+        <p:spPr>
+          <a:xfrm>
+            <a:off x="55075" y="407589"/>
+            <a:ext cx="4402500" cy="3912600"/>
+          </a:xfrm>
+          <a:prstGeom prst="rect">
+            <a:avLst/>
+          </a:prstGeom>
+          <a:solidFill>
+            <a:srgbClr val="FFF2CC"/>
+          </a:solidFill>
+          <a:ln w="9525" cap="flat" cmpd="sng">
+            <a:solidFill>
+              <a:srgbClr val="FF0000"/>
+            </a:solidFill>
+            <a:prstDash val="solid"/>
+            <a:round/>
+            <a:headEnd type="none" w="sm" len="sm"/>
+            <a:tailEnd type="none" w="sm" len="sm"/>
+          </a:ln>
+        </p:spPr>
+        <p:txBody>
+          <a:bodyPr spcFirstLastPara="1" wrap="square" lIns="9125" tIns="9125" rIns="9125" bIns="9125" anchor="t" anchorCtr="0">
+            <a:spAutoFit/>
+          </a:bodyPr>
+          <a:lstStyle/>
+          <a:p>
+            <a:pPr marL="171450" marR="0" lvl="0" indent="-127000" algn="l" rtl="0">
+              <a:lnSpc>
+                <a:spcPct val="100000"/>
+              </a:lnSpc>
+              <a:spcBef>
+                <a:spcPts val="0"/>
+              </a:spcBef>
+              <a:spcAft>
+                <a:spcPts val="0"/>
+              </a:spcAft>
+              <a:buClr>
+                <a:schemeClr val="dk1"/>
+              </a:buClr>
+              <a:buSzPts val="1100"/>
+              <a:buFont typeface="Calibri"/>
+              <a:buChar char="●"/>
+            </a:pPr>
+            <a:r>
+              <a:rPr lang="en" sz="1100">
+                <a:latin typeface="Calibri"/>
+                <a:ea typeface="Calibri"/>
+                <a:cs typeface="Calibri"/>
+                <a:sym typeface="Calibri"/>
+              </a:rPr>
+              <a:t>Nearly half of all executives admit to making major company decisions based on unchecked AI content</a:t>
+            </a:r>
+            <a:endParaRPr sz="1100">
+              <a:latin typeface="Calibri"/>
+              <a:ea typeface="Calibri"/>
+              <a:cs typeface="Calibri"/>
+              <a:sym typeface="Calibri"/>
+            </a:endParaRPr>
+          </a:p>
+          <a:p>
+            <a:pPr marL="171450" marR="0" lvl="0" indent="-127000" algn="l" rtl="0">
+              <a:lnSpc>
+                <a:spcPct val="100000"/>
+              </a:lnSpc>
+              <a:spcBef>
+                <a:spcPts val="0"/>
+              </a:spcBef>
+              <a:spcAft>
+                <a:spcPts val="0"/>
+              </a:spcAft>
+              <a:buClr>
+                <a:schemeClr val="dk1"/>
+              </a:buClr>
+              <a:buSzPts val="1100"/>
+              <a:buFont typeface="Calibri"/>
+              <a:buChar char="●"/>
+            </a:pPr>
+            <a:r>
+              <a:rPr lang="en" sz="1100">
+                <a:latin typeface="Calibri"/>
+                <a:ea typeface="Calibri"/>
+                <a:cs typeface="Calibri"/>
+                <a:sym typeface="Calibri"/>
+              </a:rPr>
+              <a:t>Employees spend an average of 4 hrs/week double-checking AI output</a:t>
+            </a:r>
+            <a:endParaRPr sz="1100">
+              <a:latin typeface="Calibri"/>
+              <a:ea typeface="Calibri"/>
+              <a:cs typeface="Calibri"/>
+              <a:sym typeface="Calibri"/>
+            </a:endParaRPr>
+          </a:p>
+          <a:p>
+            <a:pPr marL="171450" marR="0" lvl="0" indent="-127000" algn="l" rtl="0">
+              <a:lnSpc>
+                <a:spcPct val="100000"/>
+              </a:lnSpc>
+              <a:spcBef>
+                <a:spcPts val="0"/>
+              </a:spcBef>
+              <a:spcAft>
+                <a:spcPts val="0"/>
+              </a:spcAft>
+              <a:buClr>
+                <a:schemeClr val="dk1"/>
+              </a:buClr>
+              <a:buSzPts val="1100"/>
+              <a:buFont typeface="Calibri"/>
+              <a:buChar char="●"/>
+            </a:pPr>
+            <a:r>
+              <a:rPr lang="en" sz="1100">
+                <a:latin typeface="Calibri"/>
+                <a:ea typeface="Calibri"/>
+                <a:cs typeface="Calibri"/>
+                <a:sym typeface="Calibri"/>
+              </a:rPr>
+              <a:t>Even top academic conferences have been affected, unknowingly accepting dozens of papers containing fake, AI-generated citations</a:t>
+            </a:r>
+            <a:endParaRPr sz="1100">
+              <a:latin typeface="Calibri"/>
+              <a:ea typeface="Calibri"/>
+              <a:cs typeface="Calibri"/>
+              <a:sym typeface="Calibri"/>
+            </a:endParaRPr>
+          </a:p>
+          <a:p>
+            <a:pPr marL="171450" marR="0" lvl="0" indent="-127000" algn="l" rtl="0">
+              <a:lnSpc>
+                <a:spcPct val="100000"/>
+              </a:lnSpc>
+              <a:spcBef>
+                <a:spcPts val="0"/>
+              </a:spcBef>
+              <a:spcAft>
+                <a:spcPts val="0"/>
+              </a:spcAft>
+              <a:buClr>
+                <a:schemeClr val="dk1"/>
+              </a:buClr>
+              <a:buSzPts val="1100"/>
+              <a:buFont typeface="Calibri"/>
+              <a:buChar char="●"/>
+            </a:pPr>
+            <a:r>
+              <a:rPr lang="en" sz="1100">
+                <a:latin typeface="Calibri"/>
+                <a:ea typeface="Calibri"/>
+                <a:cs typeface="Calibri"/>
+                <a:sym typeface="Calibri"/>
+              </a:rPr>
+              <a:t>A top-tier model might hallucinate 88% of the time when asked questions it doesn't know; realistic hallucination rate in normal complex conversations is approximately 30%</a:t>
+            </a:r>
+            <a:endParaRPr sz="1100">
+              <a:latin typeface="Calibri"/>
+              <a:ea typeface="Calibri"/>
+              <a:cs typeface="Calibri"/>
+              <a:sym typeface="Calibri"/>
+            </a:endParaRPr>
+          </a:p>
+          <a:p>
+            <a:pPr marL="171450" marR="0" lvl="0" indent="-127000" algn="l" rtl="0">
+              <a:lnSpc>
+                <a:spcPct val="100000"/>
+              </a:lnSpc>
+              <a:spcBef>
+                <a:spcPts val="0"/>
+              </a:spcBef>
+              <a:spcAft>
+                <a:spcPts val="0"/>
+              </a:spcAft>
+              <a:buClr>
+                <a:schemeClr val="dk1"/>
+              </a:buClr>
+              <a:buSzPts val="1100"/>
+              <a:buFont typeface="Calibri"/>
+              <a:buChar char="●"/>
+            </a:pPr>
+            <a:r>
+              <a:rPr lang="en" sz="1100">
+                <a:latin typeface="Calibri"/>
+                <a:ea typeface="Calibri"/>
+                <a:cs typeface="Calibri"/>
+                <a:sym typeface="Calibri"/>
+              </a:rPr>
+              <a:t>AI models are 34% more likely to use confident language (e.g., "certainly," "definitely") at the exact moment they are providing incorrect information</a:t>
+            </a:r>
+            <a:endParaRPr sz="1100">
+              <a:latin typeface="Calibri"/>
+              <a:ea typeface="Calibri"/>
+              <a:cs typeface="Calibri"/>
+              <a:sym typeface="Calibri"/>
+            </a:endParaRPr>
+          </a:p>
+          <a:p>
+            <a:pPr marL="171450" marR="0" lvl="0" indent="-127000" algn="l" rtl="0">
+              <a:lnSpc>
+                <a:spcPct val="100000"/>
+              </a:lnSpc>
+              <a:spcBef>
+                <a:spcPts val="0"/>
+              </a:spcBef>
+              <a:spcAft>
+                <a:spcPts val="0"/>
+              </a:spcAft>
+              <a:buClr>
+                <a:schemeClr val="dk1"/>
+              </a:buClr>
+              <a:buSzPts val="1100"/>
+              <a:buFont typeface="Calibri"/>
+              <a:buChar char="●"/>
+            </a:pPr>
+            <a:r>
+              <a:rPr lang="en" sz="1100">
+                <a:latin typeface="Calibri"/>
+                <a:ea typeface="Calibri"/>
+                <a:cs typeface="Calibri"/>
+                <a:sym typeface="Calibri"/>
+              </a:rPr>
+              <a:t>Grok 3 was found to fail citation accuracy 94% of the time, often providing real links but inventing the content supposedly found within them</a:t>
+            </a:r>
+            <a:endParaRPr sz="1100">
+              <a:latin typeface="Calibri"/>
+              <a:ea typeface="Calibri"/>
+              <a:cs typeface="Calibri"/>
+              <a:sym typeface="Calibri"/>
+            </a:endParaRPr>
+          </a:p>
+          <a:p>
+            <a:pPr marL="171450" marR="0" lvl="0" indent="-127000" algn="l" rtl="0">
+              <a:lnSpc>
+                <a:spcPct val="100000"/>
+              </a:lnSpc>
+              <a:spcBef>
+                <a:spcPts val="0"/>
+              </a:spcBef>
+              <a:spcAft>
+                <a:spcPts val="0"/>
+              </a:spcAft>
+              <a:buClr>
+                <a:schemeClr val="dk1"/>
+              </a:buClr>
+              <a:buSzPts val="1100"/>
+              <a:buFont typeface="Calibri"/>
+              <a:buChar char="●"/>
+            </a:pPr>
+            <a:r>
+              <a:rPr lang="en" sz="1100">
+                <a:latin typeface="Calibri"/>
+                <a:ea typeface="Calibri"/>
+                <a:cs typeface="Calibri"/>
+                <a:sym typeface="Calibri"/>
+              </a:rPr>
+              <a:t>Hallucination rates vary depending on whether you are testing for "faithfulness" (summarization) or "intellectual honesty" (admitting ignorance)</a:t>
+            </a:r>
+            <a:endParaRPr sz="1100">
+              <a:latin typeface="Calibri"/>
+              <a:ea typeface="Calibri"/>
+              <a:cs typeface="Calibri"/>
+              <a:sym typeface="Calibri"/>
+            </a:endParaRPr>
+          </a:p>
+          <a:p>
+            <a:pPr marL="171450" marR="0" lvl="0" indent="-127000" algn="l" rtl="0">
+              <a:lnSpc>
+                <a:spcPct val="100000"/>
+              </a:lnSpc>
+              <a:spcBef>
+                <a:spcPts val="0"/>
+              </a:spcBef>
+              <a:spcAft>
+                <a:spcPts val="0"/>
+              </a:spcAft>
+              <a:buClr>
+                <a:schemeClr val="dk1"/>
+              </a:buClr>
+              <a:buSzPts val="1100"/>
+              <a:buFont typeface="Calibri"/>
+              <a:buChar char="●"/>
+            </a:pPr>
+            <a:r>
+              <a:rPr lang="en" sz="1100">
+                <a:latin typeface="Calibri"/>
+                <a:ea typeface="Calibri"/>
+                <a:cs typeface="Calibri"/>
+                <a:sym typeface="Calibri"/>
+              </a:rPr>
+              <a:t>Claude prioritizes intellectual honesty, scoring a 0% hallucination rate on specific tests because it refuses to guess when it doesn't know an answer</a:t>
+            </a:r>
+            <a:endParaRPr sz="1100">
+              <a:latin typeface="Calibri"/>
+              <a:ea typeface="Calibri"/>
+              <a:cs typeface="Calibri"/>
+              <a:sym typeface="Calibri"/>
+            </a:endParaRPr>
+          </a:p>
+          <a:p>
+            <a:pPr marL="171450" marR="0" lvl="0" indent="-127000" algn="l" rtl="0">
+              <a:lnSpc>
+                <a:spcPct val="100000"/>
+              </a:lnSpc>
+              <a:spcBef>
+                <a:spcPts val="0"/>
+              </a:spcBef>
+              <a:spcAft>
+                <a:spcPts val="0"/>
+              </a:spcAft>
+              <a:buClr>
+                <a:schemeClr val="dk1"/>
+              </a:buClr>
+              <a:buSzPts val="1100"/>
+              <a:buFont typeface="Calibri"/>
+              <a:buChar char="●"/>
+            </a:pPr>
+            <a:r>
+              <a:rPr lang="en" sz="1100">
+                <a:latin typeface="Calibri"/>
+                <a:ea typeface="Calibri"/>
+                <a:cs typeface="Calibri"/>
+                <a:sym typeface="Calibri"/>
+              </a:rPr>
+              <a:t>Gemini has a broader knowledge base but is more aggressive in fabricating answers, guessing incorrectly about half the time in similar tests</a:t>
+            </a:r>
+            <a:endParaRPr sz="1100">
+              <a:latin typeface="Calibri"/>
+              <a:ea typeface="Calibri"/>
+              <a:cs typeface="Calibri"/>
+              <a:sym typeface="Calibri"/>
+            </a:endParaRPr>
+          </a:p>
+          <a:p>
+            <a:pPr marL="171450" marR="0" lvl="0" indent="-127000" algn="l" rtl="0">
+              <a:lnSpc>
+                <a:spcPct val="100000"/>
+              </a:lnSpc>
+              <a:spcBef>
+                <a:spcPts val="0"/>
+              </a:spcBef>
+              <a:spcAft>
+                <a:spcPts val="0"/>
+              </a:spcAft>
+              <a:buClr>
+                <a:schemeClr val="dk1"/>
+              </a:buClr>
+              <a:buSzPts val="1100"/>
+              <a:buFont typeface="Calibri"/>
+              <a:buChar char="●"/>
+            </a:pPr>
+            <a:r>
+              <a:rPr lang="en" sz="1100">
+                <a:latin typeface="Calibri"/>
+                <a:ea typeface="Calibri"/>
+                <a:cs typeface="Calibri"/>
+                <a:sym typeface="Calibri"/>
+              </a:rPr>
+              <a:t>GPT Models - turning on web access is the most effective way to reduce hallucinations in GPT models, plummeting the error rate from 47% to under 10%</a:t>
+            </a:r>
+            <a:endParaRPr sz="1100">
+              <a:latin typeface="Calibri"/>
+              <a:ea typeface="Calibri"/>
+              <a:cs typeface="Calibri"/>
+              <a:sym typeface="Calibri"/>
+            </a:endParaRPr>
+          </a:p>
+        </p:txBody>
+      </p:sp>
+      <p:sp>
+        <p:nvSpPr>
+          <p:cNvPr id="306" name="Google Shape;306;p44"/>
+          <p:cNvSpPr txBox="1"/>
+          <p:nvPr/>
+        </p:nvSpPr>
+        <p:spPr>
+          <a:xfrm>
+            <a:off x="4558975" y="407589"/>
+            <a:ext cx="4402500" cy="1881000"/>
+          </a:xfrm>
+          <a:prstGeom prst="rect">
+            <a:avLst/>
+          </a:prstGeom>
+          <a:solidFill>
+            <a:srgbClr val="FFF2CC"/>
+          </a:solidFill>
+          <a:ln w="9525" cap="flat" cmpd="sng">
+            <a:solidFill>
+              <a:srgbClr val="FF0000"/>
+            </a:solidFill>
+            <a:prstDash val="solid"/>
+            <a:round/>
+            <a:headEnd type="none" w="sm" len="sm"/>
+            <a:tailEnd type="none" w="sm" len="sm"/>
+          </a:ln>
+        </p:spPr>
+        <p:txBody>
+          <a:bodyPr spcFirstLastPara="1" wrap="square" lIns="9125" tIns="9125" rIns="9125" bIns="9125" anchor="t" anchorCtr="0">
+            <a:spAutoFit/>
+          </a:bodyPr>
+          <a:lstStyle/>
+          <a:p>
+            <a:pPr marL="171450" marR="0" lvl="0" indent="-127000" algn="l" rtl="0">
+              <a:lnSpc>
+                <a:spcPct val="100000"/>
+              </a:lnSpc>
+              <a:spcBef>
+                <a:spcPts val="0"/>
+              </a:spcBef>
+              <a:spcAft>
+                <a:spcPts val="0"/>
+              </a:spcAft>
+              <a:buClr>
+                <a:schemeClr val="dk1"/>
+              </a:buClr>
+              <a:buSzPts val="1100"/>
+              <a:buFont typeface="Calibri"/>
+              <a:buChar char="●"/>
+            </a:pPr>
+            <a:r>
+              <a:rPr lang="en" sz="1100">
+                <a:latin typeface="Calibri"/>
+                <a:ea typeface="Calibri"/>
+                <a:cs typeface="Calibri"/>
+                <a:sym typeface="Calibri"/>
+              </a:rPr>
+              <a:t>AI models are not databases; they are prediction engines designed to find the most statistically plausible next word, not the "truth"</a:t>
+            </a:r>
+            <a:endParaRPr sz="1100">
+              <a:latin typeface="Calibri"/>
+              <a:ea typeface="Calibri"/>
+              <a:cs typeface="Calibri"/>
+              <a:sym typeface="Calibri"/>
+            </a:endParaRPr>
+          </a:p>
+          <a:p>
+            <a:pPr marL="171450" marR="0" lvl="0" indent="-127000" algn="l" rtl="0">
+              <a:lnSpc>
+                <a:spcPct val="100000"/>
+              </a:lnSpc>
+              <a:spcBef>
+                <a:spcPts val="0"/>
+              </a:spcBef>
+              <a:spcAft>
+                <a:spcPts val="0"/>
+              </a:spcAft>
+              <a:buClr>
+                <a:schemeClr val="dk1"/>
+              </a:buClr>
+              <a:buSzPts val="1100"/>
+              <a:buFont typeface="Calibri"/>
+              <a:buChar char="●"/>
+            </a:pPr>
+            <a:r>
+              <a:rPr lang="en" sz="1100">
+                <a:latin typeface="Calibri"/>
+                <a:ea typeface="Calibri"/>
+                <a:cs typeface="Calibri"/>
+                <a:sym typeface="Calibri"/>
+              </a:rPr>
+              <a:t>Goal Conflict - there is a fundamental trade-off between being truthful, comprehensive, and honest about limits; a model can achieve some of these goals simultaneously, but never all of them</a:t>
+            </a:r>
+            <a:endParaRPr sz="1100">
+              <a:latin typeface="Calibri"/>
+              <a:ea typeface="Calibri"/>
+              <a:cs typeface="Calibri"/>
+              <a:sym typeface="Calibri"/>
+            </a:endParaRPr>
+          </a:p>
+          <a:p>
+            <a:pPr marL="171450" marR="0" lvl="0" indent="-127000" algn="l" rtl="0">
+              <a:lnSpc>
+                <a:spcPct val="100000"/>
+              </a:lnSpc>
+              <a:spcBef>
+                <a:spcPts val="0"/>
+              </a:spcBef>
+              <a:spcAft>
+                <a:spcPts val="0"/>
+              </a:spcAft>
+              <a:buClr>
+                <a:schemeClr val="dk1"/>
+              </a:buClr>
+              <a:buSzPts val="1100"/>
+              <a:buFont typeface="Calibri"/>
+              <a:buChar char="●"/>
+            </a:pPr>
+            <a:r>
+              <a:rPr lang="en" sz="1100">
+                <a:latin typeface="Calibri"/>
+                <a:ea typeface="Calibri"/>
+                <a:cs typeface="Calibri"/>
+                <a:sym typeface="Calibri"/>
+              </a:rPr>
+              <a:t>How to manage hallucinations:</a:t>
+            </a:r>
+            <a:endParaRPr sz="1100">
+              <a:latin typeface="Calibri"/>
+              <a:ea typeface="Calibri"/>
+              <a:cs typeface="Calibri"/>
+              <a:sym typeface="Calibri"/>
+            </a:endParaRPr>
+          </a:p>
+          <a:p>
+            <a:pPr marL="171450" marR="0" lvl="0" indent="-127000" algn="l" rtl="0">
+              <a:lnSpc>
+                <a:spcPct val="100000"/>
+              </a:lnSpc>
+              <a:spcBef>
+                <a:spcPts val="0"/>
+              </a:spcBef>
+              <a:spcAft>
+                <a:spcPts val="0"/>
+              </a:spcAft>
+              <a:buClr>
+                <a:schemeClr val="dk1"/>
+              </a:buClr>
+              <a:buSzPts val="1100"/>
+              <a:buFont typeface="Calibri"/>
+              <a:buChar char="●"/>
+            </a:pPr>
+            <a:r>
+              <a:rPr lang="en" sz="1100">
+                <a:latin typeface="Calibri"/>
+                <a:ea typeface="Calibri"/>
+                <a:cs typeface="Calibri"/>
+                <a:sym typeface="Calibri"/>
+              </a:rPr>
+              <a:t>Tier 1 (70%+ Reduction) - use Web Search and RAG (Retrieval-Augmented Generation) to force the AI to use specific, verified documents</a:t>
+            </a:r>
+            <a:endParaRPr sz="1100">
+              <a:latin typeface="Calibri"/>
+              <a:ea typeface="Calibri"/>
+              <a:cs typeface="Calibri"/>
+              <a:sym typeface="Calibri"/>
+            </a:endParaRPr>
+          </a:p>
+          <a:p>
+            <a:pPr marL="171450" marR="0" lvl="0" indent="-127000" algn="l" rtl="0">
+              <a:lnSpc>
+                <a:spcPct val="100000"/>
+              </a:lnSpc>
+              <a:spcBef>
+                <a:spcPts val="0"/>
+              </a:spcBef>
+              <a:spcAft>
+                <a:spcPts val="0"/>
+              </a:spcAft>
+              <a:buClr>
+                <a:schemeClr val="dk1"/>
+              </a:buClr>
+              <a:buSzPts val="1100"/>
+              <a:buFont typeface="Calibri"/>
+              <a:buChar char="●"/>
+            </a:pPr>
+            <a:r>
+              <a:rPr lang="en" sz="1100">
+                <a:latin typeface="Calibri"/>
+                <a:ea typeface="Calibri"/>
+                <a:cs typeface="Calibri"/>
+                <a:sym typeface="Calibri"/>
+              </a:rPr>
+              <a:t>Tier 2 &amp; 3 - Implement cross-checking (using one AI to check another) and specialized prompting techniques</a:t>
+            </a:r>
+            <a:endParaRPr sz="1100">
+              <a:latin typeface="Calibri"/>
+              <a:ea typeface="Calibri"/>
+              <a:cs typeface="Calibri"/>
+              <a:sym typeface="Calibri"/>
+            </a:endParaRPr>
+          </a:p>
+          <a:p>
+            <a:pPr marL="171450" marR="0" lvl="0" indent="-127000" algn="l" rtl="0">
+              <a:lnSpc>
+                <a:spcPct val="100000"/>
+              </a:lnSpc>
+              <a:spcBef>
+                <a:spcPts val="0"/>
+              </a:spcBef>
+              <a:spcAft>
+                <a:spcPts val="0"/>
+              </a:spcAft>
+              <a:buClr>
+                <a:schemeClr val="dk1"/>
+              </a:buClr>
+              <a:buSzPts val="1100"/>
+              <a:buFont typeface="Calibri"/>
+              <a:buChar char="●"/>
+            </a:pPr>
+            <a:r>
+              <a:rPr lang="en" sz="1100" u="sng">
+                <a:solidFill>
+                  <a:schemeClr val="hlink"/>
+                </a:solidFill>
+                <a:latin typeface="Calibri"/>
+                <a:ea typeface="Calibri"/>
+                <a:cs typeface="Calibri"/>
+                <a:sym typeface="Calibri"/>
+                <a:hlinkClick r:id="rId3"/>
+              </a:rPr>
+              <a:t>http://www.youtube.com/watch?v=fHas3Dg1okk</a:t>
+            </a:r>
+            <a:r>
+              <a:rPr lang="en" sz="1100">
+                <a:latin typeface="Calibri"/>
+                <a:ea typeface="Calibri"/>
+                <a:cs typeface="Calibri"/>
+                <a:sym typeface="Calibri"/>
+              </a:rPr>
+              <a:t> </a:t>
+            </a:r>
+            <a:endParaRPr sz="1100">
+              <a:latin typeface="Calibri"/>
+              <a:ea typeface="Calibri"/>
+              <a:cs typeface="Calibri"/>
+              <a:sym typeface="Calibri"/>
+            </a:endParaRPr>
+          </a:p>
+        </p:txBody>
+      </p:sp>
+    </p:spTree>
+  </p:cSld>
+  <p:clrMapOvr>
+    <a:masterClrMapping/>
+  </p:clrMapOvr>
+</p:sld>
+</file>
+
+<file path=ppt/slides/slide31.xml><?xml version="1.0" encoding="utf-8"?>
+<p:sld xmlns:a="http://schemas.openxmlformats.org/drawingml/2006/main" xmlns:r="http://schemas.openxmlformats.org/officeDocument/2006/relationships" xmlns:p="http://schemas.openxmlformats.org/presentationml/2006/main">
+  <p:cSld>
+    <p:spTree>
+      <p:nvGrpSpPr>
+        <p:cNvPr id="1" name="Shape 310"/>
+        <p:cNvGrpSpPr/>
+        <p:nvPr/>
+      </p:nvGrpSpPr>
+      <p:grpSpPr>
+        <a:xfrm>
+          <a:off x="0" y="0"/>
+          <a:ext cx="0" cy="0"/>
+          <a:chOff x="0" y="0"/>
+          <a:chExt cx="0" cy="0"/>
+        </a:xfrm>
+      </p:grpSpPr>
+      <p:sp>
+        <p:nvSpPr>
+          <p:cNvPr id="311" name="Google Shape;311;p45"/>
+          <p:cNvSpPr txBox="1"/>
+          <p:nvPr/>
+        </p:nvSpPr>
+        <p:spPr>
+          <a:xfrm>
+            <a:off x="67350" y="52750"/>
+            <a:ext cx="3179400" cy="326400"/>
+          </a:xfrm>
+          <a:prstGeom prst="rect">
+            <a:avLst/>
+          </a:prstGeom>
+          <a:noFill/>
+          <a:ln>
+            <a:noFill/>
+          </a:ln>
+        </p:spPr>
+        <p:txBody>
+          <a:bodyPr spcFirstLastPara="1" wrap="square" lIns="9125" tIns="9125" rIns="9125" bIns="9125" anchor="t" anchorCtr="0">
+            <a:spAutoFit/>
+          </a:bodyPr>
+          <a:lstStyle/>
+          <a:p>
+            <a:pPr marL="0" marR="0" lvl="0" indent="0" algn="l" rtl="0">
+              <a:lnSpc>
+                <a:spcPct val="100000"/>
+              </a:lnSpc>
+              <a:spcBef>
+                <a:spcPts val="0"/>
+              </a:spcBef>
+              <a:spcAft>
+                <a:spcPts val="0"/>
+              </a:spcAft>
+              <a:buClr>
+                <a:schemeClr val="dk1"/>
+              </a:buClr>
+              <a:buSzPts val="1100"/>
+              <a:buFont typeface="Arial"/>
+              <a:buNone/>
+            </a:pPr>
+            <a:r>
+              <a:rPr lang="en" sz="2000" b="1" i="0" u="none" strike="noStrike" cap="none">
+                <a:solidFill>
+                  <a:schemeClr val="dk1"/>
+                </a:solidFill>
+                <a:latin typeface="Calibri"/>
+                <a:ea typeface="Calibri"/>
+                <a:cs typeface="Calibri"/>
+                <a:sym typeface="Calibri"/>
+              </a:rPr>
+              <a:t>Jobs</a:t>
+            </a:r>
+            <a:endParaRPr sz="2000" b="1" i="0" u="none" strike="noStrike" cap="none">
+              <a:solidFill>
+                <a:schemeClr val="dk1"/>
+              </a:solidFill>
+              <a:latin typeface="Calibri"/>
+              <a:ea typeface="Calibri"/>
+              <a:cs typeface="Calibri"/>
+              <a:sym typeface="Calibri"/>
+            </a:endParaRPr>
+          </a:p>
+        </p:txBody>
+      </p:sp>
+      <p:sp>
+        <p:nvSpPr>
+          <p:cNvPr id="312" name="Google Shape;312;p45"/>
+          <p:cNvSpPr txBox="1"/>
+          <p:nvPr/>
+        </p:nvSpPr>
+        <p:spPr>
+          <a:xfrm>
+            <a:off x="2134467" y="34252"/>
+            <a:ext cx="1800600" cy="387900"/>
+          </a:xfrm>
+          <a:prstGeom prst="rect">
+            <a:avLst/>
+          </a:prstGeom>
+          <a:solidFill>
+            <a:srgbClr val="FFF2CC"/>
+          </a:solidFill>
+          <a:ln w="9525" cap="flat" cmpd="sng">
+            <a:solidFill>
+              <a:srgbClr val="FF0000"/>
+            </a:solidFill>
+            <a:prstDash val="solid"/>
+            <a:round/>
+            <a:headEnd type="none" w="sm" len="sm"/>
+            <a:tailEnd type="none" w="sm" len="sm"/>
+          </a:ln>
+        </p:spPr>
+        <p:txBody>
+          <a:bodyPr spcFirstLastPara="1" wrap="square" lIns="9125" tIns="9125" rIns="9125" bIns="9125" anchor="t" anchorCtr="0">
+            <a:spAutoFit/>
+          </a:bodyPr>
+          <a:lstStyle/>
+          <a:p>
+            <a:pPr marL="171450" marR="0" lvl="0" indent="-133350" algn="l" rtl="0">
+              <a:lnSpc>
+                <a:spcPct val="100000"/>
+              </a:lnSpc>
+              <a:spcBef>
+                <a:spcPts val="0"/>
+              </a:spcBef>
+              <a:spcAft>
+                <a:spcPts val="0"/>
+              </a:spcAft>
+              <a:buSzPts val="1200"/>
+              <a:buFont typeface="Calibri"/>
+              <a:buChar char="●"/>
+            </a:pPr>
+            <a:r>
+              <a:rPr lang="en" sz="1200" b="0" i="0" u="sng" strike="noStrike" cap="none">
+                <a:solidFill>
+                  <a:schemeClr val="hlink"/>
+                </a:solidFill>
+                <a:latin typeface="Calibri"/>
+                <a:ea typeface="Calibri"/>
+                <a:cs typeface="Calibri"/>
+                <a:sym typeface="Calibri"/>
+                <a:hlinkClick r:id="rId3"/>
+              </a:rPr>
+              <a:t>https://layoffs.fyi</a:t>
+            </a:r>
+            <a:endParaRPr sz="1200">
+              <a:latin typeface="Calibri"/>
+              <a:ea typeface="Calibri"/>
+              <a:cs typeface="Calibri"/>
+              <a:sym typeface="Calibri"/>
+            </a:endParaRPr>
+          </a:p>
+          <a:p>
+            <a:pPr marL="171450" marR="0" lvl="0" indent="-133350" algn="l" rtl="0">
+              <a:lnSpc>
+                <a:spcPct val="100000"/>
+              </a:lnSpc>
+              <a:spcBef>
+                <a:spcPts val="0"/>
+              </a:spcBef>
+              <a:spcAft>
+                <a:spcPts val="0"/>
+              </a:spcAft>
+              <a:buSzPts val="1200"/>
+              <a:buFont typeface="Calibri"/>
+              <a:buChar char="●"/>
+            </a:pPr>
+            <a:r>
+              <a:rPr lang="en" sz="1200" u="sng">
+                <a:solidFill>
+                  <a:schemeClr val="hlink"/>
+                </a:solidFill>
+                <a:latin typeface="Calibri"/>
+                <a:ea typeface="Calibri"/>
+                <a:cs typeface="Calibri"/>
+                <a:sym typeface="Calibri"/>
+                <a:hlinkClick r:id="rId4"/>
+              </a:rPr>
+              <a:t>https://trueup.io/layoffs</a:t>
+            </a:r>
+            <a:r>
+              <a:rPr lang="en" sz="1200">
+                <a:latin typeface="Calibri"/>
+                <a:ea typeface="Calibri"/>
+                <a:cs typeface="Calibri"/>
+                <a:sym typeface="Calibri"/>
+              </a:rPr>
+              <a:t> </a:t>
+            </a:r>
+            <a:r>
+              <a:rPr lang="en" sz="1200" b="0" i="0" u="none" strike="noStrike" cap="none">
+                <a:solidFill>
+                  <a:srgbClr val="000000"/>
+                </a:solidFill>
+                <a:latin typeface="Calibri"/>
+                <a:ea typeface="Calibri"/>
+                <a:cs typeface="Calibri"/>
+                <a:sym typeface="Calibri"/>
+              </a:rPr>
+              <a:t> </a:t>
+            </a:r>
+            <a:endParaRPr sz="1200" b="0" i="0" u="none" strike="noStrike" cap="none">
+              <a:solidFill>
+                <a:srgbClr val="000000"/>
+              </a:solidFill>
+              <a:latin typeface="Calibri"/>
+              <a:ea typeface="Calibri"/>
+              <a:cs typeface="Calibri"/>
+              <a:sym typeface="Calibri"/>
+            </a:endParaRPr>
+          </a:p>
+        </p:txBody>
+      </p:sp>
+      <p:sp>
+        <p:nvSpPr>
+          <p:cNvPr id="313" name="Google Shape;313;p45"/>
+          <p:cNvSpPr txBox="1"/>
+          <p:nvPr/>
+        </p:nvSpPr>
+        <p:spPr>
+          <a:xfrm>
+            <a:off x="5549900" y="3750775"/>
+            <a:ext cx="3360600" cy="1311300"/>
+          </a:xfrm>
+          <a:prstGeom prst="rect">
+            <a:avLst/>
+          </a:prstGeom>
+          <a:solidFill>
+            <a:srgbClr val="FFF2CC"/>
+          </a:solidFill>
+          <a:ln w="9525" cap="flat" cmpd="sng">
+            <a:solidFill>
+              <a:srgbClr val="FF0000"/>
+            </a:solidFill>
+            <a:prstDash val="solid"/>
+            <a:round/>
+            <a:headEnd type="none" w="sm" len="sm"/>
+            <a:tailEnd type="none" w="sm" len="sm"/>
+          </a:ln>
+        </p:spPr>
+        <p:txBody>
+          <a:bodyPr spcFirstLastPara="1" wrap="square" lIns="9125" tIns="9125" rIns="9125" bIns="9125" anchor="t" anchorCtr="0">
+            <a:spAutoFit/>
+          </a:bodyPr>
+          <a:lstStyle/>
+          <a:p>
+            <a:pPr marL="0" marR="0" lvl="0" indent="0" algn="l" rtl="0">
+              <a:lnSpc>
+                <a:spcPct val="100000"/>
+              </a:lnSpc>
+              <a:spcBef>
+                <a:spcPts val="0"/>
+              </a:spcBef>
+              <a:spcAft>
+                <a:spcPts val="0"/>
+              </a:spcAft>
+              <a:buNone/>
+            </a:pPr>
+            <a:r>
+              <a:rPr lang="en" sz="1200" b="1">
+                <a:solidFill>
+                  <a:srgbClr val="FF0000"/>
+                </a:solidFill>
+                <a:latin typeface="Calibri"/>
+                <a:ea typeface="Calibri"/>
+                <a:cs typeface="Calibri"/>
+                <a:sym typeface="Calibri"/>
+              </a:rPr>
+              <a:t>  Tech Layoffs by year (US only):</a:t>
+            </a:r>
+            <a:endParaRPr sz="1200" b="1">
+              <a:solidFill>
+                <a:srgbClr val="FF0000"/>
+              </a:solidFill>
+              <a:latin typeface="Calibri"/>
+              <a:ea typeface="Calibri"/>
+              <a:cs typeface="Calibri"/>
+              <a:sym typeface="Calibri"/>
+            </a:endParaRPr>
+          </a:p>
+          <a:p>
+            <a:pPr marL="228600" marR="0" lvl="1" indent="-133350" algn="l" rtl="0">
+              <a:lnSpc>
+                <a:spcPct val="100000"/>
+              </a:lnSpc>
+              <a:spcBef>
+                <a:spcPts val="0"/>
+              </a:spcBef>
+              <a:spcAft>
+                <a:spcPts val="0"/>
+              </a:spcAft>
+              <a:buSzPts val="1200"/>
+              <a:buFont typeface="Calibri"/>
+              <a:buChar char="○"/>
+            </a:pPr>
+            <a:r>
+              <a:rPr lang="en" sz="1000" b="1">
+                <a:latin typeface="Roboto Mono"/>
+                <a:ea typeface="Roboto Mono"/>
+                <a:cs typeface="Roboto Mono"/>
+                <a:sym typeface="Roboto Mono"/>
+              </a:rPr>
+              <a:t>25K  in 2026 </a:t>
+            </a:r>
+            <a:r>
+              <a:rPr lang="en" sz="1000" b="1">
+                <a:solidFill>
+                  <a:schemeClr val="dk1"/>
+                </a:solidFill>
+                <a:latin typeface="Roboto Mono"/>
+                <a:ea typeface="Roboto Mono"/>
+                <a:cs typeface="Roboto Mono"/>
+                <a:sym typeface="Roboto Mono"/>
+              </a:rPr>
+              <a:t>(as of February 6, 2026)</a:t>
+            </a:r>
+            <a:endParaRPr sz="1000" b="1">
+              <a:latin typeface="Roboto Mono"/>
+              <a:ea typeface="Roboto Mono"/>
+              <a:cs typeface="Roboto Mono"/>
+              <a:sym typeface="Roboto Mono"/>
+            </a:endParaRPr>
+          </a:p>
+          <a:p>
+            <a:pPr marL="228600" marR="0" lvl="1" indent="-133350" algn="l" rtl="0">
+              <a:lnSpc>
+                <a:spcPct val="100000"/>
+              </a:lnSpc>
+              <a:spcBef>
+                <a:spcPts val="0"/>
+              </a:spcBef>
+              <a:spcAft>
+                <a:spcPts val="0"/>
+              </a:spcAft>
+              <a:buSzPts val="1200"/>
+              <a:buFont typeface="Calibri"/>
+              <a:buChar char="○"/>
+            </a:pPr>
+            <a:r>
+              <a:rPr lang="en" sz="1000" b="1">
+                <a:latin typeface="Roboto Mono"/>
+                <a:ea typeface="Roboto Mono"/>
+                <a:cs typeface="Roboto Mono"/>
+                <a:sym typeface="Roboto Mono"/>
+              </a:rPr>
+              <a:t>124K in 2025 </a:t>
+            </a:r>
+            <a:endParaRPr sz="1000" b="1">
+              <a:latin typeface="Roboto Mono"/>
+              <a:ea typeface="Roboto Mono"/>
+              <a:cs typeface="Roboto Mono"/>
+              <a:sym typeface="Roboto Mono"/>
+            </a:endParaRPr>
+          </a:p>
+          <a:p>
+            <a:pPr marL="228600" marR="0" lvl="1" indent="-133350" algn="l" rtl="0">
+              <a:lnSpc>
+                <a:spcPct val="100000"/>
+              </a:lnSpc>
+              <a:spcBef>
+                <a:spcPts val="0"/>
+              </a:spcBef>
+              <a:spcAft>
+                <a:spcPts val="0"/>
+              </a:spcAft>
+              <a:buSzPts val="1200"/>
+              <a:buFont typeface="Calibri"/>
+              <a:buChar char="○"/>
+            </a:pPr>
+            <a:r>
+              <a:rPr lang="en" sz="1000" b="1">
+                <a:latin typeface="Roboto Mono"/>
+                <a:ea typeface="Roboto Mono"/>
+                <a:cs typeface="Roboto Mono"/>
+                <a:sym typeface="Roboto Mono"/>
+              </a:rPr>
+              <a:t>153K in </a:t>
+            </a:r>
+            <a:r>
+              <a:rPr lang="en" sz="1000" b="1">
+                <a:solidFill>
+                  <a:srgbClr val="000000"/>
+                </a:solidFill>
+                <a:latin typeface="Roboto Mono"/>
+                <a:ea typeface="Roboto Mono"/>
+                <a:cs typeface="Roboto Mono"/>
+                <a:sym typeface="Roboto Mono"/>
+              </a:rPr>
+              <a:t>2024</a:t>
+            </a:r>
+            <a:endParaRPr sz="1000" b="1">
+              <a:latin typeface="Roboto Mono"/>
+              <a:ea typeface="Roboto Mono"/>
+              <a:cs typeface="Roboto Mono"/>
+              <a:sym typeface="Roboto Mono"/>
+            </a:endParaRPr>
+          </a:p>
+          <a:p>
+            <a:pPr marL="228600" marR="0" lvl="1" indent="-133350" algn="l" rtl="0">
+              <a:lnSpc>
+                <a:spcPct val="100000"/>
+              </a:lnSpc>
+              <a:spcBef>
+                <a:spcPts val="0"/>
+              </a:spcBef>
+              <a:spcAft>
+                <a:spcPts val="0"/>
+              </a:spcAft>
+              <a:buSzPts val="1200"/>
+              <a:buFont typeface="Calibri"/>
+              <a:buChar char="○"/>
+            </a:pPr>
+            <a:r>
+              <a:rPr lang="en" sz="1000" b="1">
+                <a:latin typeface="Roboto Mono"/>
+                <a:ea typeface="Roboto Mono"/>
+                <a:cs typeface="Roboto Mono"/>
+                <a:sym typeface="Roboto Mono"/>
+              </a:rPr>
+              <a:t>264K in 2023</a:t>
+            </a:r>
+            <a:endParaRPr sz="1000" b="1">
+              <a:latin typeface="Roboto Mono"/>
+              <a:ea typeface="Roboto Mono"/>
+              <a:cs typeface="Roboto Mono"/>
+              <a:sym typeface="Roboto Mono"/>
+            </a:endParaRPr>
+          </a:p>
+          <a:p>
+            <a:pPr marL="228600" marR="0" lvl="1" indent="-133350" algn="l" rtl="0">
+              <a:lnSpc>
+                <a:spcPct val="100000"/>
+              </a:lnSpc>
+              <a:spcBef>
+                <a:spcPts val="0"/>
+              </a:spcBef>
+              <a:spcAft>
+                <a:spcPts val="0"/>
+              </a:spcAft>
+              <a:buSzPts val="1200"/>
+              <a:buFont typeface="Calibri"/>
+              <a:buChar char="○"/>
+            </a:pPr>
+            <a:r>
+              <a:rPr lang="en" sz="1000" b="1">
+                <a:latin typeface="Roboto Mono"/>
+                <a:ea typeface="Roboto Mono"/>
+                <a:cs typeface="Roboto Mono"/>
+                <a:sym typeface="Roboto Mono"/>
+              </a:rPr>
+              <a:t>165K in 2022                  </a:t>
+            </a:r>
+            <a:r>
+              <a:rPr lang="en" sz="1200" i="0" u="sng" strike="noStrike" cap="none">
+                <a:solidFill>
+                  <a:srgbClr val="0097A7"/>
+                </a:solidFill>
+                <a:latin typeface="Calibri"/>
+                <a:ea typeface="Calibri"/>
+                <a:cs typeface="Calibri"/>
+                <a:sym typeface="Calibri"/>
+                <a:hlinkClick r:id="rId3">
+                  <a:extLst>
+                    <a:ext uri="{A12FA001-AC4F-418D-AE19-62706E023703}">
+                      <ahyp:hlinkClr xmlns:ahyp="http://schemas.microsoft.com/office/drawing/2018/hyperlinkcolor" val="tx"/>
+                    </a:ext>
+                  </a:extLst>
+                </a:hlinkClick>
+              </a:rPr>
+              <a:t>https://layoffs.fyi</a:t>
+            </a:r>
+            <a:endParaRPr sz="1200" i="0" u="none" strike="noStrike" cap="none">
+              <a:solidFill>
+                <a:srgbClr val="000000"/>
+              </a:solidFill>
+              <a:latin typeface="Calibri"/>
+              <a:ea typeface="Calibri"/>
+              <a:cs typeface="Calibri"/>
+              <a:sym typeface="Calibri"/>
+            </a:endParaRPr>
+          </a:p>
+        </p:txBody>
+      </p:sp>
+      <p:sp>
+        <p:nvSpPr>
+          <p:cNvPr id="314" name="Google Shape;314;p45"/>
+          <p:cNvSpPr txBox="1"/>
+          <p:nvPr/>
+        </p:nvSpPr>
+        <p:spPr>
+          <a:xfrm>
+            <a:off x="5549900" y="518450"/>
+            <a:ext cx="3558900" cy="942000"/>
+          </a:xfrm>
+          <a:prstGeom prst="rect">
+            <a:avLst/>
+          </a:prstGeom>
+          <a:solidFill>
+            <a:srgbClr val="FFF2CC"/>
+          </a:solidFill>
+          <a:ln w="9525" cap="flat" cmpd="sng">
+            <a:solidFill>
+              <a:srgbClr val="FF0000"/>
+            </a:solidFill>
+            <a:prstDash val="solid"/>
+            <a:round/>
+            <a:headEnd type="none" w="sm" len="sm"/>
+            <a:tailEnd type="none" w="sm" len="sm"/>
+          </a:ln>
+        </p:spPr>
+        <p:txBody>
+          <a:bodyPr spcFirstLastPara="1" wrap="square" lIns="9125" tIns="9125" rIns="9125" bIns="9125" anchor="t" anchorCtr="0">
+            <a:spAutoFit/>
+          </a:bodyPr>
+          <a:lstStyle/>
+          <a:p>
+            <a:pPr marL="0" lvl="0" indent="0" algn="l" rtl="0">
+              <a:spcBef>
+                <a:spcPts val="0"/>
+              </a:spcBef>
+              <a:spcAft>
+                <a:spcPts val="0"/>
+              </a:spcAft>
+              <a:buNone/>
+            </a:pPr>
+            <a:r>
+              <a:rPr lang="en" sz="1200" b="1">
+                <a:solidFill>
+                  <a:srgbClr val="FF0000"/>
+                </a:solidFill>
+                <a:latin typeface="Calibri"/>
+                <a:ea typeface="Calibri"/>
+                <a:cs typeface="Calibri"/>
+                <a:sym typeface="Calibri"/>
+              </a:rPr>
+              <a:t>  The Tech Layoff Tracker</a:t>
+            </a:r>
+            <a:endParaRPr sz="1200" b="1">
+              <a:solidFill>
+                <a:srgbClr val="FF0000"/>
+              </a:solidFill>
+              <a:latin typeface="Calibri"/>
+              <a:ea typeface="Calibri"/>
+              <a:cs typeface="Calibri"/>
+              <a:sym typeface="Calibri"/>
+            </a:endParaRPr>
+          </a:p>
+          <a:p>
+            <a:pPr marL="228600" lvl="0" indent="-133350" algn="l" rtl="0">
+              <a:spcBef>
+                <a:spcPts val="0"/>
+              </a:spcBef>
+              <a:spcAft>
+                <a:spcPts val="0"/>
+              </a:spcAft>
+              <a:buSzPts val="1200"/>
+              <a:buFont typeface="Calibri"/>
+              <a:buChar char="●"/>
+            </a:pPr>
+            <a:r>
+              <a:rPr lang="en" sz="1200">
+                <a:latin typeface="Calibri"/>
+                <a:ea typeface="Calibri"/>
+                <a:cs typeface="Calibri"/>
+                <a:sym typeface="Calibri"/>
+              </a:rPr>
+              <a:t>In 2026: </a:t>
+            </a:r>
+            <a:r>
+              <a:rPr lang="en" sz="1200" b="1">
+                <a:latin typeface="Calibri"/>
+                <a:ea typeface="Calibri"/>
+                <a:cs typeface="Calibri"/>
+                <a:sym typeface="Calibri"/>
+              </a:rPr>
+              <a:t>28,825</a:t>
+            </a:r>
+            <a:r>
+              <a:rPr lang="en" sz="1200">
+                <a:latin typeface="Calibri"/>
+                <a:ea typeface="Calibri"/>
+                <a:cs typeface="Calibri"/>
+                <a:sym typeface="Calibri"/>
+              </a:rPr>
+              <a:t> people laid off (779 per day)</a:t>
+            </a:r>
+            <a:endParaRPr sz="1200">
+              <a:latin typeface="Calibri"/>
+              <a:ea typeface="Calibri"/>
+              <a:cs typeface="Calibri"/>
+              <a:sym typeface="Calibri"/>
+            </a:endParaRPr>
+          </a:p>
+          <a:p>
+            <a:pPr marL="228600" lvl="0" indent="-133350" algn="l" rtl="0">
+              <a:spcBef>
+                <a:spcPts val="0"/>
+              </a:spcBef>
+              <a:spcAft>
+                <a:spcPts val="0"/>
+              </a:spcAft>
+              <a:buSzPts val="1200"/>
+              <a:buFont typeface="Calibri"/>
+              <a:buChar char="●"/>
+            </a:pPr>
+            <a:r>
+              <a:rPr lang="en" sz="1200">
+                <a:latin typeface="Calibri"/>
+                <a:ea typeface="Calibri"/>
+                <a:cs typeface="Calibri"/>
+                <a:sym typeface="Calibri"/>
+              </a:rPr>
+              <a:t>In 2025: </a:t>
+            </a:r>
+            <a:r>
+              <a:rPr lang="en" sz="1200" b="1">
+                <a:latin typeface="Calibri"/>
+                <a:ea typeface="Calibri"/>
+                <a:cs typeface="Calibri"/>
+                <a:sym typeface="Calibri"/>
+              </a:rPr>
+              <a:t>245,953</a:t>
+            </a:r>
+            <a:r>
+              <a:rPr lang="en" sz="1200">
+                <a:latin typeface="Calibri"/>
+                <a:ea typeface="Calibri"/>
+                <a:cs typeface="Calibri"/>
+                <a:sym typeface="Calibri"/>
+              </a:rPr>
+              <a:t> people laid off (674 per day)</a:t>
+            </a:r>
+            <a:endParaRPr sz="1200">
+              <a:latin typeface="Calibri"/>
+              <a:ea typeface="Calibri"/>
+              <a:cs typeface="Calibri"/>
+              <a:sym typeface="Calibri"/>
+            </a:endParaRPr>
+          </a:p>
+          <a:p>
+            <a:pPr marL="228600" lvl="0" indent="-133350" algn="l" rtl="0">
+              <a:spcBef>
+                <a:spcPts val="0"/>
+              </a:spcBef>
+              <a:spcAft>
+                <a:spcPts val="0"/>
+              </a:spcAft>
+              <a:buSzPts val="1200"/>
+              <a:buFont typeface="Calibri"/>
+              <a:buChar char="●"/>
+            </a:pPr>
+            <a:r>
+              <a:rPr lang="en" sz="1200">
+                <a:latin typeface="Calibri"/>
+                <a:ea typeface="Calibri"/>
+                <a:cs typeface="Calibri"/>
+                <a:sym typeface="Calibri"/>
+              </a:rPr>
+              <a:t>In 2024: </a:t>
+            </a:r>
+            <a:r>
+              <a:rPr lang="en" sz="1200" b="1">
+                <a:latin typeface="Calibri"/>
+                <a:ea typeface="Calibri"/>
+                <a:cs typeface="Calibri"/>
+                <a:sym typeface="Calibri"/>
+              </a:rPr>
+              <a:t>238,461</a:t>
+            </a:r>
+            <a:r>
+              <a:rPr lang="en" sz="1200">
+                <a:latin typeface="Calibri"/>
+                <a:ea typeface="Calibri"/>
+                <a:cs typeface="Calibri"/>
+                <a:sym typeface="Calibri"/>
+              </a:rPr>
+              <a:t> people </a:t>
+            </a:r>
+            <a:r>
+              <a:rPr lang="en" sz="1200">
+                <a:solidFill>
+                  <a:srgbClr val="000000"/>
+                </a:solidFill>
+                <a:latin typeface="Calibri"/>
+                <a:ea typeface="Calibri"/>
+                <a:cs typeface="Calibri"/>
+                <a:sym typeface="Calibri"/>
+              </a:rPr>
+              <a:t>laid off</a:t>
+            </a:r>
+            <a:r>
+              <a:rPr lang="en" sz="1200">
+                <a:latin typeface="Calibri"/>
+                <a:ea typeface="Calibri"/>
+                <a:cs typeface="Calibri"/>
+                <a:sym typeface="Calibri"/>
+              </a:rPr>
+              <a:t> (653 per day)</a:t>
+            </a:r>
+            <a:endParaRPr sz="1200">
+              <a:latin typeface="Calibri"/>
+              <a:ea typeface="Calibri"/>
+              <a:cs typeface="Calibri"/>
+              <a:sym typeface="Calibri"/>
+            </a:endParaRPr>
+          </a:p>
+          <a:p>
+            <a:pPr marL="228600" marR="460857" lvl="0" indent="-57150" algn="r" rtl="0">
+              <a:spcBef>
+                <a:spcPts val="0"/>
+              </a:spcBef>
+              <a:spcAft>
+                <a:spcPts val="0"/>
+              </a:spcAft>
+              <a:buNone/>
+            </a:pPr>
+            <a:r>
+              <a:rPr lang="en" sz="1200" u="sng">
+                <a:solidFill>
+                  <a:srgbClr val="0097A7"/>
+                </a:solidFill>
+                <a:latin typeface="Calibri"/>
+                <a:ea typeface="Calibri"/>
+                <a:cs typeface="Calibri"/>
+                <a:sym typeface="Calibri"/>
+                <a:hlinkClick r:id="rId4">
+                  <a:extLst>
+                    <a:ext uri="{A12FA001-AC4F-418D-AE19-62706E023703}">
+                      <ahyp:hlinkClr xmlns:ahyp="http://schemas.microsoft.com/office/drawing/2018/hyperlinkcolor" val="tx"/>
+                    </a:ext>
+                  </a:extLst>
+                </a:hlinkClick>
+              </a:rPr>
+              <a:t>https://trueup.io/layoffs</a:t>
+            </a:r>
+            <a:endParaRPr sz="1200">
+              <a:latin typeface="Calibri"/>
+              <a:ea typeface="Calibri"/>
+              <a:cs typeface="Calibri"/>
+              <a:sym typeface="Calibri"/>
+            </a:endParaRPr>
+          </a:p>
+        </p:txBody>
+      </p:sp>
+      <p:pic>
+        <p:nvPicPr>
+          <p:cNvPr id="315" name="Google Shape;315;p45"/>
+          <p:cNvPicPr preferRelativeResize="0"/>
+          <p:nvPr/>
+        </p:nvPicPr>
+        <p:blipFill>
+          <a:blip r:embed="rId5" cstate="email">
+            <a:alphaModFix/>
+            <a:extLst>
+              <a:ext uri="{28A0092B-C50C-407E-A947-70E740481C1C}">
+                <a14:useLocalDpi xmlns:a14="http://schemas.microsoft.com/office/drawing/2010/main"/>
+              </a:ext>
+            </a:extLst>
+          </a:blip>
+          <a:stretch>
+            <a:fillRect/>
+          </a:stretch>
+        </p:blipFill>
+        <p:spPr>
+          <a:xfrm>
+            <a:off x="63183" y="3150994"/>
+            <a:ext cx="5198610" cy="1970675"/>
+          </a:xfrm>
+          <a:prstGeom prst="rect">
+            <a:avLst/>
+          </a:prstGeom>
+          <a:noFill/>
+          <a:ln w="9525" cap="flat" cmpd="sng">
+            <a:solidFill>
+              <a:srgbClr val="FF0000"/>
+            </a:solidFill>
+            <a:prstDash val="solid"/>
+            <a:round/>
+            <a:headEnd type="none" w="sm" len="sm"/>
+            <a:tailEnd type="none" w="sm" len="sm"/>
+          </a:ln>
+        </p:spPr>
+      </p:pic>
+      <p:pic>
+        <p:nvPicPr>
+          <p:cNvPr id="316" name="Google Shape;316;p45"/>
+          <p:cNvPicPr preferRelativeResize="0"/>
+          <p:nvPr/>
+        </p:nvPicPr>
+        <p:blipFill>
+          <a:blip r:embed="rId6" cstate="email">
+            <a:alphaModFix/>
+            <a:extLst>
+              <a:ext uri="{28A0092B-C50C-407E-A947-70E740481C1C}">
+                <a14:useLocalDpi xmlns:a14="http://schemas.microsoft.com/office/drawing/2010/main"/>
+              </a:ext>
+            </a:extLst>
+          </a:blip>
+          <a:stretch>
+            <a:fillRect/>
+          </a:stretch>
+        </p:blipFill>
+        <p:spPr>
+          <a:xfrm>
+            <a:off x="63175" y="453138"/>
+            <a:ext cx="5198627" cy="2667024"/>
+          </a:xfrm>
+          <a:prstGeom prst="rect">
+            <a:avLst/>
+          </a:prstGeom>
+          <a:noFill/>
+          <a:ln w="9525" cap="flat" cmpd="sng">
+            <a:solidFill>
+              <a:srgbClr val="FF0000"/>
+            </a:solidFill>
+            <a:prstDash val="solid"/>
+            <a:round/>
+            <a:headEnd type="none" w="sm" len="sm"/>
+            <a:tailEnd type="none" w="sm" len="sm"/>
+          </a:ln>
+        </p:spPr>
+      </p:pic>
+    </p:spTree>
+  </p:cSld>
+  <p:clrMapOvr>
+    <a:masterClrMapping/>
+  </p:clrMapOvr>
+</p:sld>
+</file>
+
+<file path=ppt/slides/slide32.xml><?xml version="1.0" encoding="utf-8"?>
+<p:sld xmlns:a="http://schemas.openxmlformats.org/drawingml/2006/main" xmlns:r="http://schemas.openxmlformats.org/officeDocument/2006/relationships" xmlns:p="http://schemas.openxmlformats.org/presentationml/2006/main">
+  <p:cSld>
+    <p:spTree>
+      <p:nvGrpSpPr>
+        <p:cNvPr id="1" name="Shape 320"/>
+        <p:cNvGrpSpPr/>
+        <p:nvPr/>
+      </p:nvGrpSpPr>
+      <p:grpSpPr>
+        <a:xfrm>
+          <a:off x="0" y="0"/>
+          <a:ext cx="0" cy="0"/>
+          <a:chOff x="0" y="0"/>
+          <a:chExt cx="0" cy="0"/>
+        </a:xfrm>
+      </p:grpSpPr>
+      <p:pic>
+        <p:nvPicPr>
+          <p:cNvPr id="321" name="Google Shape;321;p46"/>
+          <p:cNvPicPr preferRelativeResize="0"/>
+          <p:nvPr/>
+        </p:nvPicPr>
+        <p:blipFill rotWithShape="1">
+          <a:blip r:embed="rId3" cstate="email">
+            <a:alphaModFix/>
+            <a:extLst>
+              <a:ext uri="{28A0092B-C50C-407E-A947-70E740481C1C}">
+                <a14:useLocalDpi xmlns:a14="http://schemas.microsoft.com/office/drawing/2010/main"/>
+              </a:ext>
+            </a:extLst>
+          </a:blip>
+          <a:srcRect/>
+          <a:stretch/>
+        </p:blipFill>
+        <p:spPr>
+          <a:xfrm>
+            <a:off x="645525" y="1203525"/>
+            <a:ext cx="1570556" cy="1570556"/>
+          </a:xfrm>
+          <a:prstGeom prst="rect">
+            <a:avLst/>
+          </a:prstGeom>
+          <a:noFill/>
+          <a:ln>
+            <a:noFill/>
+          </a:ln>
+        </p:spPr>
+      </p:pic>
+      <p:sp>
+        <p:nvSpPr>
+          <p:cNvPr id="322" name="Google Shape;322;p46"/>
+          <p:cNvSpPr txBox="1"/>
+          <p:nvPr/>
+        </p:nvSpPr>
+        <p:spPr>
+          <a:xfrm>
+            <a:off x="-25625" y="-14775"/>
+            <a:ext cx="3355800" cy="569400"/>
+          </a:xfrm>
+          <a:prstGeom prst="rect">
+            <a:avLst/>
+          </a:prstGeom>
+          <a:noFill/>
+          <a:ln>
+            <a:noFill/>
+          </a:ln>
+        </p:spPr>
+        <p:txBody>
+          <a:bodyPr spcFirstLastPara="1" wrap="square" lIns="91425" tIns="91425" rIns="91425" bIns="91425" anchor="t" anchorCtr="0">
+            <a:spAutoFit/>
+          </a:bodyPr>
+          <a:lstStyle/>
+          <a:p>
+            <a:pPr marL="0" marR="0" lvl="0" indent="0" algn="l" rtl="0">
+              <a:lnSpc>
+                <a:spcPct val="100000"/>
+              </a:lnSpc>
+              <a:spcBef>
+                <a:spcPts val="0"/>
+              </a:spcBef>
+              <a:spcAft>
+                <a:spcPts val="0"/>
+              </a:spcAft>
+              <a:buClr>
+                <a:srgbClr val="000000"/>
+              </a:buClr>
+              <a:buSzPts val="2500"/>
+              <a:buFont typeface="Arial"/>
+              <a:buNone/>
+            </a:pPr>
+            <a:r>
+              <a:rPr lang="en" sz="2500" b="1" i="0" u="none" strike="noStrike" cap="none">
+                <a:solidFill>
+                  <a:srgbClr val="000000"/>
+                </a:solidFill>
+                <a:latin typeface="Calibri"/>
+                <a:ea typeface="Calibri"/>
+                <a:cs typeface="Calibri"/>
+                <a:sym typeface="Calibri"/>
+              </a:rPr>
+              <a:t>About the Speaker</a:t>
+            </a:r>
+            <a:endParaRPr sz="2500" b="1" i="0" u="none" strike="noStrike" cap="none">
+              <a:solidFill>
+                <a:srgbClr val="000000"/>
+              </a:solidFill>
+              <a:latin typeface="Calibri"/>
+              <a:ea typeface="Calibri"/>
+              <a:cs typeface="Calibri"/>
+              <a:sym typeface="Calibri"/>
+            </a:endParaRPr>
+          </a:p>
+        </p:txBody>
+      </p:sp>
+      <p:sp>
+        <p:nvSpPr>
+          <p:cNvPr id="323" name="Google Shape;323;p46"/>
+          <p:cNvSpPr txBox="1"/>
+          <p:nvPr/>
+        </p:nvSpPr>
+        <p:spPr>
+          <a:xfrm>
+            <a:off x="3330175" y="878750"/>
+            <a:ext cx="5621700" cy="3309300"/>
+          </a:xfrm>
+          <a:prstGeom prst="rect">
+            <a:avLst/>
+          </a:prstGeom>
+          <a:noFill/>
+          <a:ln>
+            <a:noFill/>
+          </a:ln>
+        </p:spPr>
+        <p:txBody>
+          <a:bodyPr spcFirstLastPara="1" wrap="square" lIns="91425" tIns="91425" rIns="91425" bIns="91425" anchor="t" anchorCtr="0">
+            <a:spAutoFit/>
+          </a:bodyPr>
+          <a:lstStyle/>
+          <a:p>
+            <a:pPr marL="0" marR="0" lvl="0" indent="0" algn="l" rtl="0">
+              <a:lnSpc>
+                <a:spcPct val="100000"/>
+              </a:lnSpc>
+              <a:spcBef>
+                <a:spcPts val="0"/>
+              </a:spcBef>
+              <a:spcAft>
+                <a:spcPts val="0"/>
+              </a:spcAft>
+              <a:buClr>
+                <a:schemeClr val="dk1"/>
+              </a:buClr>
+              <a:buSzPts val="1100"/>
+              <a:buFont typeface="Arial"/>
+              <a:buNone/>
+            </a:pPr>
+            <a:r>
+              <a:rPr lang="en" sz="2500" b="1" i="0" u="none" strike="noStrike" cap="none">
+                <a:solidFill>
+                  <a:srgbClr val="000000"/>
+                </a:solidFill>
+                <a:latin typeface="Calibri"/>
+                <a:ea typeface="Calibri"/>
+                <a:cs typeface="Calibri"/>
+                <a:sym typeface="Calibri"/>
+              </a:rPr>
+              <a:t>Lev Selector, Ph.D.</a:t>
+            </a:r>
+            <a:endParaRPr sz="2500" b="1" i="0" u="none" strike="noStrike" cap="none">
+              <a:solidFill>
+                <a:srgbClr val="000000"/>
+              </a:solidFill>
+              <a:latin typeface="Calibri"/>
+              <a:ea typeface="Calibri"/>
+              <a:cs typeface="Calibri"/>
+              <a:sym typeface="Calibri"/>
+            </a:endParaRPr>
+          </a:p>
+          <a:p>
+            <a:pPr marL="0" marR="0" lvl="0" indent="0" algn="l" rtl="0">
+              <a:lnSpc>
+                <a:spcPct val="100000"/>
+              </a:lnSpc>
+              <a:spcBef>
+                <a:spcPts val="0"/>
+              </a:spcBef>
+              <a:spcAft>
+                <a:spcPts val="0"/>
+              </a:spcAft>
+              <a:buClr>
+                <a:schemeClr val="dk1"/>
+              </a:buClr>
+              <a:buSzPts val="1100"/>
+              <a:buFont typeface="Arial"/>
+              <a:buNone/>
+            </a:pPr>
+            <a:endParaRPr sz="1800" b="0" i="0" u="none" strike="noStrike" cap="none">
+              <a:solidFill>
+                <a:srgbClr val="000000"/>
+              </a:solidFill>
+              <a:latin typeface="Calibri"/>
+              <a:ea typeface="Calibri"/>
+              <a:cs typeface="Calibri"/>
+              <a:sym typeface="Calibri"/>
+            </a:endParaRPr>
+          </a:p>
+          <a:p>
+            <a:pPr marL="457200" marR="0" lvl="0" indent="-330200" algn="l" rtl="0">
+              <a:lnSpc>
+                <a:spcPct val="100000"/>
+              </a:lnSpc>
+              <a:spcBef>
+                <a:spcPts val="0"/>
+              </a:spcBef>
+              <a:spcAft>
+                <a:spcPts val="0"/>
+              </a:spcAft>
+              <a:buClr>
+                <a:srgbClr val="000000"/>
+              </a:buClr>
+              <a:buSzPts val="1600"/>
+              <a:buFont typeface="Calibri"/>
+              <a:buChar char="●"/>
+            </a:pPr>
+            <a:r>
+              <a:rPr lang="en" sz="1600" b="0" i="0" u="none" strike="noStrike" cap="none">
+                <a:solidFill>
+                  <a:schemeClr val="dk1"/>
+                </a:solidFill>
+                <a:latin typeface="Calibri"/>
+                <a:ea typeface="Calibri"/>
+                <a:cs typeface="Calibri"/>
+                <a:sym typeface="Calibri"/>
+              </a:rPr>
+              <a:t>40+ years of software engineering, data science, and building teams (hiring, training, and managing)</a:t>
+            </a:r>
+            <a:endParaRPr sz="1600" b="0" i="0" u="none" strike="noStrike" cap="none">
+              <a:solidFill>
+                <a:schemeClr val="dk1"/>
+              </a:solidFill>
+              <a:latin typeface="Calibri"/>
+              <a:ea typeface="Calibri"/>
+              <a:cs typeface="Calibri"/>
+              <a:sym typeface="Calibri"/>
+            </a:endParaRPr>
+          </a:p>
+          <a:p>
+            <a:pPr marL="457200" marR="0" lvl="0" indent="-330200" algn="l" rtl="0">
+              <a:lnSpc>
+                <a:spcPct val="100000"/>
+              </a:lnSpc>
+              <a:spcBef>
+                <a:spcPts val="0"/>
+              </a:spcBef>
+              <a:spcAft>
+                <a:spcPts val="0"/>
+              </a:spcAft>
+              <a:buClr>
+                <a:srgbClr val="000000"/>
+              </a:buClr>
+              <a:buSzPts val="1600"/>
+              <a:buFont typeface="Calibri"/>
+              <a:buChar char="●"/>
+            </a:pPr>
+            <a:r>
+              <a:rPr lang="en" sz="1600" b="0" i="0" u="none" strike="noStrike" cap="none">
+                <a:solidFill>
+                  <a:schemeClr val="dk1"/>
+                </a:solidFill>
+                <a:latin typeface="Calibri"/>
+                <a:ea typeface="Calibri"/>
+                <a:cs typeface="Calibri"/>
+                <a:sym typeface="Calibri"/>
+              </a:rPr>
+              <a:t>Ph.D. in mathematical modeling and computer simulations</a:t>
+            </a:r>
+            <a:endParaRPr sz="1600" b="0" i="0" u="none" strike="noStrike" cap="none">
+              <a:solidFill>
+                <a:srgbClr val="000000"/>
+              </a:solidFill>
+              <a:latin typeface="Calibri"/>
+              <a:ea typeface="Calibri"/>
+              <a:cs typeface="Calibri"/>
+              <a:sym typeface="Calibri"/>
+            </a:endParaRPr>
+          </a:p>
+          <a:p>
+            <a:pPr marL="0" marR="0" lvl="0" indent="0" algn="l" rtl="0">
+              <a:lnSpc>
+                <a:spcPct val="100000"/>
+              </a:lnSpc>
+              <a:spcBef>
+                <a:spcPts val="0"/>
+              </a:spcBef>
+              <a:spcAft>
+                <a:spcPts val="0"/>
+              </a:spcAft>
+              <a:buClr>
+                <a:schemeClr val="dk1"/>
+              </a:buClr>
+              <a:buSzPts val="1100"/>
+              <a:buFont typeface="Arial"/>
+              <a:buNone/>
+            </a:pPr>
+            <a:endParaRPr sz="1600" b="0" i="0" u="none" strike="noStrike" cap="none">
+              <a:solidFill>
+                <a:srgbClr val="000000"/>
+              </a:solidFill>
+              <a:latin typeface="Calibri"/>
+              <a:ea typeface="Calibri"/>
+              <a:cs typeface="Calibri"/>
+              <a:sym typeface="Calibri"/>
+            </a:endParaRPr>
+          </a:p>
+          <a:p>
+            <a:pPr marL="0" marR="0" lvl="0" indent="0" algn="l" rtl="0">
+              <a:lnSpc>
+                <a:spcPct val="100000"/>
+              </a:lnSpc>
+              <a:spcBef>
+                <a:spcPts val="0"/>
+              </a:spcBef>
+              <a:spcAft>
+                <a:spcPts val="0"/>
+              </a:spcAft>
+              <a:buClr>
+                <a:srgbClr val="000000"/>
+              </a:buClr>
+              <a:buSzPts val="1600"/>
+              <a:buFont typeface="Arial"/>
+              <a:buNone/>
+            </a:pPr>
+            <a:r>
+              <a:rPr lang="en" sz="1600" b="0" i="0" u="none" strike="noStrike" cap="none">
+                <a:solidFill>
+                  <a:srgbClr val="000000"/>
+                </a:solidFill>
+                <a:latin typeface="Calibri"/>
+                <a:ea typeface="Calibri"/>
+                <a:cs typeface="Calibri"/>
+                <a:sym typeface="Calibri"/>
+              </a:rPr>
+              <a:t>Interests: </a:t>
+            </a:r>
+            <a:endParaRPr sz="1600" b="0" i="0" u="none" strike="noStrike" cap="none">
+              <a:solidFill>
+                <a:srgbClr val="000000"/>
+              </a:solidFill>
+              <a:latin typeface="Calibri"/>
+              <a:ea typeface="Calibri"/>
+              <a:cs typeface="Calibri"/>
+              <a:sym typeface="Calibri"/>
+            </a:endParaRPr>
+          </a:p>
+          <a:p>
+            <a:pPr marL="457200" marR="0" lvl="0" indent="-330200" algn="l" rtl="0">
+              <a:lnSpc>
+                <a:spcPct val="100000"/>
+              </a:lnSpc>
+              <a:spcBef>
+                <a:spcPts val="0"/>
+              </a:spcBef>
+              <a:spcAft>
+                <a:spcPts val="0"/>
+              </a:spcAft>
+              <a:buClr>
+                <a:srgbClr val="000000"/>
+              </a:buClr>
+              <a:buSzPts val="1600"/>
+              <a:buFont typeface="Calibri"/>
+              <a:buChar char="●"/>
+            </a:pPr>
+            <a:r>
+              <a:rPr lang="en" sz="1600" b="0" i="0" u="none" strike="noStrike" cap="none">
+                <a:solidFill>
+                  <a:schemeClr val="dk1"/>
+                </a:solidFill>
+                <a:latin typeface="Calibri"/>
+                <a:ea typeface="Calibri"/>
+                <a:cs typeface="Calibri"/>
+                <a:sym typeface="Calibri"/>
+              </a:rPr>
+              <a:t>Generative AI, Using LLM with your data</a:t>
+            </a:r>
+            <a:endParaRPr sz="1600" b="0" i="0" u="none" strike="noStrike" cap="none">
+              <a:solidFill>
+                <a:schemeClr val="dk1"/>
+              </a:solidFill>
+              <a:latin typeface="Calibri"/>
+              <a:ea typeface="Calibri"/>
+              <a:cs typeface="Calibri"/>
+              <a:sym typeface="Calibri"/>
+            </a:endParaRPr>
+          </a:p>
+          <a:p>
+            <a:pPr marL="457200" marR="0" lvl="0" indent="-330200" algn="l" rtl="0">
+              <a:lnSpc>
+                <a:spcPct val="100000"/>
+              </a:lnSpc>
+              <a:spcBef>
+                <a:spcPts val="0"/>
+              </a:spcBef>
+              <a:spcAft>
+                <a:spcPts val="0"/>
+              </a:spcAft>
+              <a:buClr>
+                <a:schemeClr val="dk1"/>
+              </a:buClr>
+              <a:buSzPts val="1600"/>
+              <a:buFont typeface="Calibri"/>
+              <a:buChar char="●"/>
+            </a:pPr>
+            <a:r>
+              <a:rPr lang="en" sz="1600" b="0" i="0" u="none" strike="noStrike" cap="none">
+                <a:solidFill>
+                  <a:schemeClr val="dk1"/>
+                </a:solidFill>
+                <a:latin typeface="Calibri"/>
+                <a:ea typeface="Calibri"/>
+                <a:cs typeface="Calibri"/>
+                <a:sym typeface="Calibri"/>
+              </a:rPr>
+              <a:t>Local AI for Local Private Data</a:t>
+            </a:r>
+            <a:endParaRPr sz="1600" b="0" i="0" u="none" strike="noStrike" cap="none">
+              <a:solidFill>
+                <a:schemeClr val="dk1"/>
+              </a:solidFill>
+              <a:latin typeface="Calibri"/>
+              <a:ea typeface="Calibri"/>
+              <a:cs typeface="Calibri"/>
+              <a:sym typeface="Calibri"/>
+            </a:endParaRPr>
+          </a:p>
+          <a:p>
+            <a:pPr marL="457200" marR="0" lvl="0" indent="-330200" algn="l" rtl="0">
+              <a:lnSpc>
+                <a:spcPct val="100000"/>
+              </a:lnSpc>
+              <a:spcBef>
+                <a:spcPts val="0"/>
+              </a:spcBef>
+              <a:spcAft>
+                <a:spcPts val="0"/>
+              </a:spcAft>
+              <a:buClr>
+                <a:srgbClr val="000000"/>
+              </a:buClr>
+              <a:buSzPts val="1600"/>
+              <a:buFont typeface="Calibri"/>
+              <a:buChar char="●"/>
+            </a:pPr>
+            <a:r>
+              <a:rPr lang="en" sz="1600" b="0" i="0" u="none" strike="noStrike" cap="none">
+                <a:solidFill>
+                  <a:srgbClr val="000000"/>
+                </a:solidFill>
+                <a:latin typeface="Calibri"/>
+                <a:ea typeface="Calibri"/>
+                <a:cs typeface="Calibri"/>
+                <a:sym typeface="Calibri"/>
+              </a:rPr>
+              <a:t>Cloud architecture, fin-tech, application security</a:t>
+            </a:r>
+            <a:endParaRPr sz="1600" b="0" i="0" u="none" strike="noStrike" cap="none">
+              <a:solidFill>
+                <a:srgbClr val="000000"/>
+              </a:solidFill>
+              <a:latin typeface="Calibri"/>
+              <a:ea typeface="Calibri"/>
+              <a:cs typeface="Calibri"/>
+              <a:sym typeface="Calibri"/>
+            </a:endParaRPr>
+          </a:p>
+          <a:p>
+            <a:pPr marL="0" marR="0" lvl="0" indent="0" algn="l" rtl="0">
+              <a:lnSpc>
+                <a:spcPct val="100000"/>
+              </a:lnSpc>
+              <a:spcBef>
+                <a:spcPts val="0"/>
+              </a:spcBef>
+              <a:spcAft>
+                <a:spcPts val="0"/>
+              </a:spcAft>
+              <a:buClr>
+                <a:srgbClr val="000000"/>
+              </a:buClr>
+              <a:buSzPts val="1600"/>
+              <a:buFont typeface="Arial"/>
+              <a:buNone/>
+            </a:pPr>
+            <a:endParaRPr sz="1600" b="0" i="0" u="none" strike="noStrike" cap="none">
+              <a:solidFill>
+                <a:srgbClr val="000000"/>
+              </a:solidFill>
+              <a:latin typeface="Calibri"/>
+              <a:ea typeface="Calibri"/>
+              <a:cs typeface="Calibri"/>
+              <a:sym typeface="Calibri"/>
+            </a:endParaRPr>
+          </a:p>
+          <a:p>
+            <a:pPr marL="0" marR="0" lvl="0" indent="0" algn="l" rtl="0">
+              <a:lnSpc>
+                <a:spcPct val="100000"/>
+              </a:lnSpc>
+              <a:spcBef>
+                <a:spcPts val="0"/>
+              </a:spcBef>
+              <a:spcAft>
+                <a:spcPts val="0"/>
+              </a:spcAft>
+              <a:buClr>
+                <a:srgbClr val="000000"/>
+              </a:buClr>
+              <a:buSzPts val="1600"/>
+              <a:buFont typeface="Arial"/>
+              <a:buNone/>
+            </a:pPr>
+            <a:r>
+              <a:rPr lang="en" sz="1600" b="0" i="0" u="none" strike="noStrike" cap="none">
+                <a:solidFill>
+                  <a:srgbClr val="000000"/>
+                </a:solidFill>
+                <a:latin typeface="Calibri"/>
+                <a:ea typeface="Calibri"/>
+                <a:cs typeface="Calibri"/>
+                <a:sym typeface="Calibri"/>
+              </a:rPr>
+              <a:t>Find/connect: Linkedin, GitHub, YouTube, Google</a:t>
+            </a:r>
+            <a:endParaRPr sz="1600" b="0" i="0" u="none" strike="noStrike" cap="none">
+              <a:solidFill>
+                <a:srgbClr val="000000"/>
+              </a:solidFill>
+              <a:latin typeface="Calibri"/>
+              <a:ea typeface="Calibri"/>
+              <a:cs typeface="Calibri"/>
+              <a:sym typeface="Calibri"/>
+            </a:endParaRPr>
+          </a:p>
+        </p:txBody>
+      </p:sp>
+      <p:pic>
+        <p:nvPicPr>
+          <p:cNvPr id="324" name="Google Shape;324;p46"/>
+          <p:cNvPicPr preferRelativeResize="0"/>
+          <p:nvPr/>
+        </p:nvPicPr>
+        <p:blipFill rotWithShape="1">
+          <a:blip r:embed="rId4" cstate="email">
+            <a:alphaModFix/>
+            <a:extLst>
+              <a:ext uri="{28A0092B-C50C-407E-A947-70E740481C1C}">
+                <a14:useLocalDpi xmlns:a14="http://schemas.microsoft.com/office/drawing/2010/main"/>
+              </a:ext>
+            </a:extLst>
+          </a:blip>
+          <a:srcRect/>
+          <a:stretch/>
+        </p:blipFill>
+        <p:spPr>
+          <a:xfrm>
+            <a:off x="1001578" y="3664175"/>
+            <a:ext cx="858450" cy="311906"/>
+          </a:xfrm>
+          <a:prstGeom prst="rect">
+            <a:avLst/>
+          </a:prstGeom>
+          <a:noFill/>
+          <a:ln>
+            <a:noFill/>
+          </a:ln>
+        </p:spPr>
+      </p:pic>
+      <p:sp>
+        <p:nvSpPr>
+          <p:cNvPr id="325" name="Google Shape;325;p46"/>
+          <p:cNvSpPr txBox="1"/>
+          <p:nvPr/>
+        </p:nvSpPr>
+        <p:spPr>
+          <a:xfrm>
+            <a:off x="735103" y="4005903"/>
+            <a:ext cx="1391400" cy="431100"/>
+          </a:xfrm>
+          <a:prstGeom prst="rect">
+            <a:avLst/>
+          </a:prstGeom>
+          <a:noFill/>
+          <a:ln>
+            <a:noFill/>
+          </a:ln>
+        </p:spPr>
+        <p:txBody>
+          <a:bodyPr spcFirstLastPara="1" wrap="square" lIns="91425" tIns="91425" rIns="91425" bIns="91425" anchor="t" anchorCtr="0">
+            <a:spAutoFit/>
+          </a:bodyPr>
+          <a:lstStyle/>
+          <a:p>
+            <a:pPr marL="0" marR="0" lvl="0" indent="0" algn="l" rtl="0">
+              <a:lnSpc>
+                <a:spcPct val="100000"/>
+              </a:lnSpc>
+              <a:spcBef>
+                <a:spcPts val="0"/>
+              </a:spcBef>
+              <a:spcAft>
+                <a:spcPts val="0"/>
+              </a:spcAft>
+              <a:buClr>
+                <a:srgbClr val="000000"/>
+              </a:buClr>
+              <a:buSzPts val="1600"/>
+              <a:buFont typeface="Arial"/>
+              <a:buNone/>
+            </a:pPr>
+            <a:r>
+              <a:rPr lang="en" sz="1600" b="0" i="0" u="sng" strike="noStrike" cap="none">
+                <a:solidFill>
+                  <a:schemeClr val="hlink"/>
+                </a:solidFill>
+                <a:latin typeface="Calibri"/>
+                <a:ea typeface="Calibri"/>
+                <a:cs typeface="Calibri"/>
+                <a:sym typeface="Calibri"/>
+                <a:hlinkClick r:id="rId5"/>
+              </a:rPr>
+              <a:t>https://eais.ai</a:t>
+            </a:r>
+            <a:r>
+              <a:rPr lang="en" sz="1600" b="0" i="0" u="none" strike="noStrike" cap="none">
+                <a:solidFill>
+                  <a:srgbClr val="000000"/>
+                </a:solidFill>
+                <a:latin typeface="Calibri"/>
+                <a:ea typeface="Calibri"/>
+                <a:cs typeface="Calibri"/>
+                <a:sym typeface="Calibri"/>
+              </a:rPr>
+              <a:t> </a:t>
+            </a:r>
+            <a:endParaRPr sz="1600" b="0" i="0" u="none" strike="noStrike" cap="none">
+              <a:solidFill>
+                <a:srgbClr val="000000"/>
+              </a:solidFill>
+              <a:latin typeface="Calibri"/>
+              <a:ea typeface="Calibri"/>
+              <a:cs typeface="Calibri"/>
+              <a:sym typeface="Calibri"/>
+            </a:endParaRPr>
+          </a:p>
+        </p:txBody>
+      </p:sp>
+      <p:sp>
+        <p:nvSpPr>
+          <p:cNvPr id="326" name="Google Shape;326;p46"/>
+          <p:cNvSpPr txBox="1"/>
+          <p:nvPr/>
+        </p:nvSpPr>
+        <p:spPr>
+          <a:xfrm>
+            <a:off x="383803" y="4360974"/>
+            <a:ext cx="2094000" cy="431100"/>
+          </a:xfrm>
+          <a:prstGeom prst="rect">
+            <a:avLst/>
+          </a:prstGeom>
+          <a:noFill/>
+          <a:ln>
+            <a:noFill/>
+          </a:ln>
+        </p:spPr>
+        <p:txBody>
+          <a:bodyPr spcFirstLastPara="1" wrap="square" lIns="91425" tIns="91425" rIns="91425" bIns="91425" anchor="t" anchorCtr="0">
+            <a:spAutoFit/>
+          </a:bodyPr>
+          <a:lstStyle/>
+          <a:p>
+            <a:pPr marL="0" marR="0" lvl="0" indent="0" algn="ctr" rtl="0">
+              <a:lnSpc>
+                <a:spcPct val="100000"/>
+              </a:lnSpc>
+              <a:spcBef>
+                <a:spcPts val="0"/>
+              </a:spcBef>
+              <a:spcAft>
+                <a:spcPts val="0"/>
+              </a:spcAft>
+              <a:buClr>
+                <a:schemeClr val="dk1"/>
+              </a:buClr>
+              <a:buSzPts val="1100"/>
+              <a:buFont typeface="Arial"/>
+              <a:buNone/>
+            </a:pPr>
+            <a:r>
+              <a:rPr lang="en" sz="1600" b="0" i="0" u="none" strike="noStrike" cap="none">
+                <a:solidFill>
+                  <a:srgbClr val="000000"/>
+                </a:solidFill>
+                <a:latin typeface="Calibri"/>
+                <a:ea typeface="Calibri"/>
+                <a:cs typeface="Calibri"/>
+                <a:sym typeface="Calibri"/>
+              </a:rPr>
+              <a:t>Enterprise AI Systems</a:t>
+            </a:r>
+            <a:endParaRPr sz="1600" b="0" i="0" u="none" strike="noStrike" cap="none">
+              <a:solidFill>
+                <a:srgbClr val="000000"/>
+              </a:solidFill>
+              <a:latin typeface="Calibri"/>
+              <a:ea typeface="Calibri"/>
+              <a:cs typeface="Calibri"/>
+              <a:sym typeface="Calibri"/>
+            </a:endParaRPr>
+          </a:p>
+        </p:txBody>
+      </p:sp>
+    </p:spTree>
+  </p:cSld>
+  <p:clrMapOvr>
+    <a:masterClrMapping/>
+  </p:clrMapOvr>
+</p:sld>
+</file>
+
+<file path=ppt/slides/slide33.xml><?xml version="1.0" encoding="utf-8"?>
+<p:sld xmlns:a="http://schemas.openxmlformats.org/drawingml/2006/main" xmlns:r="http://schemas.openxmlformats.org/officeDocument/2006/relationships" xmlns:p="http://schemas.openxmlformats.org/presentationml/2006/main">
+  <p:cSld>
+    <p:spTree>
+      <p:nvGrpSpPr>
+        <p:cNvPr id="1" name="Shape 330"/>
+        <p:cNvGrpSpPr/>
+        <p:nvPr/>
+      </p:nvGrpSpPr>
+      <p:grpSpPr>
+        <a:xfrm>
+          <a:off x="0" y="0"/>
+          <a:ext cx="0" cy="0"/>
+          <a:chOff x="0" y="0"/>
+          <a:chExt cx="0" cy="0"/>
+        </a:xfrm>
+      </p:grpSpPr>
+      <p:sp>
+        <p:nvSpPr>
+          <p:cNvPr id="331" name="Google Shape;331;p47"/>
           <p:cNvSpPr txBox="1"/>
           <p:nvPr/>
         </p:nvSpPr>
@@ -43347,6 +46889,287 @@
           </a:ln>
         </p:spPr>
       </p:pic>
+      <p:sp>
+        <p:nvSpPr>
+          <p:cNvPr id="96" name="Google Shape;96;p18"/>
+          <p:cNvSpPr txBox="1"/>
+          <p:nvPr/>
+        </p:nvSpPr>
+        <p:spPr>
+          <a:xfrm>
+            <a:off x="55075" y="2838250"/>
+            <a:ext cx="4392600" cy="942000"/>
+          </a:xfrm>
+          <a:prstGeom prst="rect">
+            <a:avLst/>
+          </a:prstGeom>
+          <a:solidFill>
+            <a:srgbClr val="FFF2CC"/>
+          </a:solidFill>
+          <a:ln w="9525" cap="flat" cmpd="sng">
+            <a:solidFill>
+              <a:srgbClr val="FF0000"/>
+            </a:solidFill>
+            <a:prstDash val="solid"/>
+            <a:round/>
+            <a:headEnd type="none" w="sm" len="sm"/>
+            <a:tailEnd type="none" w="sm" len="sm"/>
+          </a:ln>
+        </p:spPr>
+        <p:txBody>
+          <a:bodyPr spcFirstLastPara="1" wrap="square" lIns="9125" tIns="9125" rIns="9125" bIns="9125" anchor="t" anchorCtr="0">
+            <a:spAutoFit/>
+          </a:bodyPr>
+          <a:lstStyle/>
+          <a:p>
+            <a:pPr marL="171450" marR="0" lvl="0" indent="-133350" algn="l" rtl="0">
+              <a:lnSpc>
+                <a:spcPct val="100000"/>
+              </a:lnSpc>
+              <a:spcBef>
+                <a:spcPts val="0"/>
+              </a:spcBef>
+              <a:spcAft>
+                <a:spcPts val="0"/>
+              </a:spcAft>
+              <a:buClr>
+                <a:srgbClr val="FF0000"/>
+              </a:buClr>
+              <a:buSzPts val="1200"/>
+              <a:buFont typeface="Calibri"/>
+              <a:buChar char="●"/>
+            </a:pPr>
+            <a:r>
+              <a:rPr lang="en" sz="1200" b="1">
+                <a:solidFill>
+                  <a:srgbClr val="FF0000"/>
+                </a:solidFill>
+                <a:latin typeface="Calibri"/>
+                <a:ea typeface="Calibri"/>
+                <a:cs typeface="Calibri"/>
+                <a:sym typeface="Calibri"/>
+              </a:rPr>
+              <a:t>LeCun's AMI raises $1B</a:t>
+            </a:r>
+            <a:endParaRPr sz="1200" b="1">
+              <a:solidFill>
+                <a:srgbClr val="FF0000"/>
+              </a:solidFill>
+              <a:latin typeface="Calibri"/>
+              <a:ea typeface="Calibri"/>
+              <a:cs typeface="Calibri"/>
+              <a:sym typeface="Calibri"/>
+            </a:endParaRPr>
+          </a:p>
+          <a:p>
+            <a:pPr marL="171450" marR="0" lvl="0" indent="-133350" algn="l" rtl="0">
+              <a:lnSpc>
+                <a:spcPct val="100000"/>
+              </a:lnSpc>
+              <a:spcBef>
+                <a:spcPts val="0"/>
+              </a:spcBef>
+              <a:spcAft>
+                <a:spcPts val="0"/>
+              </a:spcAft>
+              <a:buClr>
+                <a:schemeClr val="dk1"/>
+              </a:buClr>
+              <a:buSzPts val="1200"/>
+              <a:buFont typeface="Calibri"/>
+              <a:buChar char="●"/>
+            </a:pPr>
+            <a:r>
+              <a:rPr lang="en" sz="1200">
+                <a:solidFill>
+                  <a:schemeClr val="dk1"/>
+                </a:solidFill>
+                <a:latin typeface="Calibri"/>
+                <a:ea typeface="Calibri"/>
+                <a:cs typeface="Calibri"/>
+                <a:sym typeface="Calibri"/>
+              </a:rPr>
+              <a:t>The new company, </a:t>
+            </a:r>
+            <a:r>
+              <a:rPr lang="en" sz="1200" b="1">
+                <a:solidFill>
+                  <a:srgbClr val="FF0000"/>
+                </a:solidFill>
+                <a:latin typeface="Calibri"/>
+                <a:ea typeface="Calibri"/>
+                <a:cs typeface="Calibri"/>
+                <a:sym typeface="Calibri"/>
+              </a:rPr>
+              <a:t>Advanced Machine Intelligence</a:t>
+            </a:r>
+            <a:r>
+              <a:rPr lang="en" sz="1200">
+                <a:solidFill>
+                  <a:schemeClr val="dk1"/>
+                </a:solidFill>
+                <a:latin typeface="Calibri"/>
+                <a:ea typeface="Calibri"/>
+                <a:cs typeface="Calibri"/>
+                <a:sym typeface="Calibri"/>
+              </a:rPr>
+              <a:t>, will build "</a:t>
+            </a:r>
+            <a:r>
+              <a:rPr lang="en" sz="1200" b="1">
+                <a:solidFill>
+                  <a:srgbClr val="3C78D8"/>
+                </a:solidFill>
+                <a:latin typeface="Calibri"/>
+                <a:ea typeface="Calibri"/>
+                <a:cs typeface="Calibri"/>
+                <a:sym typeface="Calibri"/>
+              </a:rPr>
+              <a:t>world models</a:t>
+            </a:r>
+            <a:r>
+              <a:rPr lang="en" sz="1200">
+                <a:solidFill>
+                  <a:schemeClr val="dk1"/>
+                </a:solidFill>
+                <a:latin typeface="Calibri"/>
+                <a:ea typeface="Calibri"/>
+                <a:cs typeface="Calibri"/>
+                <a:sym typeface="Calibri"/>
+              </a:rPr>
+              <a:t>" that understand the physical world</a:t>
+            </a:r>
+            <a:endParaRPr sz="1200">
+              <a:solidFill>
+                <a:schemeClr val="dk1"/>
+              </a:solidFill>
+              <a:latin typeface="Calibri"/>
+              <a:ea typeface="Calibri"/>
+              <a:cs typeface="Calibri"/>
+              <a:sym typeface="Calibri"/>
+            </a:endParaRPr>
+          </a:p>
+          <a:p>
+            <a:pPr marL="171450" marR="0" lvl="0" indent="-133350" algn="l" rtl="0">
+              <a:lnSpc>
+                <a:spcPct val="100000"/>
+              </a:lnSpc>
+              <a:spcBef>
+                <a:spcPts val="0"/>
+              </a:spcBef>
+              <a:spcAft>
+                <a:spcPts val="0"/>
+              </a:spcAft>
+              <a:buClr>
+                <a:schemeClr val="dk1"/>
+              </a:buClr>
+              <a:buSzPts val="1200"/>
+              <a:buFont typeface="Calibri"/>
+              <a:buChar char="●"/>
+            </a:pPr>
+            <a:r>
+              <a:rPr lang="en" sz="1200">
+                <a:solidFill>
+                  <a:schemeClr val="dk1"/>
+                </a:solidFill>
+                <a:latin typeface="Calibri"/>
+                <a:ea typeface="Calibri"/>
+                <a:cs typeface="Calibri"/>
+                <a:sym typeface="Calibri"/>
+              </a:rPr>
+              <a:t>This is a different approach than current text-based AI. </a:t>
+            </a:r>
+            <a:endParaRPr sz="1200">
+              <a:solidFill>
+                <a:schemeClr val="dk1"/>
+              </a:solidFill>
+              <a:latin typeface="Calibri"/>
+              <a:ea typeface="Calibri"/>
+              <a:cs typeface="Calibri"/>
+              <a:sym typeface="Calibri"/>
+            </a:endParaRPr>
+          </a:p>
+          <a:p>
+            <a:pPr marL="171450" marR="0" lvl="0" indent="-133350" algn="l" rtl="0">
+              <a:lnSpc>
+                <a:spcPct val="100000"/>
+              </a:lnSpc>
+              <a:spcBef>
+                <a:spcPts val="0"/>
+              </a:spcBef>
+              <a:spcAft>
+                <a:spcPts val="0"/>
+              </a:spcAft>
+              <a:buClr>
+                <a:schemeClr val="dk1"/>
+              </a:buClr>
+              <a:buSzPts val="1200"/>
+              <a:buFont typeface="Calibri"/>
+              <a:buChar char="●"/>
+            </a:pPr>
+            <a:r>
+              <a:rPr lang="en" sz="1200">
+                <a:solidFill>
+                  <a:schemeClr val="dk1"/>
+                </a:solidFill>
+                <a:latin typeface="Calibri"/>
+                <a:ea typeface="Calibri"/>
+                <a:cs typeface="Calibri"/>
+                <a:sym typeface="Calibri"/>
+              </a:rPr>
+              <a:t>Investors include Jeff Bezos and Nvidia.</a:t>
+            </a:r>
+            <a:endParaRPr sz="1200">
+              <a:solidFill>
+                <a:schemeClr val="dk1"/>
+              </a:solidFill>
+              <a:latin typeface="Calibri"/>
+              <a:ea typeface="Calibri"/>
+              <a:cs typeface="Calibri"/>
+              <a:sym typeface="Calibri"/>
+            </a:endParaRPr>
+          </a:p>
+        </p:txBody>
+      </p:sp>
+      <p:pic>
+        <p:nvPicPr>
+          <p:cNvPr id="97" name="Google Shape;97;p18"/>
+          <p:cNvPicPr preferRelativeResize="0"/>
+          <p:nvPr/>
+        </p:nvPicPr>
+        <p:blipFill>
+          <a:blip r:embed="rId7" cstate="email">
+            <a:alphaModFix/>
+            <a:extLst>
+              <a:ext uri="{28A0092B-C50C-407E-A947-70E740481C1C}">
+                <a14:useLocalDpi xmlns:a14="http://schemas.microsoft.com/office/drawing/2010/main"/>
+              </a:ext>
+            </a:extLst>
+          </a:blip>
+          <a:stretch>
+            <a:fillRect/>
+          </a:stretch>
+        </p:blipFill>
+        <p:spPr>
+          <a:xfrm>
+            <a:off x="4813875" y="2222804"/>
+            <a:ext cx="3114925" cy="1557450"/>
+          </a:xfrm>
+          <a:prstGeom prst="rect">
+            <a:avLst/>
+          </a:prstGeom>
+          <a:noFill/>
+          <a:ln w="9525" cap="flat" cmpd="sng">
+            <a:solidFill>
+              <a:srgbClr val="FF0000"/>
+            </a:solidFill>
+            <a:prstDash val="solid"/>
+            <a:round/>
+            <a:headEnd type="none" w="sm" len="sm"/>
+            <a:tailEnd type="none" w="sm" len="sm"/>
+          </a:ln>
+        </p:spPr>
+      </p:pic>
     </p:spTree>
   </p:cSld>
   <p:clrMapOvr>
@@ -43360,7 +47183,7 @@
   <p:cSld>
     <p:spTree>
       <p:nvGrpSpPr>
-        <p:cNvPr id="1" name="Shape 99"/>
+        <p:cNvPr id="1" name="Shape 101"/>
         <p:cNvGrpSpPr/>
         <p:nvPr/>
       </p:nvGrpSpPr>
@@ -43374,7 +47197,7 @@
       </p:grpSpPr>
       <p:sp>
         <p:nvSpPr>
-          <p:cNvPr id="100" name="Google Shape;100;p19"/>
+          <p:cNvPr id="102" name="Google Shape;102;p19"/>
           <p:cNvSpPr txBox="1"/>
           <p:nvPr/>
         </p:nvSpPr>
@@ -43723,7 +47546,7 @@
       </p:sp>
       <p:pic>
         <p:nvPicPr>
-          <p:cNvPr id="101" name="Google Shape;101;p19"/>
+          <p:cNvPr id="103" name="Google Shape;103;p19"/>
           <p:cNvPicPr preferRelativeResize="0"/>
           <p:nvPr/>
         </p:nvPicPr>
@@ -43773,7 +47596,7 @@
   <p:cSld>
     <p:spTree>
       <p:nvGrpSpPr>
-        <p:cNvPr id="1" name="Shape 105"/>
+        <p:cNvPr id="1" name="Shape 107"/>
         <p:cNvGrpSpPr/>
         <p:nvPr/>
       </p:nvGrpSpPr>
@@ -43787,7 +47610,7 @@
       </p:grpSpPr>
       <p:sp>
         <p:nvSpPr>
-          <p:cNvPr id="106" name="Google Shape;106;p20"/>
+          <p:cNvPr id="108" name="Google Shape;108;p20"/>
           <p:cNvSpPr txBox="1"/>
           <p:nvPr/>
         </p:nvSpPr>
@@ -43853,7 +47676,7 @@
       </p:sp>
       <p:sp>
         <p:nvSpPr>
-          <p:cNvPr id="107" name="Google Shape;107;p20"/>
+          <p:cNvPr id="109" name="Google Shape;109;p20"/>
           <p:cNvSpPr txBox="1"/>
           <p:nvPr/>
         </p:nvSpPr>
@@ -44150,7 +47973,7 @@
       </p:sp>
       <p:sp>
         <p:nvSpPr>
-          <p:cNvPr id="108" name="Google Shape;108;p20"/>
+          <p:cNvPr id="110" name="Google Shape;110;p20"/>
           <p:cNvSpPr txBox="1"/>
           <p:nvPr/>
         </p:nvSpPr>
@@ -44607,6 +48430,84 @@
           </a:p>
         </p:txBody>
       </p:sp>
+      <p:pic>
+        <p:nvPicPr>
+          <p:cNvPr id="111" name="Google Shape;111;p20"/>
+          <p:cNvPicPr preferRelativeResize="0"/>
+          <p:nvPr/>
+        </p:nvPicPr>
+        <p:blipFill>
+          <a:blip r:embed="rId8" cstate="email">
+            <a:alphaModFix/>
+            <a:extLst>
+              <a:ext uri="{28A0092B-C50C-407E-A947-70E740481C1C}">
+                <a14:useLocalDpi xmlns:a14="http://schemas.microsoft.com/office/drawing/2010/main"/>
+              </a:ext>
+            </a:extLst>
+          </a:blip>
+          <a:stretch>
+            <a:fillRect/>
+          </a:stretch>
+        </p:blipFill>
+        <p:spPr>
+          <a:xfrm>
+            <a:off x="4729750" y="607549"/>
+            <a:ext cx="3907050" cy="2197699"/>
+          </a:xfrm>
+          <a:prstGeom prst="rect">
+            <a:avLst/>
+          </a:prstGeom>
+          <a:noFill/>
+          <a:ln w="9525" cap="flat" cmpd="sng">
+            <a:solidFill>
+              <a:srgbClr val="FF0000"/>
+            </a:solidFill>
+            <a:prstDash val="solid"/>
+            <a:round/>
+            <a:headEnd type="none" w="sm" len="sm"/>
+            <a:tailEnd type="none" w="sm" len="sm"/>
+          </a:ln>
+        </p:spPr>
+      </p:pic>
+      <p:pic>
+        <p:nvPicPr>
+          <p:cNvPr id="112" name="Google Shape;112;p20"/>
+          <p:cNvPicPr preferRelativeResize="0"/>
+          <p:nvPr/>
+        </p:nvPicPr>
+        <p:blipFill>
+          <a:blip r:embed="rId9" cstate="email">
+            <a:alphaModFix/>
+            <a:extLst>
+              <a:ext uri="{28A0092B-C50C-407E-A947-70E740481C1C}">
+                <a14:useLocalDpi xmlns:a14="http://schemas.microsoft.com/office/drawing/2010/main"/>
+              </a:ext>
+            </a:extLst>
+          </a:blip>
+          <a:stretch>
+            <a:fillRect/>
+          </a:stretch>
+        </p:blipFill>
+        <p:spPr>
+          <a:xfrm>
+            <a:off x="4729750" y="2928975"/>
+            <a:ext cx="2873129" cy="1698300"/>
+          </a:xfrm>
+          <a:prstGeom prst="rect">
+            <a:avLst/>
+          </a:prstGeom>
+          <a:noFill/>
+          <a:ln w="9525" cap="flat" cmpd="sng">
+            <a:solidFill>
+              <a:srgbClr val="FF0000"/>
+            </a:solidFill>
+            <a:prstDash val="solid"/>
+            <a:round/>
+            <a:headEnd type="none" w="sm" len="sm"/>
+            <a:tailEnd type="none" w="sm" len="sm"/>
+          </a:ln>
+        </p:spPr>
+      </p:pic>
     </p:spTree>
   </p:cSld>
   <p:clrMapOvr>
@@ -44620,7 +48521,7 @@
   <p:cSld>
     <p:spTree>
       <p:nvGrpSpPr>
-        <p:cNvPr id="1" name="Shape 112"/>
+        <p:cNvPr id="1" name="Shape 116"/>
         <p:cNvGrpSpPr/>
         <p:nvPr/>
       </p:nvGrpSpPr>
@@ -44634,7 +48535,7 @@
       </p:grpSpPr>
       <p:sp>
         <p:nvSpPr>
-          <p:cNvPr id="113" name="Google Shape;113;p21"/>
+          <p:cNvPr id="117" name="Google Shape;117;p21"/>
           <p:cNvSpPr txBox="1"/>
           <p:nvPr/>
         </p:nvSpPr>
@@ -44700,7 +48601,7 @@
       </p:sp>
       <p:sp>
         <p:nvSpPr>
-          <p:cNvPr id="114" name="Google Shape;114;p21"/>
+          <p:cNvPr id="118" name="Google Shape;118;p21"/>
           <p:cNvSpPr txBox="1"/>
           <p:nvPr/>
         </p:nvSpPr>
@@ -45278,7 +49179,7 @@
       </p:sp>
       <p:pic>
         <p:nvPicPr>
-          <p:cNvPr id="115" name="Google Shape;115;p21"/>
+          <p:cNvPr id="119" name="Google Shape;119;p21"/>
           <p:cNvPicPr preferRelativeResize="0"/>
           <p:nvPr/>
         </p:nvPicPr>
@@ -45317,7 +49218,7 @@
       </p:pic>
       <p:pic>
         <p:nvPicPr>
-          <p:cNvPr id="116" name="Google Shape;116;p21"/>
+          <p:cNvPr id="120" name="Google Shape;120;p21"/>
           <p:cNvPicPr preferRelativeResize="0"/>
           <p:nvPr/>
         </p:nvPicPr>
@@ -45366,7 +49267,7 @@
   <p:cSld>
     <p:spTree>
       <p:nvGrpSpPr>
-        <p:cNvPr id="1" name="Shape 120"/>
+        <p:cNvPr id="1" name="Shape 124"/>
         <p:cNvGrpSpPr/>
         <p:nvPr/>
       </p:nvGrpSpPr>
@@ -45380,7 +49281,7 @@
       </p:grpSpPr>
       <p:sp>
         <p:nvSpPr>
-          <p:cNvPr id="121" name="Google Shape;121;p22"/>
+          <p:cNvPr id="125" name="Google Shape;125;p22"/>
           <p:cNvSpPr txBox="1"/>
           <p:nvPr/>
         </p:nvSpPr>
@@ -45446,7 +49347,7 @@
       </p:sp>
       <p:sp>
         <p:nvSpPr>
-          <p:cNvPr id="122" name="Google Shape;122;p22"/>
+          <p:cNvPr id="126" name="Google Shape;126;p22"/>
           <p:cNvSpPr txBox="1"/>
           <p:nvPr/>
         </p:nvSpPr>
@@ -45769,6 +49670,45 @@
           </a:p>
         </p:txBody>
       </p:sp>
+      <p:pic>
+        <p:nvPicPr>
+          <p:cNvPr id="127" name="Google Shape;127;p22"/>
+          <p:cNvPicPr preferRelativeResize="0"/>
+          <p:nvPr/>
+        </p:nvPicPr>
+        <p:blipFill>
+          <a:blip r:embed="rId4" cstate="email">
+            <a:alphaModFix/>
+            <a:extLst>
+              <a:ext uri="{28A0092B-C50C-407E-A947-70E740481C1C}">
+                <a14:useLocalDpi xmlns:a14="http://schemas.microsoft.com/office/drawing/2010/main"/>
+              </a:ext>
+            </a:extLst>
+          </a:blip>
+          <a:stretch>
+            <a:fillRect/>
+          </a:stretch>
+        </p:blipFill>
+        <p:spPr>
+          <a:xfrm>
+            <a:off x="4727425" y="398725"/>
+            <a:ext cx="3690200" cy="1989050"/>
+          </a:xfrm>
+          <a:prstGeom prst="rect">
+            <a:avLst/>
+          </a:prstGeom>
+          <a:noFill/>
+          <a:ln w="9525" cap="flat" cmpd="sng">
+            <a:solidFill>
+              <a:srgbClr val="FF0000"/>
+            </a:solidFill>
+            <a:prstDash val="solid"/>
+            <a:round/>
+            <a:headEnd type="none" w="sm" len="sm"/>
+            <a:tailEnd type="none" w="sm" len="sm"/>
+          </a:ln>
+        </p:spPr>
+      </p:pic>
     </p:spTree>
   </p:cSld>
   <p:clrMapOvr>
@@ -45782,7 +49722,7 @@
   <p:cSld>
     <p:spTree>
       <p:nvGrpSpPr>
-        <p:cNvPr id="1" name="Shape 126"/>
+        <p:cNvPr id="1" name="Shape 131"/>
         <p:cNvGrpSpPr/>
         <p:nvPr/>
       </p:nvGrpSpPr>
@@ -45796,7 +49736,7 @@
       </p:grpSpPr>
       <p:sp>
         <p:nvSpPr>
-          <p:cNvPr id="127" name="Google Shape;127;p23"/>
+          <p:cNvPr id="132" name="Google Shape;132;p23"/>
           <p:cNvSpPr txBox="1"/>
           <p:nvPr/>
         </p:nvSpPr>
@@ -45862,7 +49802,7 @@
       </p:sp>
       <p:sp>
         <p:nvSpPr>
-          <p:cNvPr id="128" name="Google Shape;128;p23"/>
+          <p:cNvPr id="133" name="Google Shape;133;p23"/>
           <p:cNvSpPr txBox="1"/>
           <p:nvPr/>
         </p:nvSpPr>
@@ -46016,7 +49956,7 @@
       </p:sp>
       <p:sp>
         <p:nvSpPr>
-          <p:cNvPr id="129" name="Google Shape;129;p23"/>
+          <p:cNvPr id="134" name="Google Shape;134;p23"/>
           <p:cNvSpPr txBox="1"/>
           <p:nvPr/>
         </p:nvSpPr>
@@ -46130,7 +50070,7 @@
       </p:sp>
       <p:sp>
         <p:nvSpPr>
-          <p:cNvPr id="130" name="Google Shape;130;p23"/>
+          <p:cNvPr id="135" name="Google Shape;135;p23"/>
           <p:cNvSpPr txBox="1"/>
           <p:nvPr/>
         </p:nvSpPr>
@@ -46188,7 +50128,7 @@
                 <a:cs typeface="Calibri"/>
                 <a:sym typeface="Calibri"/>
               </a:rPr>
-              <a:t>Xiaomi launched MClaw</a:t>
+              <a:t>Xiaomi launched MiClaw</a:t>
             </a:r>
             <a:r>
               <a:rPr lang="en" sz="1200">
@@ -46334,6 +50274,123 @@
           </a:p>
         </p:txBody>
       </p:sp>
+      <p:pic>
+        <p:nvPicPr>
+          <p:cNvPr id="136" name="Google Shape;136;p23"/>
+          <p:cNvPicPr preferRelativeResize="0"/>
+          <p:nvPr/>
+        </p:nvPicPr>
+        <p:blipFill>
+          <a:blip r:embed="rId3" cstate="email">
+            <a:alphaModFix/>
+            <a:extLst>
+              <a:ext uri="{28A0092B-C50C-407E-A947-70E740481C1C}">
+                <a14:useLocalDpi xmlns:a14="http://schemas.microsoft.com/office/drawing/2010/main"/>
+              </a:ext>
+            </a:extLst>
+          </a:blip>
+          <a:stretch>
+            <a:fillRect/>
+          </a:stretch>
+        </p:blipFill>
+        <p:spPr>
+          <a:xfrm>
+            <a:off x="4600225" y="63650"/>
+            <a:ext cx="2445076" cy="1201000"/>
+          </a:xfrm>
+          <a:prstGeom prst="rect">
+            <a:avLst/>
+          </a:prstGeom>
+          <a:noFill/>
+          <a:ln w="9525" cap="flat" cmpd="sng">
+            <a:solidFill>
+              <a:srgbClr val="FF0000"/>
+            </a:solidFill>
+            <a:prstDash val="solid"/>
+            <a:round/>
+            <a:headEnd type="none" w="sm" len="sm"/>
+            <a:tailEnd type="none" w="sm" len="sm"/>
+          </a:ln>
+        </p:spPr>
+      </p:pic>
+      <p:pic>
+        <p:nvPicPr>
+          <p:cNvPr id="137" name="Google Shape;137;p23"/>
+          <p:cNvPicPr preferRelativeResize="0"/>
+          <p:nvPr/>
+        </p:nvPicPr>
+        <p:blipFill>
+          <a:blip r:embed="rId4" cstate="email">
+            <a:alphaModFix/>
+            <a:extLst>
+              <a:ext uri="{28A0092B-C50C-407E-A947-70E740481C1C}">
+                <a14:useLocalDpi xmlns:a14="http://schemas.microsoft.com/office/drawing/2010/main"/>
+              </a:ext>
+            </a:extLst>
+          </a:blip>
+          <a:stretch>
+            <a:fillRect/>
+          </a:stretch>
+        </p:blipFill>
+        <p:spPr>
+          <a:xfrm>
+            <a:off x="4600225" y="1416950"/>
+            <a:ext cx="2608985" cy="1126800"/>
+          </a:xfrm>
+          <a:prstGeom prst="rect">
+            <a:avLst/>
+          </a:prstGeom>
+          <a:noFill/>
+          <a:ln w="9525" cap="flat" cmpd="sng">
+            <a:solidFill>
+              <a:srgbClr val="FF0000"/>
+            </a:solidFill>
+            <a:prstDash val="solid"/>
+            <a:round/>
+            <a:headEnd type="none" w="sm" len="sm"/>
+            <a:tailEnd type="none" w="sm" len="sm"/>
+          </a:ln>
+        </p:spPr>
+      </p:pic>
+      <p:pic>
+        <p:nvPicPr>
+          <p:cNvPr id="138" name="Google Shape;138;p23"/>
+          <p:cNvPicPr preferRelativeResize="0"/>
+          <p:nvPr/>
+        </p:nvPicPr>
+        <p:blipFill>
+          <a:blip r:embed="rId5" cstate="email">
+            <a:alphaModFix/>
+            <a:extLst>
+              <a:ext uri="{28A0092B-C50C-407E-A947-70E740481C1C}">
+                <a14:useLocalDpi xmlns:a14="http://schemas.microsoft.com/office/drawing/2010/main"/>
+              </a:ext>
+            </a:extLst>
+          </a:blip>
+          <a:stretch>
+            <a:fillRect/>
+          </a:stretch>
+        </p:blipFill>
+        <p:spPr>
+          <a:xfrm>
+            <a:off x="4600225" y="2696050"/>
+            <a:ext cx="4189257" cy="863325"/>
+          </a:xfrm>
+          <a:prstGeom prst="rect">
+            <a:avLst/>
+          </a:prstGeom>
+          <a:noFill/>
+          <a:ln w="9525" cap="flat" cmpd="sng">
+            <a:solidFill>
+              <a:srgbClr val="FF0000"/>
+            </a:solidFill>
+            <a:prstDash val="solid"/>
+            <a:round/>
+            <a:headEnd type="none" w="sm" len="sm"/>
+            <a:tailEnd type="none" w="sm" len="sm"/>
+          </a:ln>
+        </p:spPr>
+      </p:pic>
     </p:spTree>
   </p:cSld>
   <p:clrMapOvr>
